--- a/src/report_generator/presets/templates/portfolio-metrics.pptx
+++ b/src/report_generator/presets/templates/portfolio-metrics.pptx
@@ -6,10 +6,10 @@
     <p:sldMasterId id="2147483794" r:id="rId5"/>
   </p:sldMasterIdLst>
   <p:notesMasterIdLst>
-    <p:notesMasterId r:id="rId50"/>
+    <p:notesMasterId r:id="rId49"/>
   </p:notesMasterIdLst>
   <p:handoutMasterIdLst>
-    <p:handoutMasterId r:id="rId51"/>
+    <p:handoutMasterId r:id="rId50"/>
   </p:handoutMasterIdLst>
   <p:sldIdLst>
     <p:sldId id="1973" r:id="rId6"/>
@@ -55,7 +55,6 @@
     <p:sldId id="11637" r:id="rId46"/>
     <p:sldId id="11638" r:id="rId47"/>
     <p:sldId id="11639" r:id="rId48"/>
-    <p:sldId id="11640" r:id="rId49"/>
   </p:sldIdLst>
   <p:sldSz cx="12192000" cy="6858000"/>
   <p:notesSz cx="6858000" cy="9144000"/>
@@ -206,7 +205,6 @@
             <p14:sldId id="11637"/>
             <p14:sldId id="11638"/>
             <p14:sldId id="11639"/>
-            <p14:sldId id="11640"/>
           </p14:sldIdLst>
         </p14:section>
       </p14:sectionLst>
@@ -46936,1058 +46934,6 @@
 </p:sld>
 </file>
 
-<file path=ppt/slides/slide44.xml><?xml version="1.0" encoding="utf-8"?>
-<p:sld xmlns:a="http://schemas.openxmlformats.org/drawingml/2006/main" xmlns:r="http://schemas.openxmlformats.org/officeDocument/2006/relationships" xmlns:p="http://schemas.openxmlformats.org/presentationml/2006/main">
-  <p:cSld>
-    <p:spTree>
-      <p:nvGrpSpPr>
-        <p:cNvPr id="1" name=""/>
-        <p:cNvGrpSpPr/>
-        <p:nvPr/>
-      </p:nvGrpSpPr>
-      <p:grpSpPr>
-        <a:xfrm>
-          <a:off x="0" y="0"/>
-          <a:ext cx="0" cy="0"/>
-          <a:chOff x="0" y="0"/>
-          <a:chExt cx="0" cy="0"/>
-        </a:xfrm>
-      </p:grpSpPr>
-      <p:sp>
-        <p:nvSpPr>
-          <p:cNvPr id="2" name="Text Placeholder 1"/>
-          <p:cNvSpPr>
-            <a:spLocks noGrp="1"/>
-          </p:cNvSpPr>
-          <p:nvPr>
-            <p:ph type="body" sz="quarter" idx="12"/>
-          </p:nvPr>
-        </p:nvSpPr>
-        <p:spPr>
-          <a:xfrm>
-            <a:off x="381600" y="129568"/>
-            <a:ext cx="1663129" cy="228209"/>
-          </a:xfrm>
-        </p:spPr>
-        <p:txBody>
-          <a:bodyPr>
-            <a:spAutoFit/>
-          </a:bodyPr>
-          <a:lstStyle/>
-          <a:p>
-            <a:r>
-              <a:rPr lang="en-US" dirty="0"/>
-              <a:t>Open Source Health</a:t>
-            </a:r>
-          </a:p>
-        </p:txBody>
-      </p:sp>
-      <p:sp>
-        <p:nvSpPr>
-          <p:cNvPr id="3" name="Content Placeholder 2"/>
-          <p:cNvSpPr>
-            <a:spLocks noGrp="1"/>
-          </p:cNvSpPr>
-          <p:nvPr>
-            <p:ph sz="quarter" idx="13"/>
-          </p:nvPr>
-        </p:nvSpPr>
-        <p:spPr/>
-        <p:txBody>
-          <a:bodyPr/>
-          <a:lstStyle/>
-          <a:p>
-            <a:endParaRPr/>
-          </a:p>
-        </p:txBody>
-      </p:sp>
-      <p:sp>
-        <p:nvSpPr>
-          <p:cNvPr id="4" name="Title 3"/>
-          <p:cNvSpPr>
-            <a:spLocks noGrp="1"/>
-          </p:cNvSpPr>
-          <p:nvPr>
-            <p:ph type="title"/>
-          </p:nvPr>
-        </p:nvSpPr>
-        <p:spPr/>
-        <p:txBody>
-          <a:bodyPr>
-            <a:spAutoFit/>
-          </a:bodyPr>
-          <a:lstStyle/>
-          <a:p>
-            <a:r>
-              <a:rPr lang="en-US" dirty="0"/>
-              <a:t>Overview of Stability metric for portfolio CUSTOMER_NAME</a:t>
-            </a:r>
-          </a:p>
-        </p:txBody>
-      </p:sp>
-      <p:sp>
-        <p:nvSpPr>
-          <p:cNvPr id="7" name="Rectangle 6">
-            <a:extLst>
-              <a:ext uri="{FF2B5EF4-FFF2-40B4-BE49-F238E27FC236}">
-                <a16:creationId xmlns:a16="http://schemas.microsoft.com/office/drawing/2014/main" id="{4D956AE0-666A-B966-0B15-61A5E6C88F75}"/>
-              </a:ext>
-            </a:extLst>
-          </p:cNvPr>
-          <p:cNvSpPr/>
-          <p:nvPr/>
-        </p:nvSpPr>
-        <p:spPr>
-          <a:xfrm>
-            <a:off x="0" y="1390132"/>
-            <a:ext cx="12192000" cy="4927867"/>
-          </a:xfrm>
-          <a:prstGeom prst="rect">
-            <a:avLst/>
-          </a:prstGeom>
-          <a:solidFill>
-            <a:schemeClr val="bg1"/>
-          </a:solidFill>
-          <a:ln>
-            <a:noFill/>
-          </a:ln>
-          <a:effectLst>
-            <a:outerShdw blurRad="190500" dist="38100" dir="2700000" algn="tl" rotWithShape="0">
-              <a:prstClr val="black">
-                <a:alpha val="15000"/>
-              </a:prstClr>
-            </a:outerShdw>
-          </a:effectLst>
-        </p:spPr>
-        <p:style>
-          <a:lnRef idx="2">
-            <a:schemeClr val="accent1">
-              <a:shade val="50000"/>
-            </a:schemeClr>
-          </a:lnRef>
-          <a:fillRef idx="1">
-            <a:schemeClr val="accent1"/>
-          </a:fillRef>
-          <a:effectRef idx="0">
-            <a:schemeClr val="accent1"/>
-          </a:effectRef>
-          <a:fontRef idx="minor">
-            <a:schemeClr val="lt1"/>
-          </a:fontRef>
-        </p:style>
-        <p:txBody>
-          <a:bodyPr lIns="731520" tIns="72000" rIns="108000" bIns="72000" rtlCol="0" anchor="ctr"/>
-          <a:lstStyle/>
-          <a:p>
-            <a:endParaRPr lang="nl-NL" sz="1200" b="1" noProof="0" dirty="0">
-              <a:solidFill>
-                <a:schemeClr val="accent1"/>
-              </a:solidFill>
-            </a:endParaRPr>
-          </a:p>
-        </p:txBody>
-      </p:sp>
-      <p:sp>
-        <p:nvSpPr>
-          <p:cNvPr id="5" name="Rectangle 1">
-            <a:extLst>
-              <a:ext uri="{FF2B5EF4-FFF2-40B4-BE49-F238E27FC236}">
-                <a16:creationId xmlns:a16="http://schemas.microsoft.com/office/drawing/2014/main" id="{5865897F-56E3-D0DA-D709-1ABB8A25DE16}"/>
-              </a:ext>
-            </a:extLst>
-          </p:cNvPr>
-          <p:cNvSpPr/>
-          <p:nvPr/>
-        </p:nvSpPr>
-        <p:spPr>
-          <a:xfrm>
-            <a:off x="661616" y="2961823"/>
-            <a:ext cx="10867079" cy="2905513"/>
-          </a:xfrm>
-          <a:prstGeom prst="rect">
-            <a:avLst/>
-          </a:prstGeom>
-          <a:solidFill>
-            <a:srgbClr val="F0089F"/>
-          </a:solidFill>
-          <a:ln>
-            <a:noFill/>
-          </a:ln>
-        </p:spPr>
-        <p:style>
-          <a:lnRef idx="2">
-            <a:schemeClr val="accent1">
-              <a:shade val="50000"/>
-            </a:schemeClr>
-          </a:lnRef>
-          <a:fillRef idx="1">
-            <a:schemeClr val="accent1"/>
-          </a:fillRef>
-          <a:effectRef idx="0">
-            <a:schemeClr val="accent1"/>
-          </a:effectRef>
-          <a:fontRef idx="minor">
-            <a:schemeClr val="lt1"/>
-          </a:fontRef>
-        </p:style>
-        <p:txBody>
-          <a:bodyPr lIns="108000" tIns="72000" rIns="108000" bIns="72000" rtlCol="0" anchor="ctr"/>
-          <a:lstStyle/>
-          <a:p>
-            <a:pPr algn="ctr"/>
-            <a:r>
-              <a:rPr lang="en-US" sz="1600" dirty="0">
-                <a:solidFill>
-                  <a:schemeClr val="bg1"/>
-                </a:solidFill>
-              </a:rPr>
-              <a:t>PORTFOLIO_PERIOD_OSH_STABILITY_GROUPED_BY_TEAM</a:t>
-            </a:r>
-          </a:p>
-        </p:txBody>
-      </p:sp>
-      <p:sp>
-        <p:nvSpPr>
-          <p:cNvPr id="1071" name="TextBox 1071"/>
-          <p:cNvSpPr txBox="1"/>
-          <p:nvPr/>
-        </p:nvSpPr>
-        <p:spPr>
-          <a:xfrm>
-            <a:off x="2817202" y="5844428"/>
-            <a:ext cx="1276460" cy="223844"/>
-          </a:xfrm>
-          <a:prstGeom prst="rect">
-            <a:avLst/>
-          </a:prstGeom>
-          <a:noFill/>
-        </p:spPr>
-        <p:txBody>
-          <a:bodyPr wrap="none" lIns="90000" rtlCol="0" anchor="t">
-            <a:spAutoFit/>
-          </a:bodyPr>
-          <a:lstStyle/>
-          <a:p>
-            <a:pPr algn="l">
-              <a:lnSpc>
-                <a:spcPct val="113000"/>
-              </a:lnSpc>
-            </a:pPr>
-            <a:r>
-              <a:rPr lang="en-GB" sz="800" dirty="0">
-                <a:solidFill>
-                  <a:schemeClr val="tx2"/>
-                </a:solidFill>
-              </a:rPr>
-              <a:t>Systems grouped by </a:t>
-            </a:r>
-            <a:r>
-              <a:rPr lang="en-GB" sz="800" b="1" dirty="0">
-                <a:solidFill>
-                  <a:schemeClr val="tx2"/>
-                </a:solidFill>
-              </a:rPr>
-              <a:t>Team</a:t>
-            </a:r>
-          </a:p>
-        </p:txBody>
-      </p:sp>
-      <p:sp>
-        <p:nvSpPr>
-          <p:cNvPr id="1060" name="TextBox 1060"/>
-          <p:cNvSpPr txBox="1"/>
-          <p:nvPr/>
-        </p:nvSpPr>
-        <p:spPr>
-          <a:xfrm>
-            <a:off x="223094" y="1411288"/>
-            <a:ext cx="11515250" cy="1560512"/>
-          </a:xfrm>
-          <a:prstGeom prst="rect">
-            <a:avLst/>
-          </a:prstGeom>
-        </p:spPr>
-        <p:txBody>
-          <a:bodyPr lIns="91440" tIns="45720" rIns="91440" bIns="45720" anchor="t"/>
-          <a:lstStyle>
-            <a:lvl1pPr marL="0" indent="-284400" algn="l" defTabSz="914400" rtl="0" eaLnBrk="1" latinLnBrk="0" hangingPunct="1">
-              <a:lnSpc>
-                <a:spcPct val="114000"/>
-              </a:lnSpc>
-              <a:spcBef>
-                <a:spcPts val="0"/>
-              </a:spcBef>
-              <a:spcAft>
-                <a:spcPts val="600"/>
-              </a:spcAft>
-              <a:buClr>
-                <a:srgbClr val="1864FF"/>
-              </a:buClr>
-              <a:buFont typeface="Arial" panose="020B0604020202020204" pitchFamily="34" charset="0"/>
-              <a:buChar char="•"/>
-              <a:defRPr lang="en-US" sz="1600" kern="1200" smtClean="0">
-                <a:solidFill>
-                  <a:schemeClr val="tx1"/>
-                </a:solidFill>
-                <a:latin typeface="+mn-lt"/>
-                <a:ea typeface="+mn-ea"/>
-                <a:cs typeface="+mn-cs"/>
-              </a:defRPr>
-            </a:lvl1pPr>
-          </a:lstStyle>
-          <a:p>
-            <a:pPr indent="-283845"/>
-            <a:r>
-              <a:rPr lang="en-US" dirty="0"/>
-              <a:t>The average Stability rating for the portfolio is PORTFOLIO_OSH_AVG_RATING_STABILITY</a:t>
-            </a:r>
-            <a:r>
-              <a:rPr lang="en-US" sz="100" dirty="0"/>
-              <a:t> </a:t>
-            </a:r>
-            <a:r>
-              <a:rPr lang="en-US" dirty="0"/>
-              <a:t>★.</a:t>
-            </a:r>
-          </a:p>
-          <a:p>
-            <a:pPr indent="-283845"/>
-            <a:r>
-              <a:rPr lang="en-US" dirty="0"/>
-              <a:t>PORTFOLIO_OSH_ABOVE_MARKET_STABILITY</a:t>
-            </a:r>
-            <a:r>
-              <a:rPr lang="en-GB" sz="1550" noProof="0" dirty="0"/>
-              <a:t>% of systems score above market average (≥3.5</a:t>
-            </a:r>
-            <a:r>
-              <a:rPr lang="en-US" sz="1400" dirty="0"/>
-              <a:t>★</a:t>
-            </a:r>
-            <a:r>
-              <a:rPr lang="en-GB" sz="1550" noProof="0" dirty="0"/>
-              <a:t>).</a:t>
-            </a:r>
-          </a:p>
-          <a:p>
-            <a:pPr indent="-283845"/>
-            <a:r>
-              <a:rPr lang="en-US" dirty="0"/>
-              <a:t>PORTFOLIO_OSH_MARKET_AVERAGE_STABILITY</a:t>
-            </a:r>
-            <a:r>
-              <a:rPr lang="en-GB" sz="1550" dirty="0">
-                <a:ea typeface="Calibri"/>
-                <a:cs typeface="Calibri"/>
-              </a:rPr>
-              <a:t>% of systems score market average (3</a:t>
-            </a:r>
-            <a:r>
-              <a:rPr lang="en-US" sz="1400" dirty="0"/>
-              <a:t>★</a:t>
-            </a:r>
-            <a:r>
-              <a:rPr lang="en-GB" sz="1550" dirty="0">
-                <a:ea typeface="Calibri"/>
-                <a:cs typeface="Calibri"/>
-              </a:rPr>
-              <a:t>).</a:t>
-            </a:r>
-          </a:p>
-          <a:p>
-            <a:pPr indent="-283845"/>
-            <a:r>
-              <a:rPr lang="en-US" dirty="0"/>
-              <a:t>PORTFOLIO_OSH_BELOW_MARKET_STABILITY</a:t>
-            </a:r>
-            <a:r>
-              <a:rPr lang="en-GB" sz="1550" dirty="0">
-                <a:ea typeface="Calibri"/>
-                <a:cs typeface="Calibri"/>
-              </a:rPr>
-              <a:t>% of systems score below market average (≤2.5</a:t>
-            </a:r>
-            <a:r>
-              <a:rPr lang="en-US" sz="1400" dirty="0"/>
-              <a:t>★</a:t>
-            </a:r>
-            <a:r>
-              <a:rPr lang="en-GB" sz="1550" dirty="0">
-                <a:ea typeface="Calibri"/>
-                <a:cs typeface="Calibri"/>
-              </a:rPr>
-              <a:t>).</a:t>
-            </a:r>
-          </a:p>
-        </p:txBody>
-      </p:sp>
-      <p:grpSp>
-        <p:nvGrpSpPr>
-          <p:cNvPr id="6" name="Group 1030">
-            <a:extLst>
-              <a:ext uri="{FF2B5EF4-FFF2-40B4-BE49-F238E27FC236}">
-                <a16:creationId xmlns:a16="http://schemas.microsoft.com/office/drawing/2014/main" id="{513B02F0-2AA1-5FFD-D5C4-7347F2421D8B}"/>
-              </a:ext>
-            </a:extLst>
-          </p:cNvPr>
-          <p:cNvGrpSpPr/>
-          <p:nvPr/>
-        </p:nvGrpSpPr>
-        <p:grpSpPr>
-          <a:xfrm>
-            <a:off x="690538" y="5907042"/>
-            <a:ext cx="300732" cy="98617"/>
-            <a:chOff x="586253" y="6116391"/>
-            <a:chExt cx="300732" cy="98617"/>
-          </a:xfrm>
-        </p:grpSpPr>
-        <p:sp>
-          <p:nvSpPr>
-            <p:cNvPr id="8" name="TextBox 1031">
-              <a:extLst>
-                <a:ext uri="{FF2B5EF4-FFF2-40B4-BE49-F238E27FC236}">
-                  <a16:creationId xmlns:a16="http://schemas.microsoft.com/office/drawing/2014/main" id="{0F18060E-AAC3-E654-127C-6597327BF936}"/>
-                </a:ext>
-              </a:extLst>
-            </p:cNvPr>
-            <p:cNvSpPr txBox="1"/>
-            <p:nvPr/>
-          </p:nvSpPr>
-          <p:spPr>
-            <a:xfrm>
-              <a:off x="710655" y="6116391"/>
-              <a:ext cx="176330" cy="98617"/>
-            </a:xfrm>
-            <a:prstGeom prst="rect">
-              <a:avLst/>
-            </a:prstGeom>
-            <a:noFill/>
-          </p:spPr>
-          <p:txBody>
-            <a:bodyPr wrap="none" lIns="0" tIns="0" rIns="0" bIns="0" rtlCol="0" anchor="t">
-              <a:spAutoFit/>
-            </a:bodyPr>
-            <a:lstStyle/>
-            <a:p>
-              <a:pPr algn="l">
-                <a:lnSpc>
-                  <a:spcPct val="113000"/>
-                </a:lnSpc>
-              </a:pPr>
-              <a:r>
-                <a:rPr lang="en-GB" sz="800" dirty="0">
-                  <a:solidFill>
-                    <a:schemeClr val="tx2"/>
-                  </a:solidFill>
-                </a:rPr>
-                <a:t>1 star</a:t>
-              </a:r>
-            </a:p>
-          </p:txBody>
-        </p:sp>
-        <p:sp>
-          <p:nvSpPr>
-            <p:cNvPr id="9" name="Rounded Rectangle 1032">
-              <a:extLst>
-                <a:ext uri="{FF2B5EF4-FFF2-40B4-BE49-F238E27FC236}">
-                  <a16:creationId xmlns:a16="http://schemas.microsoft.com/office/drawing/2014/main" id="{D2A7757E-779F-2810-5E4E-E62E1A0BAF2F}"/>
-                </a:ext>
-              </a:extLst>
-            </p:cNvPr>
-            <p:cNvSpPr>
-              <a:spLocks noChangeAspect="1"/>
-            </p:cNvSpPr>
-            <p:nvPr/>
-          </p:nvSpPr>
-          <p:spPr>
-            <a:xfrm>
-              <a:off x="586253" y="6119980"/>
-              <a:ext cx="89812" cy="91440"/>
-            </a:xfrm>
-            <a:prstGeom prst="roundRect">
-              <a:avLst/>
-            </a:prstGeom>
-            <a:solidFill>
-              <a:srgbClr val="F16345"/>
-            </a:solidFill>
-            <a:ln>
-              <a:noFill/>
-            </a:ln>
-          </p:spPr>
-          <p:style>
-            <a:lnRef idx="2">
-              <a:schemeClr val="accent1">
-                <a:shade val="50000"/>
-              </a:schemeClr>
-            </a:lnRef>
-            <a:fillRef idx="1">
-              <a:schemeClr val="accent1"/>
-            </a:fillRef>
-            <a:effectRef idx="0">
-              <a:schemeClr val="accent1"/>
-            </a:effectRef>
-            <a:fontRef idx="minor">
-              <a:schemeClr val="lt1"/>
-            </a:fontRef>
-          </p:style>
-          <p:txBody>
-            <a:bodyPr lIns="108000" tIns="72000" rIns="108000" bIns="72000" rtlCol="0" anchor="ctr"/>
-            <a:lstStyle/>
-            <a:p>
-              <a:pPr algn="ctr"/>
-              <a:endParaRPr lang="en-GB" sz="1600" dirty="0">
-                <a:solidFill>
-                  <a:schemeClr val="bg1"/>
-                </a:solidFill>
-              </a:endParaRPr>
-            </a:p>
-          </p:txBody>
-        </p:sp>
-      </p:grpSp>
-      <p:grpSp>
-        <p:nvGrpSpPr>
-          <p:cNvPr id="10" name="Group 1033">
-            <a:extLst>
-              <a:ext uri="{FF2B5EF4-FFF2-40B4-BE49-F238E27FC236}">
-                <a16:creationId xmlns:a16="http://schemas.microsoft.com/office/drawing/2014/main" id="{AFA85250-5C32-0E74-0FD5-67E4490B30CD}"/>
-              </a:ext>
-            </a:extLst>
-          </p:cNvPr>
-          <p:cNvGrpSpPr/>
-          <p:nvPr/>
-        </p:nvGrpSpPr>
-        <p:grpSpPr>
-          <a:xfrm>
-            <a:off x="1107915" y="5907042"/>
-            <a:ext cx="331190" cy="98617"/>
-            <a:chOff x="961765" y="6117353"/>
-            <a:chExt cx="331190" cy="98617"/>
-          </a:xfrm>
-        </p:grpSpPr>
-        <p:sp>
-          <p:nvSpPr>
-            <p:cNvPr id="11" name="TextBox 1034">
-              <a:extLst>
-                <a:ext uri="{FF2B5EF4-FFF2-40B4-BE49-F238E27FC236}">
-                  <a16:creationId xmlns:a16="http://schemas.microsoft.com/office/drawing/2014/main" id="{423750AE-D097-DABA-1E9D-A5D4601C6AF2}"/>
-                </a:ext>
-              </a:extLst>
-            </p:cNvPr>
-            <p:cNvSpPr txBox="1"/>
-            <p:nvPr/>
-          </p:nvSpPr>
-          <p:spPr>
-            <a:xfrm>
-              <a:off x="1086167" y="6117353"/>
-              <a:ext cx="206788" cy="98617"/>
-            </a:xfrm>
-            <a:prstGeom prst="rect">
-              <a:avLst/>
-            </a:prstGeom>
-            <a:noFill/>
-          </p:spPr>
-          <p:txBody>
-            <a:bodyPr wrap="none" lIns="0" tIns="0" rIns="0" bIns="0" rtlCol="0" anchor="t">
-              <a:spAutoFit/>
-            </a:bodyPr>
-            <a:lstStyle/>
-            <a:p>
-              <a:pPr algn="l">
-                <a:lnSpc>
-                  <a:spcPct val="113000"/>
-                </a:lnSpc>
-              </a:pPr>
-              <a:r>
-                <a:rPr lang="en-GB" sz="800" dirty="0">
-                  <a:solidFill>
-                    <a:schemeClr val="tx2"/>
-                  </a:solidFill>
-                </a:rPr>
-                <a:t>2 stars</a:t>
-              </a:r>
-            </a:p>
-          </p:txBody>
-        </p:sp>
-        <p:sp>
-          <p:nvSpPr>
-            <p:cNvPr id="12" name="Rounded Rectangle 1035">
-              <a:extLst>
-                <a:ext uri="{FF2B5EF4-FFF2-40B4-BE49-F238E27FC236}">
-                  <a16:creationId xmlns:a16="http://schemas.microsoft.com/office/drawing/2014/main" id="{DCA5851D-1798-0A20-5A71-774836BD4F34}"/>
-                </a:ext>
-              </a:extLst>
-            </p:cNvPr>
-            <p:cNvSpPr>
-              <a:spLocks noChangeAspect="1"/>
-            </p:cNvSpPr>
-            <p:nvPr/>
-          </p:nvSpPr>
-          <p:spPr>
-            <a:xfrm>
-              <a:off x="961765" y="6120942"/>
-              <a:ext cx="89812" cy="91440"/>
-            </a:xfrm>
-            <a:prstGeom prst="roundRect">
-              <a:avLst/>
-            </a:prstGeom>
-            <a:solidFill>
-              <a:srgbClr val="F69400"/>
-            </a:solidFill>
-            <a:ln>
-              <a:noFill/>
-            </a:ln>
-          </p:spPr>
-          <p:style>
-            <a:lnRef idx="2">
-              <a:schemeClr val="accent1">
-                <a:shade val="50000"/>
-              </a:schemeClr>
-            </a:lnRef>
-            <a:fillRef idx="1">
-              <a:schemeClr val="accent1"/>
-            </a:fillRef>
-            <a:effectRef idx="0">
-              <a:schemeClr val="accent1"/>
-            </a:effectRef>
-            <a:fontRef idx="minor">
-              <a:schemeClr val="lt1"/>
-            </a:fontRef>
-          </p:style>
-          <p:txBody>
-            <a:bodyPr lIns="108000" tIns="72000" rIns="108000" bIns="72000" rtlCol="0" anchor="ctr"/>
-            <a:lstStyle/>
-            <a:p>
-              <a:pPr algn="ctr"/>
-              <a:endParaRPr lang="en-GB" sz="1600" dirty="0">
-                <a:solidFill>
-                  <a:schemeClr val="bg1"/>
-                </a:solidFill>
-              </a:endParaRPr>
-            </a:p>
-          </p:txBody>
-        </p:sp>
-      </p:grpSp>
-      <p:grpSp>
-        <p:nvGrpSpPr>
-          <p:cNvPr id="13" name="Group 1036">
-            <a:extLst>
-              <a:ext uri="{FF2B5EF4-FFF2-40B4-BE49-F238E27FC236}">
-                <a16:creationId xmlns:a16="http://schemas.microsoft.com/office/drawing/2014/main" id="{49B9D467-2411-DC5B-B05F-6F662BF677A0}"/>
-              </a:ext>
-            </a:extLst>
-          </p:cNvPr>
-          <p:cNvGrpSpPr/>
-          <p:nvPr/>
-        </p:nvGrpSpPr>
-        <p:grpSpPr>
-          <a:xfrm>
-            <a:off x="1555751" y="5907042"/>
-            <a:ext cx="331190" cy="98617"/>
-            <a:chOff x="1114165" y="6269753"/>
-            <a:chExt cx="331190" cy="98617"/>
-          </a:xfrm>
-        </p:grpSpPr>
-        <p:sp>
-          <p:nvSpPr>
-            <p:cNvPr id="14" name="TextBox 1037">
-              <a:extLst>
-                <a:ext uri="{FF2B5EF4-FFF2-40B4-BE49-F238E27FC236}">
-                  <a16:creationId xmlns:a16="http://schemas.microsoft.com/office/drawing/2014/main" id="{CC5C6A22-8797-60A5-73E8-1D1CB180F31E}"/>
-                </a:ext>
-              </a:extLst>
-            </p:cNvPr>
-            <p:cNvSpPr txBox="1"/>
-            <p:nvPr/>
-          </p:nvSpPr>
-          <p:spPr>
-            <a:xfrm>
-              <a:off x="1238567" y="6269753"/>
-              <a:ext cx="206788" cy="98617"/>
-            </a:xfrm>
-            <a:prstGeom prst="rect">
-              <a:avLst/>
-            </a:prstGeom>
-            <a:noFill/>
-          </p:spPr>
-          <p:txBody>
-            <a:bodyPr wrap="none" lIns="0" tIns="0" rIns="0" bIns="0" rtlCol="0" anchor="t">
-              <a:spAutoFit/>
-            </a:bodyPr>
-            <a:lstStyle/>
-            <a:p>
-              <a:pPr algn="l">
-                <a:lnSpc>
-                  <a:spcPct val="113000"/>
-                </a:lnSpc>
-              </a:pPr>
-              <a:r>
-                <a:rPr lang="en-GB" sz="800" dirty="0">
-                  <a:solidFill>
-                    <a:schemeClr val="tx2"/>
-                  </a:solidFill>
-                </a:rPr>
-                <a:t>3 stars</a:t>
-              </a:r>
-            </a:p>
-          </p:txBody>
-        </p:sp>
-        <p:sp>
-          <p:nvSpPr>
-            <p:cNvPr id="15" name="Rounded Rectangle 1038">
-              <a:extLst>
-                <a:ext uri="{FF2B5EF4-FFF2-40B4-BE49-F238E27FC236}">
-                  <a16:creationId xmlns:a16="http://schemas.microsoft.com/office/drawing/2014/main" id="{4AA5AD01-5458-540B-26C9-068D9EC2C1E7}"/>
-                </a:ext>
-              </a:extLst>
-            </p:cNvPr>
-            <p:cNvSpPr>
-              <a:spLocks noChangeAspect="1"/>
-            </p:cNvSpPr>
-            <p:nvPr/>
-          </p:nvSpPr>
-          <p:spPr>
-            <a:xfrm>
-              <a:off x="1114165" y="6273342"/>
-              <a:ext cx="89812" cy="91440"/>
-            </a:xfrm>
-            <a:prstGeom prst="roundRect">
-              <a:avLst/>
-            </a:prstGeom>
-            <a:solidFill>
-              <a:srgbClr val="F1C109"/>
-            </a:solidFill>
-            <a:ln>
-              <a:noFill/>
-            </a:ln>
-          </p:spPr>
-          <p:style>
-            <a:lnRef idx="2">
-              <a:schemeClr val="accent1">
-                <a:shade val="50000"/>
-              </a:schemeClr>
-            </a:lnRef>
-            <a:fillRef idx="1">
-              <a:schemeClr val="accent1"/>
-            </a:fillRef>
-            <a:effectRef idx="0">
-              <a:schemeClr val="accent1"/>
-            </a:effectRef>
-            <a:fontRef idx="minor">
-              <a:schemeClr val="lt1"/>
-            </a:fontRef>
-          </p:style>
-          <p:txBody>
-            <a:bodyPr lIns="108000" tIns="72000" rIns="108000" bIns="72000" rtlCol="0" anchor="ctr"/>
-            <a:lstStyle/>
-            <a:p>
-              <a:pPr algn="ctr"/>
-              <a:endParaRPr lang="en-GB" sz="1600" dirty="0">
-                <a:solidFill>
-                  <a:schemeClr val="bg1"/>
-                </a:solidFill>
-              </a:endParaRPr>
-            </a:p>
-          </p:txBody>
-        </p:sp>
-      </p:grpSp>
-      <p:grpSp>
-        <p:nvGrpSpPr>
-          <p:cNvPr id="16" name="Group 1039">
-            <a:extLst>
-              <a:ext uri="{FF2B5EF4-FFF2-40B4-BE49-F238E27FC236}">
-                <a16:creationId xmlns:a16="http://schemas.microsoft.com/office/drawing/2014/main" id="{494117D0-24D7-5736-0510-8FF302DE1223}"/>
-              </a:ext>
-            </a:extLst>
-          </p:cNvPr>
-          <p:cNvGrpSpPr/>
-          <p:nvPr/>
-        </p:nvGrpSpPr>
-        <p:grpSpPr>
-          <a:xfrm>
-            <a:off x="2003587" y="5907042"/>
-            <a:ext cx="331190" cy="98617"/>
-            <a:chOff x="1114165" y="6269753"/>
-            <a:chExt cx="331190" cy="98617"/>
-          </a:xfrm>
-        </p:grpSpPr>
-        <p:sp>
-          <p:nvSpPr>
-            <p:cNvPr id="17" name="TextBox 1040">
-              <a:extLst>
-                <a:ext uri="{FF2B5EF4-FFF2-40B4-BE49-F238E27FC236}">
-                  <a16:creationId xmlns:a16="http://schemas.microsoft.com/office/drawing/2014/main" id="{23408114-59B2-C1D2-8E4E-1ADA2A65B568}"/>
-                </a:ext>
-              </a:extLst>
-            </p:cNvPr>
-            <p:cNvSpPr txBox="1"/>
-            <p:nvPr/>
-          </p:nvSpPr>
-          <p:spPr>
-            <a:xfrm>
-              <a:off x="1238567" y="6269753"/>
-              <a:ext cx="206788" cy="98617"/>
-            </a:xfrm>
-            <a:prstGeom prst="rect">
-              <a:avLst/>
-            </a:prstGeom>
-            <a:noFill/>
-          </p:spPr>
-          <p:txBody>
-            <a:bodyPr wrap="none" lIns="0" tIns="0" rIns="0" bIns="0" rtlCol="0" anchor="t">
-              <a:spAutoFit/>
-            </a:bodyPr>
-            <a:lstStyle/>
-            <a:p>
-              <a:pPr algn="l">
-                <a:lnSpc>
-                  <a:spcPct val="113000"/>
-                </a:lnSpc>
-              </a:pPr>
-              <a:r>
-                <a:rPr lang="en-GB" sz="800" dirty="0">
-                  <a:solidFill>
-                    <a:schemeClr val="tx2"/>
-                  </a:solidFill>
-                </a:rPr>
-                <a:t>4 stars</a:t>
-              </a:r>
-            </a:p>
-          </p:txBody>
-        </p:sp>
-        <p:sp>
-          <p:nvSpPr>
-            <p:cNvPr id="18" name="Rounded Rectangle 1041">
-              <a:extLst>
-                <a:ext uri="{FF2B5EF4-FFF2-40B4-BE49-F238E27FC236}">
-                  <a16:creationId xmlns:a16="http://schemas.microsoft.com/office/drawing/2014/main" id="{803085FD-82BC-A32D-C289-50A1EA389CBA}"/>
-                </a:ext>
-              </a:extLst>
-            </p:cNvPr>
-            <p:cNvSpPr>
-              <a:spLocks noChangeAspect="1"/>
-            </p:cNvSpPr>
-            <p:nvPr/>
-          </p:nvSpPr>
-          <p:spPr>
-            <a:xfrm>
-              <a:off x="1114165" y="6273342"/>
-              <a:ext cx="89812" cy="91440"/>
-            </a:xfrm>
-            <a:prstGeom prst="roundRect">
-              <a:avLst/>
-            </a:prstGeom>
-            <a:solidFill>
-              <a:srgbClr val="40C360"/>
-            </a:solidFill>
-            <a:ln>
-              <a:noFill/>
-            </a:ln>
-          </p:spPr>
-          <p:style>
-            <a:lnRef idx="2">
-              <a:schemeClr val="accent1">
-                <a:shade val="50000"/>
-              </a:schemeClr>
-            </a:lnRef>
-            <a:fillRef idx="1">
-              <a:schemeClr val="accent1"/>
-            </a:fillRef>
-            <a:effectRef idx="0">
-              <a:schemeClr val="accent1"/>
-            </a:effectRef>
-            <a:fontRef idx="minor">
-              <a:schemeClr val="lt1"/>
-            </a:fontRef>
-          </p:style>
-          <p:txBody>
-            <a:bodyPr lIns="108000" tIns="72000" rIns="108000" bIns="72000" rtlCol="0" anchor="ctr"/>
-            <a:lstStyle/>
-            <a:p>
-              <a:pPr algn="ctr"/>
-              <a:endParaRPr lang="en-GB" sz="1600" dirty="0">
-                <a:solidFill>
-                  <a:schemeClr val="bg1"/>
-                </a:solidFill>
-              </a:endParaRPr>
-            </a:p>
-          </p:txBody>
-        </p:sp>
-      </p:grpSp>
-      <p:grpSp>
-        <p:nvGrpSpPr>
-          <p:cNvPr id="19" name="Group 1042">
-            <a:extLst>
-              <a:ext uri="{FF2B5EF4-FFF2-40B4-BE49-F238E27FC236}">
-                <a16:creationId xmlns:a16="http://schemas.microsoft.com/office/drawing/2014/main" id="{EA1A3B8F-2D14-50E5-CC9E-8D67204ED42F}"/>
-              </a:ext>
-            </a:extLst>
-          </p:cNvPr>
-          <p:cNvGrpSpPr/>
-          <p:nvPr/>
-        </p:nvGrpSpPr>
-        <p:grpSpPr>
-          <a:xfrm>
-            <a:off x="2451422" y="5907042"/>
-            <a:ext cx="331190" cy="98617"/>
-            <a:chOff x="1114165" y="6269753"/>
-            <a:chExt cx="331190" cy="98617"/>
-          </a:xfrm>
-        </p:grpSpPr>
-        <p:sp>
-          <p:nvSpPr>
-            <p:cNvPr id="20" name="TextBox 1043">
-              <a:extLst>
-                <a:ext uri="{FF2B5EF4-FFF2-40B4-BE49-F238E27FC236}">
-                  <a16:creationId xmlns:a16="http://schemas.microsoft.com/office/drawing/2014/main" id="{DAA04C80-6D49-A5BF-6EE7-1A1509E8E509}"/>
-                </a:ext>
-              </a:extLst>
-            </p:cNvPr>
-            <p:cNvSpPr txBox="1"/>
-            <p:nvPr/>
-          </p:nvSpPr>
-          <p:spPr>
-            <a:xfrm>
-              <a:off x="1238567" y="6269753"/>
-              <a:ext cx="206788" cy="98617"/>
-            </a:xfrm>
-            <a:prstGeom prst="rect">
-              <a:avLst/>
-            </a:prstGeom>
-            <a:noFill/>
-          </p:spPr>
-          <p:txBody>
-            <a:bodyPr wrap="none" lIns="0" tIns="0" rIns="0" bIns="0" rtlCol="0" anchor="t">
-              <a:spAutoFit/>
-            </a:bodyPr>
-            <a:lstStyle/>
-            <a:p>
-              <a:pPr algn="l">
-                <a:lnSpc>
-                  <a:spcPct val="113000"/>
-                </a:lnSpc>
-              </a:pPr>
-              <a:r>
-                <a:rPr lang="en-GB" sz="800" dirty="0">
-                  <a:solidFill>
-                    <a:schemeClr val="tx2"/>
-                  </a:solidFill>
-                </a:rPr>
-                <a:t>5 stars</a:t>
-              </a:r>
-            </a:p>
-          </p:txBody>
-        </p:sp>
-        <p:sp>
-          <p:nvSpPr>
-            <p:cNvPr id="21" name="Rounded Rectangle 1044">
-              <a:extLst>
-                <a:ext uri="{FF2B5EF4-FFF2-40B4-BE49-F238E27FC236}">
-                  <a16:creationId xmlns:a16="http://schemas.microsoft.com/office/drawing/2014/main" id="{8EDD62DD-BDAB-A371-10CA-58F3594F770D}"/>
-                </a:ext>
-              </a:extLst>
-            </p:cNvPr>
-            <p:cNvSpPr>
-              <a:spLocks noChangeAspect="1"/>
-            </p:cNvSpPr>
-            <p:nvPr/>
-          </p:nvSpPr>
-          <p:spPr>
-            <a:xfrm>
-              <a:off x="1114165" y="6273342"/>
-              <a:ext cx="89812" cy="91440"/>
-            </a:xfrm>
-            <a:prstGeom prst="roundRect">
-              <a:avLst/>
-            </a:prstGeom>
-            <a:solidFill>
-              <a:srgbClr val="008A38"/>
-            </a:solidFill>
-            <a:ln>
-              <a:noFill/>
-            </a:ln>
-          </p:spPr>
-          <p:style>
-            <a:lnRef idx="2">
-              <a:schemeClr val="accent1">
-                <a:shade val="50000"/>
-              </a:schemeClr>
-            </a:lnRef>
-            <a:fillRef idx="1">
-              <a:schemeClr val="accent1"/>
-            </a:fillRef>
-            <a:effectRef idx="0">
-              <a:schemeClr val="accent1"/>
-            </a:effectRef>
-            <a:fontRef idx="minor">
-              <a:schemeClr val="lt1"/>
-            </a:fontRef>
-          </p:style>
-          <p:txBody>
-            <a:bodyPr lIns="108000" tIns="72000" rIns="108000" bIns="72000" rtlCol="0" anchor="ctr"/>
-            <a:lstStyle/>
-            <a:p>
-              <a:pPr algn="ctr"/>
-              <a:endParaRPr lang="en-GB" sz="1600" dirty="0">
-                <a:solidFill>
-                  <a:schemeClr val="bg1"/>
-                </a:solidFill>
-              </a:endParaRPr>
-            </a:p>
-          </p:txBody>
-        </p:sp>
-      </p:grpSp>
-      <p:sp>
-        <p:nvSpPr>
-          <p:cNvPr id="22" name="Footer Placeholder 1004">
-            <a:extLst>
-              <a:ext uri="{FF2B5EF4-FFF2-40B4-BE49-F238E27FC236}">
-                <a16:creationId xmlns:a16="http://schemas.microsoft.com/office/drawing/2014/main" id="{93EAE8AB-0033-D4D9-57B7-71ECAF7ABC62}"/>
-              </a:ext>
-            </a:extLst>
-          </p:cNvPr>
-          <p:cNvSpPr>
-            <a:spLocks noGrp="1"/>
-          </p:cNvSpPr>
-          <p:nvPr>
-            <p:ph type="ftr" sz="quarter" idx="3"/>
-          </p:nvPr>
-        </p:nvSpPr>
-        <p:spPr>
-          <a:xfrm>
-            <a:off x="192088" y="6392596"/>
-            <a:ext cx="1763922" cy="370422"/>
-          </a:xfrm>
-        </p:spPr>
-        <p:txBody>
-          <a:bodyPr/>
-          <a:lstStyle/>
-          <a:p>
-            <a:r>
-              <a:rPr lang="en-US" dirty="0"/>
-              <a:t>Generated with Sigrid</a:t>
-            </a:r>
-          </a:p>
-          <a:p>
-            <a:r>
-              <a:rPr lang="en-US" dirty="0"/>
-              <a:t>for CUSTOMER_NAME</a:t>
-            </a:r>
-          </a:p>
-        </p:txBody>
-      </p:sp>
-    </p:spTree>
-    <p:extLst>
-      <p:ext uri="{BB962C8B-B14F-4D97-AF65-F5344CB8AC3E}">
-        <p14:creationId xmlns:p14="http://schemas.microsoft.com/office/powerpoint/2010/main" val="1935461179"/>
-      </p:ext>
-    </p:extLst>
-  </p:cSld>
-  <p:clrMapOvr>
-    <a:masterClrMapping/>
-  </p:clrMapOvr>
-</p:sld>
-</file>
-
 <file path=ppt/slides/slide5.xml><?xml version="1.0" encoding="utf-8"?>
 <p:sld xmlns:a="http://schemas.openxmlformats.org/drawingml/2006/main" xmlns:r="http://schemas.openxmlformats.org/officeDocument/2006/relationships" xmlns:p="http://schemas.openxmlformats.org/presentationml/2006/main">
   <p:cSld>

--- a/src/report_generator/presets/templates/portfolio-metrics.pptx
+++ b/src/report_generator/presets/templates/portfolio-metrics.pptx
@@ -17496,7 +17496,7 @@
                   <a:schemeClr val="bg1"/>
                 </a:solidFill>
               </a:rPr>
-              <a:t>PORTFOLIO_PERIOD_MAINT_UNIT_INTERFACING_CHANGE_GROUPED_BY_TEAM</a:t>
+              <a:t>PORTFOLIO_PERIOD_MAINT_UNIT_INTERFACING_CHANGE</a:t>
             </a:r>
           </a:p>
         </p:txBody>
@@ -17915,7 +17915,7 @@
                   <a:schemeClr val="tx2"/>
                 </a:solidFill>
               </a:rPr>
-              <a:t>Team</a:t>
+              <a:t>GROUPED_BY_LABEL</a:t>
             </a:r>
           </a:p>
         </p:txBody>
@@ -18203,7 +18203,7 @@
                   <a:schemeClr val="bg1"/>
                 </a:solidFill>
               </a:rPr>
-              <a:t>PORTFOLIO_PERIOD_MAINT_MODULE_COUPLING_GROUPED_BY_TEAM</a:t>
+              <a:t>PORTFOLIO_PERIOD_MAINT_MODULE_COUPLING</a:t>
             </a:r>
           </a:p>
         </p:txBody>
@@ -18807,7 +18807,7 @@
                   <a:schemeClr val="tx2"/>
                 </a:solidFill>
               </a:rPr>
-              <a:t>Team</a:t>
+              <a:t>GROUPED_BY_LABEL</a:t>
             </a:r>
           </a:p>
         </p:txBody>
@@ -19159,7 +19159,7 @@
                   <a:schemeClr val="bg1"/>
                 </a:solidFill>
               </a:rPr>
-              <a:t>PORTFOLIO_PERIOD_MAINT_MODULE_COUPLING_CHANGE_GROUPED_BY_TEAM</a:t>
+              <a:t>PORTFOLIO_PERIOD_MAINT_MODULE_COUPLING_CHANGE</a:t>
             </a:r>
           </a:p>
         </p:txBody>
@@ -19578,7 +19578,7 @@
                   <a:schemeClr val="tx2"/>
                 </a:solidFill>
               </a:rPr>
-              <a:t>Team</a:t>
+              <a:t>GROUPED_BY_LABEL</a:t>
             </a:r>
           </a:p>
         </p:txBody>
@@ -19866,7 +19866,7 @@
                   <a:schemeClr val="bg1"/>
                 </a:solidFill>
               </a:rPr>
-              <a:t>PORTFOLIO_PERIOD_MAINT_COMPONENT_INDEPENDENCE_GROUPED_BY_TEAM</a:t>
+              <a:t>PORTFOLIO_PERIOD_MAINT_COMPONENT_INDEPENDENCE</a:t>
             </a:r>
           </a:p>
         </p:txBody>
@@ -20470,7 +20470,7 @@
                   <a:schemeClr val="tx2"/>
                 </a:solidFill>
               </a:rPr>
-              <a:t>Team</a:t>
+              <a:t>GROUPED_BY_LABEL</a:t>
             </a:r>
           </a:p>
         </p:txBody>
@@ -20822,7 +20822,7 @@
                   <a:schemeClr val="bg1"/>
                 </a:solidFill>
               </a:rPr>
-              <a:t>PORTFOLIO_PERIOD_MAINT_COMPONENT_INDEPENDENCE_CHANGE_GROUPED_BY_TEAM</a:t>
+              <a:t>PORTFOLIO_PERIOD_MAINT_COMPONENT_INDEPENDENCE_CHANGE</a:t>
             </a:r>
           </a:p>
         </p:txBody>
@@ -21241,7 +21241,7 @@
                   <a:schemeClr val="tx2"/>
                 </a:solidFill>
               </a:rPr>
-              <a:t>Team</a:t>
+              <a:t>GROUPED_BY_LABEL</a:t>
             </a:r>
           </a:p>
         </p:txBody>
@@ -21529,7 +21529,7 @@
                   <a:schemeClr val="bg1"/>
                 </a:solidFill>
               </a:rPr>
-              <a:t>PORTFOLIO_PERIOD_MAINT_COMPONENT_ENTANGLEMENT_GROUPED_BY_TEAM</a:t>
+              <a:t>PORTFOLIO_PERIOD_MAINT_COMPONENT_ENTANGLEMENT</a:t>
             </a:r>
           </a:p>
         </p:txBody>
@@ -22133,7 +22133,7 @@
                   <a:schemeClr val="tx2"/>
                 </a:solidFill>
               </a:rPr>
-              <a:t>Team</a:t>
+              <a:t>GROUPED_BY_LABEL</a:t>
             </a:r>
           </a:p>
         </p:txBody>
@@ -22485,7 +22485,7 @@
                   <a:schemeClr val="bg1"/>
                 </a:solidFill>
               </a:rPr>
-              <a:t>PORTFOLIO_PERIOD_MAINT_COMPONENT_ENTANGLEMENT_CHANGE_GROUPED_BY_TEAM</a:t>
+              <a:t>PORTFOLIO_PERIOD_MAINT_COMPONENT_ENTANGLEMENT_CHANGE</a:t>
             </a:r>
           </a:p>
         </p:txBody>
@@ -22904,7 +22904,7 @@
                   <a:schemeClr val="tx2"/>
                 </a:solidFill>
               </a:rPr>
-              <a:t>Team</a:t>
+              <a:t>GROUPED_BY_LABEL</a:t>
             </a:r>
           </a:p>
         </p:txBody>
@@ -23460,7 +23460,7 @@
                   <a:schemeClr val="bg1"/>
                 </a:solidFill>
               </a:rPr>
-              <a:t>PORTFOLIO_PERIOD_ARCH_CODE_BREAKDOWN_GROUPED_BY_TEAM</a:t>
+              <a:t>PORTFOLIO_PERIOD_ARCH_CODE_BREAKDOWN</a:t>
             </a:r>
           </a:p>
         </p:txBody>
@@ -24064,7 +24064,7 @@
                   <a:schemeClr val="tx2"/>
                 </a:solidFill>
               </a:rPr>
-              <a:t>Team</a:t>
+              <a:t>GROUPED_BY_LABEL</a:t>
             </a:r>
           </a:p>
         </p:txBody>
@@ -24416,7 +24416,7 @@
                   <a:schemeClr val="bg1"/>
                 </a:solidFill>
               </a:rPr>
-              <a:t>PORTFOLIO_PERIOD_ARCH_CODE_BREAKDOWN_RATINGS_CHANGE_GROUPED_BY_TEAM</a:t>
+              <a:t>PORTFOLIO_PERIOD_ARCH_CODE_BREAKDOWN_RATINGS_CHANGE</a:t>
             </a:r>
           </a:p>
         </p:txBody>
@@ -24835,7 +24835,7 @@
                   <a:schemeClr val="tx2"/>
                 </a:solidFill>
               </a:rPr>
-              <a:t>Team</a:t>
+              <a:t>GROUPED_BY_LABEL</a:t>
             </a:r>
           </a:p>
         </p:txBody>
@@ -25385,7 +25385,7 @@
                   <a:schemeClr val="bg1"/>
                 </a:solidFill>
               </a:rPr>
-              <a:t>PORTFOLIO_PERIOD_ARCH_COMPONENT_COUPLING_GROUPED_BY_TEAM</a:t>
+              <a:t>PORTFOLIO_PERIOD_ARCH_COMPONENT_COUPLING</a:t>
             </a:r>
           </a:p>
         </p:txBody>
@@ -25989,7 +25989,7 @@
                   <a:schemeClr val="tx2"/>
                 </a:solidFill>
               </a:rPr>
-              <a:t>Team</a:t>
+              <a:t>GROUPED_BY_LABEL</a:t>
             </a:r>
           </a:p>
         </p:txBody>
@@ -26341,7 +26341,7 @@
                   <a:schemeClr val="bg1"/>
                 </a:solidFill>
               </a:rPr>
-              <a:t>PORTFOLIO_PERIOD_ARCH_COMPONENT_COUPLING_RATINGS_CHANGE_GROUPED_BY_TEAM</a:t>
+              <a:t>PORTFOLIO_PERIOD_ARCH_COMPONENT_COUPLING_RATINGS_CHANGE</a:t>
             </a:r>
           </a:p>
         </p:txBody>
@@ -26760,7 +26760,7 @@
                   <a:schemeClr val="tx2"/>
                 </a:solidFill>
               </a:rPr>
-              <a:t>Team</a:t>
+              <a:t>GROUPED_BY_LABEL</a:t>
             </a:r>
           </a:p>
         </p:txBody>
@@ -27048,7 +27048,7 @@
                   <a:schemeClr val="bg1"/>
                 </a:solidFill>
               </a:rPr>
-              <a:t>PORTFOLIO_PERIOD_ARCH_COMPONENT_ADJACENCY_GROUPED_BY_TEAM</a:t>
+              <a:t>PORTFOLIO_PERIOD_ARCH_COMPONENT_ADJACENCY</a:t>
             </a:r>
           </a:p>
         </p:txBody>
@@ -27652,7 +27652,7 @@
                   <a:schemeClr val="tx2"/>
                 </a:solidFill>
               </a:rPr>
-              <a:t>Team</a:t>
+              <a:t>GROUPED_BY_LABEL</a:t>
             </a:r>
           </a:p>
         </p:txBody>
@@ -28004,7 +28004,7 @@
                   <a:schemeClr val="bg1"/>
                 </a:solidFill>
               </a:rPr>
-              <a:t>PORTFOLIO_PERIOD_ARCH_COMPONENT_ADJACENCY_RATINGS_CHANGE_GROUPED_BY_TEAM</a:t>
+              <a:t>PORTFOLIO_PERIOD_ARCH_COMPONENT_ADJACENCY_RATINGS_CHANGE</a:t>
             </a:r>
           </a:p>
         </p:txBody>
@@ -28423,7 +28423,7 @@
                   <a:schemeClr val="tx2"/>
                 </a:solidFill>
               </a:rPr>
-              <a:t>Team</a:t>
+              <a:t>GROUPED_BY_LABEL</a:t>
             </a:r>
           </a:p>
         </p:txBody>
@@ -28711,7 +28711,7 @@
                   <a:schemeClr val="bg1"/>
                 </a:solidFill>
               </a:rPr>
-              <a:t>PORTFOLIO_PERIOD_ARCH_COMPONENT_COHESION_GROUPED_BY_TEAM</a:t>
+              <a:t>PORTFOLIO_PERIOD_ARCH_COMPONENT_COHESION</a:t>
             </a:r>
           </a:p>
         </p:txBody>
@@ -29315,7 +29315,7 @@
                   <a:schemeClr val="tx2"/>
                 </a:solidFill>
               </a:rPr>
-              <a:t>Team</a:t>
+              <a:t>GROUPED_BY_LABEL</a:t>
             </a:r>
           </a:p>
         </p:txBody>
@@ -29667,7 +29667,7 @@
                   <a:schemeClr val="bg1"/>
                 </a:solidFill>
               </a:rPr>
-              <a:t>PORTFOLIO_PERIOD_ARCH_COMPONENT_COHESION_RATINGS_CHANGE_GROUPED_BY_TEAM</a:t>
+              <a:t>PORTFOLIO_PERIOD_ARCH_COMPONENT_COHESION_RATINGS_CHANGE</a:t>
             </a:r>
           </a:p>
         </p:txBody>
@@ -30086,7 +30086,7 @@
                   <a:schemeClr val="tx2"/>
                 </a:solidFill>
               </a:rPr>
-              <a:t>Team</a:t>
+              <a:t>GROUPED_BY_LABEL</a:t>
             </a:r>
           </a:p>
         </p:txBody>
@@ -30400,7 +30400,7 @@
                   <a:schemeClr val="bg1"/>
                 </a:solidFill>
               </a:rPr>
-              <a:t>_GROUPED_BY_TEAM</a:t>
+              <a:t/>
             </a:r>
           </a:p>
         </p:txBody>
@@ -31004,7 +31004,7 @@
                   <a:schemeClr val="tx2"/>
                 </a:solidFill>
               </a:rPr>
-              <a:t>Team</a:t>
+              <a:t>GROUPED_BY_LABEL</a:t>
             </a:r>
           </a:p>
         </p:txBody>
@@ -31391,7 +31391,7 @@
                   <a:schemeClr val="bg1"/>
                 </a:solidFill>
               </a:rPr>
-              <a:t>PORTFOLIO_PERIOD_ARCH_COMMUNICATION_CENTRALIZATION_RATINGS_CHANGE_GROUPED_BY_TEAM</a:t>
+              <a:t>PORTFOLIO_PERIOD_ARCH_COMMUNICATION_CENTRALIZATION_RATINGS_CHANGE</a:t>
             </a:r>
           </a:p>
         </p:txBody>
@@ -31810,7 +31810,7 @@
                   <a:schemeClr val="tx2"/>
                 </a:solidFill>
               </a:rPr>
-              <a:t>Team</a:t>
+              <a:t>GROUPED_BY_LABEL</a:t>
             </a:r>
           </a:p>
         </p:txBody>
@@ -32098,7 +32098,7 @@
                   <a:schemeClr val="bg1"/>
                 </a:solidFill>
               </a:rPr>
-              <a:t>PORTFOLIO_PERIOD_ARCH_DATA_COUPLING_GROUPED_BY_TEAM</a:t>
+              <a:t>PORTFOLIO_PERIOD_ARCH_DATA_COUPLING</a:t>
             </a:r>
           </a:p>
         </p:txBody>
@@ -32702,7 +32702,7 @@
                   <a:schemeClr val="tx2"/>
                 </a:solidFill>
               </a:rPr>
-              <a:t>Team</a:t>
+              <a:t>GROUPED_BY_LABEL</a:t>
             </a:r>
           </a:p>
         </p:txBody>
@@ -33054,7 +33054,7 @@
                   <a:schemeClr val="bg1"/>
                 </a:solidFill>
               </a:rPr>
-              <a:t>PORTFOLIO_PERIOD_ARCH_DATA_COUPLING_RATINGS_CHANGE_GROUPED_BY_TEAM</a:t>
+              <a:t>PORTFOLIO_PERIOD_ARCH_DATA_COUPLING_RATINGS_CHANGE</a:t>
             </a:r>
           </a:p>
         </p:txBody>
@@ -33473,7 +33473,7 @@
                   <a:schemeClr val="tx2"/>
                 </a:solidFill>
               </a:rPr>
-              <a:t>Team</a:t>
+              <a:t>GROUPED_BY_LABEL</a:t>
             </a:r>
           </a:p>
         </p:txBody>
@@ -33680,7 +33680,7 @@
                   <a:schemeClr val="bg1"/>
                 </a:solidFill>
               </a:rPr>
-              <a:t>PORTFOLIO_PERIOD_MAINT_DUPLICATION_GROUPED_BY_TEAM</a:t>
+              <a:t>PORTFOLIO_PERIOD_MAINT_DUPLICATION</a:t>
             </a:r>
           </a:p>
         </p:txBody>
@@ -34284,7 +34284,7 @@
                   <a:schemeClr val="tx2"/>
                 </a:solidFill>
               </a:rPr>
-              <a:t>Team</a:t>
+              <a:t>GROUPED_BY_LABEL</a:t>
             </a:r>
           </a:p>
         </p:txBody>
@@ -34636,7 +34636,7 @@
                   <a:schemeClr val="bg1"/>
                 </a:solidFill>
               </a:rPr>
-              <a:t>PORTFOLIO_PERIOD_ARCH_BOUNDED_EVOLUTION_GROUPED_BY_TEAM</a:t>
+              <a:t>PORTFOLIO_PERIOD_ARCH_BOUNDED_EVOLUTION</a:t>
             </a:r>
           </a:p>
         </p:txBody>
@@ -35240,7 +35240,7 @@
                   <a:schemeClr val="tx2"/>
                 </a:solidFill>
               </a:rPr>
-              <a:t>Team</a:t>
+              <a:t>GROUPED_BY_LABEL</a:t>
             </a:r>
           </a:p>
         </p:txBody>
@@ -35592,7 +35592,7 @@
                   <a:schemeClr val="bg1"/>
                 </a:solidFill>
               </a:rPr>
-              <a:t>PORTFOLIO_PERIOD_ARCH_BOUNDED_EVOLUTION_RATINGS_CHANGE_GROUPED_BY_TEAM</a:t>
+              <a:t>PORTFOLIO_PERIOD_ARCH_BOUNDED_EVOLUTION_RATINGS_CHANGE</a:t>
             </a:r>
           </a:p>
         </p:txBody>
@@ -36011,7 +36011,7 @@
                   <a:schemeClr val="tx2"/>
                 </a:solidFill>
               </a:rPr>
-              <a:t>Team</a:t>
+              <a:t>GROUPED_BY_LABEL</a:t>
             </a:r>
           </a:p>
         </p:txBody>
@@ -36299,7 +36299,7 @@
                   <a:schemeClr val="bg1"/>
                 </a:solidFill>
               </a:rPr>
-              <a:t>PORTFOLIO_PERIOD_ARCH_KNOWLEDGE_AWARENESS_GROUPED_BY_TEAM</a:t>
+              <a:t>PORTFOLIO_PERIOD_ARCH_KNOWLEDGE_AWARENESS</a:t>
             </a:r>
           </a:p>
         </p:txBody>
@@ -36903,7 +36903,7 @@
                   <a:schemeClr val="tx2"/>
                 </a:solidFill>
               </a:rPr>
-              <a:t>Team</a:t>
+              <a:t>GROUPED_BY_LABEL</a:t>
             </a:r>
           </a:p>
         </p:txBody>
@@ -37255,7 +37255,7 @@
                   <a:schemeClr val="bg1"/>
                 </a:solidFill>
               </a:rPr>
-              <a:t>PORTFOLIO_PERIOD_ARCH_KNOWLEDGE_AWARENESS_RATINGS_CHANGE_GROUPED_BY_TEAM</a:t>
+              <a:t>PORTFOLIO_PERIOD_ARCH_KNOWLEDGE_AWARENESS_RATINGS_CHANGE</a:t>
             </a:r>
           </a:p>
         </p:txBody>
@@ -37674,7 +37674,7 @@
                   <a:schemeClr val="tx2"/>
                 </a:solidFill>
               </a:rPr>
-              <a:t>Team</a:t>
+              <a:t>GROUPED_BY_LABEL</a:t>
             </a:r>
           </a:p>
         </p:txBody>
@@ -37962,7 +37962,7 @@
                   <a:schemeClr val="bg1"/>
                 </a:solidFill>
               </a:rPr>
-              <a:t>PORTFOLIO_PERIOD_ARCH_COMPONENT_FRESHNESS_GROUPED_BY_TEAM</a:t>
+              <a:t>PORTFOLIO_PERIOD_ARCH_COMPONENT_FRESHNESS</a:t>
             </a:r>
           </a:p>
         </p:txBody>
@@ -38566,7 +38566,7 @@
                   <a:schemeClr val="tx2"/>
                 </a:solidFill>
               </a:rPr>
-              <a:t>Team</a:t>
+              <a:t>GROUPED_BY_LABEL</a:t>
             </a:r>
           </a:p>
         </p:txBody>
@@ -38918,7 +38918,7 @@
                   <a:schemeClr val="bg1"/>
                 </a:solidFill>
               </a:rPr>
-              <a:t>PORTFOLIO_PERIOD_ARCH_COMPONENT_FRESHNESS_RATINGS_CHANGE_GROUPED_BY_TEAM</a:t>
+              <a:t>PORTFOLIO_PERIOD_ARCH_COMPONENT_FRESHNESS_RATINGS_CHANGE</a:t>
             </a:r>
           </a:p>
         </p:txBody>
@@ -39337,7 +39337,7 @@
                   <a:schemeClr val="tx2"/>
                 </a:solidFill>
               </a:rPr>
-              <a:t>Team</a:t>
+              <a:t>GROUPED_BY_LABEL</a:t>
             </a:r>
           </a:p>
         </p:txBody>
@@ -39625,7 +39625,7 @@
                   <a:schemeClr val="bg1"/>
                 </a:solidFill>
               </a:rPr>
-              <a:t>PORTFOLIO_PERIOD_ARCH_TEAM_STABILITY_GROUPED_BY_TEAM</a:t>
+              <a:t>PORTFOLIO_PERIOD_ARCH_TEAM_STABILITY</a:t>
             </a:r>
           </a:p>
         </p:txBody>
@@ -40229,7 +40229,7 @@
                   <a:schemeClr val="tx2"/>
                 </a:solidFill>
               </a:rPr>
-              <a:t>Team</a:t>
+              <a:t>GROUPED_BY_LABEL</a:t>
             </a:r>
           </a:p>
         </p:txBody>
@@ -40581,7 +40581,7 @@
                   <a:schemeClr val="bg1"/>
                 </a:solidFill>
               </a:rPr>
-              <a:t>PORTFOLIO_PERIOD_ARCH_TEAM_STABILITY_RATINGS_CHANGE_GROUPED_BY_TEAM</a:t>
+              <a:t>PORTFOLIO_PERIOD_ARCH_TEAM_STABILITY_RATINGS_CHANGE</a:t>
             </a:r>
           </a:p>
         </p:txBody>
@@ -41000,7 +41000,7 @@
                   <a:schemeClr val="tx2"/>
                 </a:solidFill>
               </a:rPr>
-              <a:t>Team</a:t>
+              <a:t>GROUPED_BY_LABEL</a:t>
             </a:r>
           </a:p>
         </p:txBody>
@@ -41556,7 +41556,7 @@
                   <a:schemeClr val="bg1"/>
                 </a:solidFill>
               </a:rPr>
-              <a:t>PORTFOLIO_PERIOD_OSH_VULNERABILITY_GROUPED_BY_TEAM</a:t>
+              <a:t>PORTFOLIO_PERIOD_OSH_VULNERABILITY</a:t>
             </a:r>
           </a:p>
         </p:txBody>
@@ -42160,7 +42160,7 @@
                   <a:schemeClr val="tx2"/>
                 </a:solidFill>
               </a:rPr>
-              <a:t>Team</a:t>
+              <a:t>GROUPED_BY_LABEL</a:t>
             </a:r>
           </a:p>
         </p:txBody>
@@ -42512,7 +42512,7 @@
                   <a:schemeClr val="bg1"/>
                 </a:solidFill>
               </a:rPr>
-              <a:t>PORTFOLIO_PERIOD_MAINT_DUPLICATION_CHANGE_GROUPED_BY_TEAM</a:t>
+              <a:t>PORTFOLIO_PERIOD_MAINT_DUPLICATION_CHANGE</a:t>
             </a:r>
           </a:p>
         </p:txBody>
@@ -42931,7 +42931,7 @@
                   <a:schemeClr val="tx2"/>
                 </a:solidFill>
               </a:rPr>
-              <a:t>Team</a:t>
+              <a:t>GROUPED_BY_LABEL</a:t>
             </a:r>
           </a:p>
         </p:txBody>
@@ -43219,7 +43219,7 @@
                   <a:schemeClr val="bg1"/>
                 </a:solidFill>
               </a:rPr>
-              <a:t>PORTFOLIO_PERIOD_OSH_LICENSES_GROUPED_BY_TEAM</a:t>
+              <a:t>PORTFOLIO_PERIOD_OSH_LICENSES</a:t>
             </a:r>
           </a:p>
         </p:txBody>
@@ -43823,7 +43823,7 @@
                   <a:schemeClr val="tx2"/>
                 </a:solidFill>
               </a:rPr>
-              <a:t>Team</a:t>
+              <a:t>GROUPED_BY_LABEL</a:t>
             </a:r>
           </a:p>
         </p:txBody>
@@ -44175,7 +44175,7 @@
                   <a:schemeClr val="bg1"/>
                 </a:solidFill>
               </a:rPr>
-              <a:t>PORTFOLIO_PERIOD_OSH_FRESHNESS_GROUPED_BY_TEAM</a:t>
+              <a:t>PORTFOLIO_PERIOD_OSH_FRESHNESS</a:t>
             </a:r>
           </a:p>
         </p:txBody>
@@ -44779,7 +44779,7 @@
                   <a:schemeClr val="tx2"/>
                 </a:solidFill>
               </a:rPr>
-              <a:t>Team</a:t>
+              <a:t>GROUPED_BY_LABEL</a:t>
             </a:r>
           </a:p>
         </p:txBody>
@@ -45131,7 +45131,7 @@
                   <a:schemeClr val="bg1"/>
                 </a:solidFill>
               </a:rPr>
-              <a:t>PORTFOLIO_PERIOD_OSH_MANAGEMENT_GROUPED_BY_TEAM</a:t>
+              <a:t>PORTFOLIO_PERIOD_OSH_MANAGEMENT</a:t>
             </a:r>
           </a:p>
         </p:txBody>
@@ -45735,7 +45735,7 @@
                   <a:schemeClr val="tx2"/>
                 </a:solidFill>
               </a:rPr>
-              <a:t>Team</a:t>
+              <a:t>GROUPED_BY_LABEL</a:t>
             </a:r>
           </a:p>
         </p:txBody>
@@ -46087,7 +46087,7 @@
                   <a:schemeClr val="bg1"/>
                 </a:solidFill>
               </a:rPr>
-              <a:t>PORTFOLIO_PERIOD_OSH_ACTIVITY_GROUPED_BY_TEAM</a:t>
+              <a:t>PORTFOLIO_PERIOD_OSH_ACTIVITY</a:t>
             </a:r>
           </a:p>
         </p:txBody>
@@ -46133,7 +46133,7 @@
                   <a:schemeClr val="tx2"/>
                 </a:solidFill>
               </a:rPr>
-              <a:t>Team</a:t>
+              <a:t>GROUPED_BY_LABEL</a:t>
             </a:r>
           </a:p>
         </p:txBody>
@@ -47139,7 +47139,7 @@
                   <a:schemeClr val="bg1"/>
                 </a:solidFill>
               </a:rPr>
-              <a:t>PORTFOLIO_PERIOD_MAINT_UNIT_SIZE_GROUPED_BY_TEAM</a:t>
+              <a:t>PORTFOLIO_PERIOD_MAINT_UNIT_SIZE</a:t>
             </a:r>
           </a:p>
         </p:txBody>
@@ -47743,7 +47743,7 @@
                   <a:schemeClr val="tx2"/>
                 </a:solidFill>
               </a:rPr>
-              <a:t>Team</a:t>
+              <a:t>GROUPED_BY_LABEL</a:t>
             </a:r>
           </a:p>
         </p:txBody>
@@ -48095,7 +48095,7 @@
                   <a:schemeClr val="bg1"/>
                 </a:solidFill>
               </a:rPr>
-              <a:t>PORTFOLIO_PERIOD_MAINT_UNIT_SIZE_CHANGE_GROUPED_BY_TEAM</a:t>
+              <a:t>PORTFOLIO_PERIOD_MAINT_UNIT_SIZE_CHANGE</a:t>
             </a:r>
           </a:p>
         </p:txBody>
@@ -48514,7 +48514,7 @@
                   <a:schemeClr val="tx2"/>
                 </a:solidFill>
               </a:rPr>
-              <a:t>Team</a:t>
+              <a:t>GROUPED_BY_LABEL</a:t>
             </a:r>
           </a:p>
         </p:txBody>
@@ -48802,7 +48802,7 @@
                   <a:schemeClr val="bg1"/>
                 </a:solidFill>
               </a:rPr>
-              <a:t>PORTFOLIO_PERIOD_MAINT_UNIT_COMPLEXITY_GROUPED_BY_TEAM</a:t>
+              <a:t>PORTFOLIO_PERIOD_MAINT_UNIT_COMPLEXITY</a:t>
             </a:r>
           </a:p>
         </p:txBody>
@@ -49406,7 +49406,7 @@
                   <a:schemeClr val="tx2"/>
                 </a:solidFill>
               </a:rPr>
-              <a:t>Team</a:t>
+              <a:t>GROUPED_BY_LABEL</a:t>
             </a:r>
           </a:p>
         </p:txBody>
@@ -49758,7 +49758,7 @@
                   <a:schemeClr val="bg1"/>
                 </a:solidFill>
               </a:rPr>
-              <a:t>PORTFOLIO_PERIOD_MAINT_UNIT_COMPLEXITY_CHANGE_GROUPED_BY_TEAM</a:t>
+              <a:t>PORTFOLIO_PERIOD_MAINT_UNIT_COMPLEXITY_CHANGE</a:t>
             </a:r>
           </a:p>
         </p:txBody>
@@ -50177,7 +50177,7 @@
                   <a:schemeClr val="tx2"/>
                 </a:solidFill>
               </a:rPr>
-              <a:t>Team</a:t>
+              <a:t>GROUPED_BY_LABEL</a:t>
             </a:r>
           </a:p>
         </p:txBody>
@@ -50465,7 +50465,7 @@
                   <a:schemeClr val="bg1"/>
                 </a:solidFill>
               </a:rPr>
-              <a:t>PORTFOLIO_PERIOD_MAINT_UNIT_INTERFACING_GROUPED_BY_TEAM</a:t>
+              <a:t>PORTFOLIO_PERIOD_MAINT_UNIT_INTERFACING</a:t>
             </a:r>
           </a:p>
         </p:txBody>
@@ -51069,7 +51069,7 @@
                   <a:schemeClr val="tx2"/>
                 </a:solidFill>
               </a:rPr>
-              <a:t>Team</a:t>
+              <a:t>GROUPED_BY_LABEL</a:t>
             </a:r>
           </a:p>
         </p:txBody>

--- a/src/report_generator/presets/templates/portfolio-metrics.pptx
+++ b/src/report_generator/presets/templates/portfolio-metrics.pptx
@@ -336,7 +336,7 @@
           <a:p>
             <a:fld id="{C1255C68-584F-174D-BB81-51BF91708794}" type="datetimeFigureOut">
               <a:rPr lang="en-US" smtClean="0"/>
-              <a:t>8/21/26</a:t>
+              <a:t>9/4/26</a:t>
             </a:fld>
             <a:endParaRPr lang="en-US"/>
           </a:p>
@@ -529,7 +529,7 @@
           <a:p>
             <a:fld id="{A1EDAAC4-819D-C544-9EA1-C73624CFD70B}" type="datetimeFigureOut">
               <a:rPr lang="en-US" smtClean="0"/>
-              <a:t>8/21/26</a:t>
+              <a:t>9/4/26</a:t>
             </a:fld>
             <a:endParaRPr lang="en-US"/>
           </a:p>
@@ -2152,351 +2152,6 @@
 </file>
 
 <file path=ppt/slideLayouts/slideLayout4.xml><?xml version="1.0" encoding="utf-8"?>
-<p:sldLayout xmlns:a="http://schemas.openxmlformats.org/drawingml/2006/main" xmlns:r="http://schemas.openxmlformats.org/officeDocument/2006/relationships" xmlns:p="http://schemas.openxmlformats.org/presentationml/2006/main" preserve="1" userDrawn="1">
-  <p:cSld name="Treemap">
-    <p:spTree>
-      <p:nvGrpSpPr>
-        <p:cNvPr id="1" name=""/>
-        <p:cNvGrpSpPr/>
-        <p:nvPr/>
-      </p:nvGrpSpPr>
-      <p:grpSpPr>
-        <a:xfrm>
-          <a:off x="0" y="0"/>
-          <a:ext cx="0" cy="0"/>
-          <a:chOff x="0" y="0"/>
-          <a:chExt cx="0" cy="0"/>
-        </a:xfrm>
-      </p:grpSpPr>
-      <p:sp>
-        <p:nvSpPr>
-          <p:cNvPr id="26" name="Text Placeholder 4">
-            <a:extLst>
-              <a:ext uri="{FF2B5EF4-FFF2-40B4-BE49-F238E27FC236}">
-                <a16:creationId xmlns:a16="http://schemas.microsoft.com/office/drawing/2014/main" id="{CC299468-581B-CC41-8897-C7E1583185E0}"/>
-              </a:ext>
-            </a:extLst>
-          </p:cNvPr>
-          <p:cNvSpPr>
-            <a:spLocks noGrp="1"/>
-          </p:cNvSpPr>
-          <p:nvPr>
-            <p:ph type="body" sz="quarter" idx="12"/>
-          </p:nvPr>
-        </p:nvSpPr>
-        <p:spPr>
-          <a:xfrm>
-            <a:off x="381600" y="129568"/>
-            <a:ext cx="145471" cy="228209"/>
-          </a:xfrm>
-          <a:prstGeom prst="rect">
-            <a:avLst/>
-          </a:prstGeom>
-          <a:gradFill>
-            <a:gsLst>
-              <a:gs pos="0">
-                <a:srgbClr val="F8C716">
-                  <a:alpha val="0"/>
-                </a:srgbClr>
-              </a:gs>
-              <a:gs pos="5000">
-                <a:srgbClr val="F9C716"/>
-              </a:gs>
-            </a:gsLst>
-            <a:lin ang="0" scaled="0"/>
-          </a:gradFill>
-        </p:spPr>
-        <p:txBody>
-          <a:bodyPr wrap="none" lIns="0" tIns="28800" rIns="144000" bIns="28800" anchor="ctr" anchorCtr="0">
-            <a:spAutoFit/>
-          </a:bodyPr>
-          <a:lstStyle>
-            <a:lvl1pPr marL="0" indent="0">
-              <a:buFont typeface="Arial" panose="020B0604020202020204" pitchFamily="34" charset="0"/>
-              <a:buNone/>
-              <a:defRPr lang="en-US" sz="1050" b="0" cap="none" spc="-30" baseline="0" dirty="0">
-                <a:solidFill>
-                  <a:srgbClr val="000000"/>
-                </a:solidFill>
-                <a:latin typeface="Azeret Mono" pitchFamily="2" charset="77"/>
-                <a:ea typeface="TheSans B6 SemiBold" charset="0"/>
-                <a:cs typeface="TheSans B6 SemiBold" charset="0"/>
-              </a:defRPr>
-            </a:lvl1pPr>
-          </a:lstStyle>
-          <a:p>
-            <a:pPr marL="0" lvl="0"/>
-            <a:r>
-              <a:rPr lang="en-US"/>
-              <a:t>Click to edit Master text styles</a:t>
-            </a:r>
-          </a:p>
-        </p:txBody>
-      </p:sp>
-      <p:sp>
-        <p:nvSpPr>
-          <p:cNvPr id="13" name="Content Placeholder 2">
-            <a:extLst>
-              <a:ext uri="{FF2B5EF4-FFF2-40B4-BE49-F238E27FC236}">
-                <a16:creationId xmlns:a16="http://schemas.microsoft.com/office/drawing/2014/main" id="{F750EC08-DA20-234C-8634-75139A014432}"/>
-              </a:ext>
-            </a:extLst>
-          </p:cNvPr>
-          <p:cNvSpPr>
-            <a:spLocks noGrp="1"/>
-          </p:cNvSpPr>
-          <p:nvPr>
-            <p:ph sz="quarter" idx="13" hasCustomPrompt="1"/>
-          </p:nvPr>
-        </p:nvSpPr>
-        <p:spPr>
-          <a:xfrm>
-            <a:off x="154800" y="1411200"/>
-            <a:ext cx="11880000" cy="4842000"/>
-          </a:xfrm>
-        </p:spPr>
-        <p:txBody>
-          <a:bodyPr>
-            <a:noAutofit/>
-          </a:bodyPr>
-          <a:lstStyle>
-            <a:lvl1pPr marL="0" indent="0">
-              <a:buFont typeface="Arial" panose="020B0604020202020204" pitchFamily="34" charset="0"/>
-              <a:buNone/>
-              <a:tabLst/>
-              <a:defRPr/>
-            </a:lvl1pPr>
-          </a:lstStyle>
-          <a:p>
-            <a:pPr lvl="0"/>
-            <a:r>
-              <a:rPr lang="en-US" dirty="0"/>
-              <a:t>Insert content text (headers in bold)</a:t>
-            </a:r>
-          </a:p>
-        </p:txBody>
-      </p:sp>
-      <p:sp>
-        <p:nvSpPr>
-          <p:cNvPr id="3" name="Tijdelijke aanduiding voor dianummer 2">
-            <a:extLst>
-              <a:ext uri="{FF2B5EF4-FFF2-40B4-BE49-F238E27FC236}">
-                <a16:creationId xmlns:a16="http://schemas.microsoft.com/office/drawing/2014/main" id="{EB15F17F-E5AA-EA4C-0903-54596120C54E}"/>
-              </a:ext>
-            </a:extLst>
-          </p:cNvPr>
-          <p:cNvSpPr>
-            <a:spLocks noGrp="1"/>
-          </p:cNvSpPr>
-          <p:nvPr>
-            <p:ph type="sldNum" sz="quarter" idx="15"/>
-          </p:nvPr>
-        </p:nvSpPr>
-        <p:spPr/>
-        <p:txBody>
-          <a:bodyPr/>
-          <a:lstStyle/>
-          <a:p>
-            <a:fld id="{E242BD21-9B61-2246-BCB1-4BE5E1BEBE1C}" type="slidenum">
-              <a:rPr lang="nl-NL" smtClean="0"/>
-              <a:pPr/>
-              <a:t>‹#›</a:t>
-            </a:fld>
-            <a:endParaRPr lang="nl-NL"/>
-          </a:p>
-        </p:txBody>
-      </p:sp>
-      <p:sp>
-        <p:nvSpPr>
-          <p:cNvPr id="4" name="Titel 3">
-            <a:extLst>
-              <a:ext uri="{FF2B5EF4-FFF2-40B4-BE49-F238E27FC236}">
-                <a16:creationId xmlns:a16="http://schemas.microsoft.com/office/drawing/2014/main" id="{2134FAEE-D5F3-DE0B-2810-BA6C3B0DE8A0}"/>
-              </a:ext>
-            </a:extLst>
-          </p:cNvPr>
-          <p:cNvSpPr>
-            <a:spLocks noGrp="1"/>
-          </p:cNvSpPr>
-          <p:nvPr>
-            <p:ph type="title" hasCustomPrompt="1"/>
-          </p:nvPr>
-        </p:nvSpPr>
-        <p:spPr/>
-        <p:txBody>
-          <a:bodyPr/>
-          <a:lstStyle/>
-          <a:p>
-            <a:r>
-              <a:rPr lang="nl-NL" dirty="0" err="1"/>
-              <a:t>Insert</a:t>
-            </a:r>
-            <a:r>
-              <a:rPr lang="nl-NL" dirty="0"/>
-              <a:t> </a:t>
-            </a:r>
-            <a:r>
-              <a:rPr lang="nl-NL" dirty="0" err="1"/>
-              <a:t>key</a:t>
-            </a:r>
-            <a:r>
-              <a:rPr lang="nl-NL" dirty="0"/>
-              <a:t> slide </a:t>
-            </a:r>
-            <a:r>
-              <a:rPr lang="nl-NL" dirty="0" err="1"/>
-              <a:t>message</a:t>
-            </a:r>
-            <a:r>
-              <a:rPr lang="nl-NL" dirty="0"/>
-              <a:t> (</a:t>
-            </a:r>
-            <a:r>
-              <a:rPr lang="nl-NL" dirty="0" err="1"/>
-              <a:t>title</a:t>
-            </a:r>
-            <a:r>
-              <a:rPr lang="nl-NL" dirty="0"/>
-              <a:t>)</a:t>
-            </a:r>
-            <a:endParaRPr lang="en-US" dirty="0"/>
-          </a:p>
-        </p:txBody>
-      </p:sp>
-      <p:sp>
-        <p:nvSpPr>
-          <p:cNvPr id="5" name="Rectangle 4">
-            <a:extLst>
-              <a:ext uri="{FF2B5EF4-FFF2-40B4-BE49-F238E27FC236}">
-                <a16:creationId xmlns:a16="http://schemas.microsoft.com/office/drawing/2014/main" id="{831DF13F-1492-BD13-A6B1-7A914E1FDC59}"/>
-              </a:ext>
-            </a:extLst>
-          </p:cNvPr>
-          <p:cNvSpPr/>
-          <p:nvPr userDrawn="1"/>
-        </p:nvSpPr>
-        <p:spPr>
-          <a:xfrm>
-            <a:off x="0" y="1390132"/>
-            <a:ext cx="12192000" cy="4927867"/>
-          </a:xfrm>
-          <a:prstGeom prst="rect">
-            <a:avLst/>
-          </a:prstGeom>
-          <a:solidFill>
-            <a:schemeClr val="bg1"/>
-          </a:solidFill>
-          <a:ln>
-            <a:noFill/>
-          </a:ln>
-          <a:effectLst>
-            <a:outerShdw blurRad="190500" dist="38100" dir="2700000" algn="tl" rotWithShape="0">
-              <a:prstClr val="black">
-                <a:alpha val="15000"/>
-              </a:prstClr>
-            </a:outerShdw>
-          </a:effectLst>
-        </p:spPr>
-        <p:style>
-          <a:lnRef idx="2">
-            <a:schemeClr val="accent1">
-              <a:shade val="50000"/>
-            </a:schemeClr>
-          </a:lnRef>
-          <a:fillRef idx="1">
-            <a:schemeClr val="accent1"/>
-          </a:fillRef>
-          <a:effectRef idx="0">
-            <a:schemeClr val="accent1"/>
-          </a:effectRef>
-          <a:fontRef idx="minor">
-            <a:schemeClr val="lt1"/>
-          </a:fontRef>
-        </p:style>
-        <p:txBody>
-          <a:bodyPr lIns="731520" tIns="72000" rIns="108000" bIns="72000" rtlCol="0" anchor="ctr"/>
-          <a:lstStyle/>
-          <a:p>
-            <a:endParaRPr lang="nl-NL" sz="1200" b="1" noProof="0" dirty="0">
-              <a:solidFill>
-                <a:schemeClr val="accent1"/>
-              </a:solidFill>
-            </a:endParaRPr>
-          </a:p>
-        </p:txBody>
-      </p:sp>
-      <p:sp>
-        <p:nvSpPr>
-          <p:cNvPr id="6" name="Footer Placeholder 4">
-            <a:extLst>
-              <a:ext uri="{FF2B5EF4-FFF2-40B4-BE49-F238E27FC236}">
-                <a16:creationId xmlns:a16="http://schemas.microsoft.com/office/drawing/2014/main" id="{BF4D9293-49E2-42AF-E099-654DFF3A9984}"/>
-              </a:ext>
-            </a:extLst>
-          </p:cNvPr>
-          <p:cNvSpPr>
-            <a:spLocks noGrp="1"/>
-          </p:cNvSpPr>
-          <p:nvPr>
-            <p:ph type="ftr" sz="quarter" idx="3"/>
-          </p:nvPr>
-        </p:nvSpPr>
-        <p:spPr>
-          <a:xfrm>
-            <a:off x="192158" y="6392274"/>
-            <a:ext cx="1763922" cy="370422"/>
-          </a:xfrm>
-          <a:prstGeom prst="rect">
-            <a:avLst/>
-          </a:prstGeom>
-        </p:spPr>
-        <p:txBody>
-          <a:bodyPr/>
-          <a:lstStyle/>
-          <a:p>
-            <a:r>
-              <a:rPr lang="nl-NL" dirty="0" err="1"/>
-              <a:t>Generated</a:t>
-            </a:r>
-            <a:r>
-              <a:rPr lang="nl-NL" dirty="0"/>
-              <a:t> </a:t>
-            </a:r>
-            <a:r>
-              <a:rPr lang="nl-NL" dirty="0" err="1"/>
-              <a:t>with</a:t>
-            </a:r>
-            <a:r>
-              <a:rPr lang="nl-NL" dirty="0"/>
-              <a:t> Sigrid</a:t>
-            </a:r>
-          </a:p>
-          <a:p>
-            <a:r>
-              <a:rPr lang="nl-NL" dirty="0" err="1"/>
-              <a:t>for</a:t>
-            </a:r>
-            <a:r>
-              <a:rPr lang="nl-NL" dirty="0"/>
-              <a:t> CUSTOMER_NAME</a:t>
-            </a:r>
-          </a:p>
-        </p:txBody>
-      </p:sp>
-    </p:spTree>
-    <p:extLst>
-      <p:ext uri="{BB962C8B-B14F-4D97-AF65-F5344CB8AC3E}">
-        <p14:creationId xmlns:p14="http://schemas.microsoft.com/office/powerpoint/2010/main" val="3381798929"/>
-      </p:ext>
-    </p:extLst>
-  </p:cSld>
-  <p:clrMapOvr>
-    <a:masterClrMapping/>
-  </p:clrMapOvr>
-</p:sldLayout>
-</file>
-
-<file path=ppt/slideLayouts/slideLayout5.xml><?xml version="1.0" encoding="utf-8"?>
 <p:sldLayout xmlns:a="http://schemas.openxmlformats.org/drawingml/2006/main" xmlns:r="http://schemas.openxmlformats.org/officeDocument/2006/relationships" xmlns:p="http://schemas.openxmlformats.org/presentationml/2006/main" userDrawn="1">
   <p:cSld name="OSH system results">
     <p:spTree>
@@ -4737,7 +4392,7 @@
 </p:sldLayout>
 </file>
 
-<file path=ppt/slideLayouts/slideLayout6.xml><?xml version="1.0" encoding="utf-8"?>
+<file path=ppt/slideLayouts/slideLayout5.xml><?xml version="1.0" encoding="utf-8"?>
 <p:sldLayout xmlns:a="http://schemas.openxmlformats.org/drawingml/2006/main" xmlns:r="http://schemas.openxmlformats.org/officeDocument/2006/relationships" xmlns:p="http://schemas.openxmlformats.org/presentationml/2006/main" preserve="1" userDrawn="1">
   <p:cSld name="General">
     <p:spTree>
@@ -6003,7 +5658,7 @@
           <p:nvPr userDrawn="1"/>
         </p:nvPicPr>
         <p:blipFill>
-          <a:blip r:embed="rId7"/>
+          <a:blip r:embed="rId6"/>
           <a:stretch>
             <a:fillRect/>
           </a:stretch>
@@ -6152,8 +5807,7 @@
     <p:sldLayoutId id="2147483669" r:id="rId1"/>
     <p:sldLayoutId id="2147483662" r:id="rId2"/>
     <p:sldLayoutId id="2147483792" r:id="rId3"/>
-    <p:sldLayoutId id="2147483776" r:id="rId4"/>
-    <p:sldLayoutId id="2147483793" r:id="rId5"/>
+    <p:sldLayoutId id="2147483793" r:id="rId4"/>
   </p:sldLayoutIdLst>
   <p:hf hdr="0" dt="0"/>
   <p:txStyles>
@@ -17320,8 +16974,8 @@
         </p:nvSpPr>
         <p:spPr>
           <a:xfrm>
-            <a:off x="381600" y="129568"/>
-            <a:ext cx="1410176" cy="228209"/>
+            <a:off x="381600" y="129599"/>
+            <a:ext cx="1410176" cy="228145"/>
           </a:xfrm>
         </p:spPr>
         <p:txBody>
@@ -17334,25 +16988,6 @@
               <a:rPr lang="en-US" dirty="0"/>
               <a:t>Maintainability</a:t>
             </a:r>
-          </a:p>
-        </p:txBody>
-      </p:sp>
-      <p:sp>
-        <p:nvSpPr>
-          <p:cNvPr id="3" name="Content Placeholder 2"/>
-          <p:cNvSpPr>
-            <a:spLocks noGrp="1"/>
-          </p:cNvSpPr>
-          <p:nvPr>
-            <p:ph sz="quarter" idx="13"/>
-          </p:nvPr>
-        </p:nvSpPr>
-        <p:spPr/>
-        <p:txBody>
-          <a:bodyPr/>
-          <a:lstStyle/>
-          <a:p>
-            <a:endParaRPr/>
           </a:p>
         </p:txBody>
       </p:sp>
@@ -17382,63 +17017,29 @@
       </p:sp>
       <p:sp>
         <p:nvSpPr>
-          <p:cNvPr id="7" name="Rectangle 6">
-            <a:extLst>
-              <a:ext uri="{FF2B5EF4-FFF2-40B4-BE49-F238E27FC236}">
-                <a16:creationId xmlns:a16="http://schemas.microsoft.com/office/drawing/2014/main" id="{4D956AE0-666A-B966-0B15-61A5E6C88F75}"/>
-              </a:ext>
-            </a:extLst>
-          </p:cNvPr>
-          <p:cNvSpPr/>
-          <p:nvPr/>
+          <p:cNvPr id="2004" name="Footer Placeholder 2004"/>
+          <p:cNvSpPr>
+            <a:spLocks noGrp="1"/>
+          </p:cNvSpPr>
+          <p:nvPr>
+            <p:ph type="ftr" sz="quarter" idx="3"/>
+          </p:nvPr>
         </p:nvSpPr>
-        <p:spPr>
-          <a:xfrm>
-            <a:off x="0" y="1390132"/>
-            <a:ext cx="12192000" cy="4927867"/>
-          </a:xfrm>
-          <a:prstGeom prst="rect">
-            <a:avLst/>
-          </a:prstGeom>
-          <a:solidFill>
-            <a:schemeClr val="bg1"/>
-          </a:solidFill>
-          <a:ln>
-            <a:noFill/>
-          </a:ln>
-          <a:effectLst>
-            <a:outerShdw blurRad="190500" dist="38100" dir="2700000" algn="tl" rotWithShape="0">
-              <a:prstClr val="black">
-                <a:alpha val="15000"/>
-              </a:prstClr>
-            </a:outerShdw>
-          </a:effectLst>
-        </p:spPr>
-        <p:style>
-          <a:lnRef idx="2">
-            <a:schemeClr val="accent1">
-              <a:shade val="50000"/>
-            </a:schemeClr>
-          </a:lnRef>
-          <a:fillRef idx="1">
-            <a:schemeClr val="accent1"/>
-          </a:fillRef>
-          <a:effectRef idx="0">
-            <a:schemeClr val="accent1"/>
-          </a:effectRef>
-          <a:fontRef idx="minor">
-            <a:schemeClr val="lt1"/>
-          </a:fontRef>
-        </p:style>
+        <p:spPr/>
         <p:txBody>
-          <a:bodyPr lIns="731520" tIns="72000" rIns="108000" bIns="72000" rtlCol="0" anchor="ctr"/>
+          <a:bodyPr/>
           <a:lstStyle/>
           <a:p>
-            <a:endParaRPr lang="nl-NL" sz="1200" b="1" noProof="0" dirty="0">
-              <a:solidFill>
-                <a:schemeClr val="accent1"/>
-              </a:solidFill>
-            </a:endParaRPr>
+            <a:r>
+              <a:rPr lang="en-US" dirty="0"/>
+              <a:t>Generated with Sigrid</a:t>
+            </a:r>
+          </a:p>
+          <a:p>
+            <a:r>
+              <a:rPr lang="en-US" dirty="0"/>
+              <a:t>for CUSTOMER_NAME</a:t>
+            </a:r>
           </a:p>
         </p:txBody>
       </p:sp>
@@ -17837,39 +17438,6 @@
             <a:r>
               <a:rPr lang="en-US" sz="800" dirty="0"/>
               <a:t>★</a:t>
-            </a:r>
-          </a:p>
-        </p:txBody>
-      </p:sp>
-      <p:sp>
-        <p:nvSpPr>
-          <p:cNvPr id="2004" name="Footer Placeholder 2004"/>
-          <p:cNvSpPr>
-            <a:spLocks noGrp="1"/>
-          </p:cNvSpPr>
-          <p:nvPr>
-            <p:ph type="ftr" sz="quarter" idx="3"/>
-          </p:nvPr>
-        </p:nvSpPr>
-        <p:spPr>
-          <a:xfrm>
-            <a:off x="192088" y="6392596"/>
-            <a:ext cx="1763922" cy="370422"/>
-          </a:xfrm>
-        </p:spPr>
-        <p:txBody>
-          <a:bodyPr/>
-          <a:lstStyle/>
-          <a:p>
-            <a:r>
-              <a:rPr lang="en-US" dirty="0"/>
-              <a:t>Generated with Sigrid</a:t>
-            </a:r>
-          </a:p>
-          <a:p>
-            <a:r>
-              <a:rPr lang="en-US" dirty="0"/>
-              <a:t>for CUSTOMER_NAME</a:t>
             </a:r>
           </a:p>
         </p:txBody>
@@ -18027,8 +17595,8 @@
         </p:nvSpPr>
         <p:spPr>
           <a:xfrm>
-            <a:off x="381600" y="129568"/>
-            <a:ext cx="1410176" cy="228209"/>
+            <a:off x="381600" y="129599"/>
+            <a:ext cx="1410176" cy="228145"/>
           </a:xfrm>
         </p:spPr>
         <p:txBody>
@@ -18041,25 +17609,6 @@
               <a:rPr lang="en-US" dirty="0"/>
               <a:t>Maintainability</a:t>
             </a:r>
-          </a:p>
-        </p:txBody>
-      </p:sp>
-      <p:sp>
-        <p:nvSpPr>
-          <p:cNvPr id="3" name="Content Placeholder 2"/>
-          <p:cNvSpPr>
-            <a:spLocks noGrp="1"/>
-          </p:cNvSpPr>
-          <p:nvPr>
-            <p:ph sz="quarter" idx="13"/>
-          </p:nvPr>
-        </p:nvSpPr>
-        <p:spPr/>
-        <p:txBody>
-          <a:bodyPr/>
-          <a:lstStyle/>
-          <a:p>
-            <a:endParaRPr/>
           </a:p>
         </p:txBody>
       </p:sp>
@@ -18089,63 +17638,29 @@
       </p:sp>
       <p:sp>
         <p:nvSpPr>
-          <p:cNvPr id="7" name="Rectangle 6">
-            <a:extLst>
-              <a:ext uri="{FF2B5EF4-FFF2-40B4-BE49-F238E27FC236}">
-                <a16:creationId xmlns:a16="http://schemas.microsoft.com/office/drawing/2014/main" id="{4D956AE0-666A-B966-0B15-61A5E6C88F75}"/>
-              </a:ext>
-            </a:extLst>
-          </p:cNvPr>
-          <p:cNvSpPr/>
-          <p:nvPr/>
+          <p:cNvPr id="1004" name="Footer Placeholder 1004"/>
+          <p:cNvSpPr>
+            <a:spLocks noGrp="1"/>
+          </p:cNvSpPr>
+          <p:nvPr>
+            <p:ph type="ftr" sz="quarter" idx="3"/>
+          </p:nvPr>
         </p:nvSpPr>
-        <p:spPr>
-          <a:xfrm>
-            <a:off x="0" y="1390132"/>
-            <a:ext cx="12192000" cy="4927867"/>
-          </a:xfrm>
-          <a:prstGeom prst="rect">
-            <a:avLst/>
-          </a:prstGeom>
-          <a:solidFill>
-            <a:schemeClr val="bg1"/>
-          </a:solidFill>
-          <a:ln>
-            <a:noFill/>
-          </a:ln>
-          <a:effectLst>
-            <a:outerShdw blurRad="190500" dist="38100" dir="2700000" algn="tl" rotWithShape="0">
-              <a:prstClr val="black">
-                <a:alpha val="15000"/>
-              </a:prstClr>
-            </a:outerShdw>
-          </a:effectLst>
-        </p:spPr>
-        <p:style>
-          <a:lnRef idx="2">
-            <a:schemeClr val="accent1">
-              <a:shade val="50000"/>
-            </a:schemeClr>
-          </a:lnRef>
-          <a:fillRef idx="1">
-            <a:schemeClr val="accent1"/>
-          </a:fillRef>
-          <a:effectRef idx="0">
-            <a:schemeClr val="accent1"/>
-          </a:effectRef>
-          <a:fontRef idx="minor">
-            <a:schemeClr val="lt1"/>
-          </a:fontRef>
-        </p:style>
+        <p:spPr/>
         <p:txBody>
-          <a:bodyPr lIns="731520" tIns="72000" rIns="108000" bIns="72000" rtlCol="0" anchor="ctr"/>
+          <a:bodyPr/>
           <a:lstStyle/>
           <a:p>
-            <a:endParaRPr lang="nl-NL" sz="1200" b="1" noProof="0" dirty="0">
-              <a:solidFill>
-                <a:schemeClr val="accent1"/>
-              </a:solidFill>
-            </a:endParaRPr>
+            <a:r>
+              <a:rPr lang="en-US" dirty="0"/>
+              <a:t>Generated with Sigrid</a:t>
+            </a:r>
+          </a:p>
+          <a:p>
+            <a:r>
+              <a:rPr lang="en-US" dirty="0"/>
+              <a:t>for CUSTOMER_NAME</a:t>
+            </a:r>
           </a:p>
         </p:txBody>
       </p:sp>
@@ -18735,39 +18250,6 @@
       </p:grpSp>
       <p:sp>
         <p:nvSpPr>
-          <p:cNvPr id="1004" name="Footer Placeholder 1004"/>
-          <p:cNvSpPr>
-            <a:spLocks noGrp="1"/>
-          </p:cNvSpPr>
-          <p:nvPr>
-            <p:ph type="ftr" sz="quarter" idx="3"/>
-          </p:nvPr>
-        </p:nvSpPr>
-        <p:spPr>
-          <a:xfrm>
-            <a:off x="192088" y="6392596"/>
-            <a:ext cx="1763922" cy="370422"/>
-          </a:xfrm>
-        </p:spPr>
-        <p:txBody>
-          <a:bodyPr/>
-          <a:lstStyle/>
-          <a:p>
-            <a:r>
-              <a:rPr lang="en-US" dirty="0"/>
-              <a:t>Generated with Sigrid</a:t>
-            </a:r>
-          </a:p>
-          <a:p>
-            <a:r>
-              <a:rPr lang="en-US" dirty="0"/>
-              <a:t>for CUSTOMER_NAME</a:t>
-            </a:r>
-          </a:p>
-        </p:txBody>
-      </p:sp>
-      <p:sp>
-        <p:nvSpPr>
           <p:cNvPr id="1071" name="TextBox 1071"/>
           <p:cNvSpPr txBox="1"/>
           <p:nvPr/>
@@ -18983,8 +18465,8 @@
         </p:nvSpPr>
         <p:spPr>
           <a:xfrm>
-            <a:off x="381600" y="129568"/>
-            <a:ext cx="1410176" cy="228209"/>
+            <a:off x="381600" y="129599"/>
+            <a:ext cx="1410176" cy="228145"/>
           </a:xfrm>
         </p:spPr>
         <p:txBody>
@@ -18997,25 +18479,6 @@
               <a:rPr lang="en-US" dirty="0"/>
               <a:t>Maintainability</a:t>
             </a:r>
-          </a:p>
-        </p:txBody>
-      </p:sp>
-      <p:sp>
-        <p:nvSpPr>
-          <p:cNvPr id="3" name="Content Placeholder 2"/>
-          <p:cNvSpPr>
-            <a:spLocks noGrp="1"/>
-          </p:cNvSpPr>
-          <p:nvPr>
-            <p:ph sz="quarter" idx="13"/>
-          </p:nvPr>
-        </p:nvSpPr>
-        <p:spPr/>
-        <p:txBody>
-          <a:bodyPr/>
-          <a:lstStyle/>
-          <a:p>
-            <a:endParaRPr/>
           </a:p>
         </p:txBody>
       </p:sp>
@@ -19045,63 +18508,29 @@
       </p:sp>
       <p:sp>
         <p:nvSpPr>
-          <p:cNvPr id="7" name="Rectangle 6">
-            <a:extLst>
-              <a:ext uri="{FF2B5EF4-FFF2-40B4-BE49-F238E27FC236}">
-                <a16:creationId xmlns:a16="http://schemas.microsoft.com/office/drawing/2014/main" id="{4D956AE0-666A-B966-0B15-61A5E6C88F75}"/>
-              </a:ext>
-            </a:extLst>
-          </p:cNvPr>
-          <p:cNvSpPr/>
-          <p:nvPr/>
+          <p:cNvPr id="2004" name="Footer Placeholder 2004"/>
+          <p:cNvSpPr>
+            <a:spLocks noGrp="1"/>
+          </p:cNvSpPr>
+          <p:nvPr>
+            <p:ph type="ftr" sz="quarter" idx="3"/>
+          </p:nvPr>
         </p:nvSpPr>
-        <p:spPr>
-          <a:xfrm>
-            <a:off x="0" y="1390132"/>
-            <a:ext cx="12192000" cy="4927867"/>
-          </a:xfrm>
-          <a:prstGeom prst="rect">
-            <a:avLst/>
-          </a:prstGeom>
-          <a:solidFill>
-            <a:schemeClr val="bg1"/>
-          </a:solidFill>
-          <a:ln>
-            <a:noFill/>
-          </a:ln>
-          <a:effectLst>
-            <a:outerShdw blurRad="190500" dist="38100" dir="2700000" algn="tl" rotWithShape="0">
-              <a:prstClr val="black">
-                <a:alpha val="15000"/>
-              </a:prstClr>
-            </a:outerShdw>
-          </a:effectLst>
-        </p:spPr>
-        <p:style>
-          <a:lnRef idx="2">
-            <a:schemeClr val="accent1">
-              <a:shade val="50000"/>
-            </a:schemeClr>
-          </a:lnRef>
-          <a:fillRef idx="1">
-            <a:schemeClr val="accent1"/>
-          </a:fillRef>
-          <a:effectRef idx="0">
-            <a:schemeClr val="accent1"/>
-          </a:effectRef>
-          <a:fontRef idx="minor">
-            <a:schemeClr val="lt1"/>
-          </a:fontRef>
-        </p:style>
+        <p:spPr/>
         <p:txBody>
-          <a:bodyPr lIns="731520" tIns="72000" rIns="108000" bIns="72000" rtlCol="0" anchor="ctr"/>
+          <a:bodyPr/>
           <a:lstStyle/>
           <a:p>
-            <a:endParaRPr lang="nl-NL" sz="1200" b="1" noProof="0" dirty="0">
-              <a:solidFill>
-                <a:schemeClr val="accent1"/>
-              </a:solidFill>
-            </a:endParaRPr>
+            <a:r>
+              <a:rPr lang="en-US" dirty="0"/>
+              <a:t>Generated with Sigrid</a:t>
+            </a:r>
+          </a:p>
+          <a:p>
+            <a:r>
+              <a:rPr lang="en-US" dirty="0"/>
+              <a:t>for CUSTOMER_NAME</a:t>
+            </a:r>
           </a:p>
         </p:txBody>
       </p:sp>
@@ -19500,39 +18929,6 @@
             <a:r>
               <a:rPr lang="en-US" sz="800" dirty="0"/>
               <a:t>★</a:t>
-            </a:r>
-          </a:p>
-        </p:txBody>
-      </p:sp>
-      <p:sp>
-        <p:nvSpPr>
-          <p:cNvPr id="2004" name="Footer Placeholder 2004"/>
-          <p:cNvSpPr>
-            <a:spLocks noGrp="1"/>
-          </p:cNvSpPr>
-          <p:nvPr>
-            <p:ph type="ftr" sz="quarter" idx="3"/>
-          </p:nvPr>
-        </p:nvSpPr>
-        <p:spPr>
-          <a:xfrm>
-            <a:off x="192088" y="6392596"/>
-            <a:ext cx="1763922" cy="370422"/>
-          </a:xfrm>
-        </p:spPr>
-        <p:txBody>
-          <a:bodyPr/>
-          <a:lstStyle/>
-          <a:p>
-            <a:r>
-              <a:rPr lang="en-US" dirty="0"/>
-              <a:t>Generated with Sigrid</a:t>
-            </a:r>
-          </a:p>
-          <a:p>
-            <a:r>
-              <a:rPr lang="en-US" dirty="0"/>
-              <a:t>for CUSTOMER_NAME</a:t>
             </a:r>
           </a:p>
         </p:txBody>
@@ -19690,8 +19086,8 @@
         </p:nvSpPr>
         <p:spPr>
           <a:xfrm>
-            <a:off x="381600" y="129568"/>
-            <a:ext cx="1410176" cy="228209"/>
+            <a:off x="381600" y="129599"/>
+            <a:ext cx="1410176" cy="228145"/>
           </a:xfrm>
         </p:spPr>
         <p:txBody>
@@ -19704,25 +19100,6 @@
               <a:rPr lang="en-US" dirty="0"/>
               <a:t>Maintainability</a:t>
             </a:r>
-          </a:p>
-        </p:txBody>
-      </p:sp>
-      <p:sp>
-        <p:nvSpPr>
-          <p:cNvPr id="3" name="Content Placeholder 2"/>
-          <p:cNvSpPr>
-            <a:spLocks noGrp="1"/>
-          </p:cNvSpPr>
-          <p:nvPr>
-            <p:ph sz="quarter" idx="13"/>
-          </p:nvPr>
-        </p:nvSpPr>
-        <p:spPr/>
-        <p:txBody>
-          <a:bodyPr/>
-          <a:lstStyle/>
-          <a:p>
-            <a:endParaRPr/>
           </a:p>
         </p:txBody>
       </p:sp>
@@ -19752,63 +19129,29 @@
       </p:sp>
       <p:sp>
         <p:nvSpPr>
-          <p:cNvPr id="7" name="Rectangle 6">
-            <a:extLst>
-              <a:ext uri="{FF2B5EF4-FFF2-40B4-BE49-F238E27FC236}">
-                <a16:creationId xmlns:a16="http://schemas.microsoft.com/office/drawing/2014/main" id="{4D956AE0-666A-B966-0B15-61A5E6C88F75}"/>
-              </a:ext>
-            </a:extLst>
-          </p:cNvPr>
-          <p:cNvSpPr/>
-          <p:nvPr/>
+          <p:cNvPr id="1004" name="Footer Placeholder 1004"/>
+          <p:cNvSpPr>
+            <a:spLocks noGrp="1"/>
+          </p:cNvSpPr>
+          <p:nvPr>
+            <p:ph type="ftr" sz="quarter" idx="3"/>
+          </p:nvPr>
         </p:nvSpPr>
-        <p:spPr>
-          <a:xfrm>
-            <a:off x="0" y="1390132"/>
-            <a:ext cx="12192000" cy="4927867"/>
-          </a:xfrm>
-          <a:prstGeom prst="rect">
-            <a:avLst/>
-          </a:prstGeom>
-          <a:solidFill>
-            <a:schemeClr val="bg1"/>
-          </a:solidFill>
-          <a:ln>
-            <a:noFill/>
-          </a:ln>
-          <a:effectLst>
-            <a:outerShdw blurRad="190500" dist="38100" dir="2700000" algn="tl" rotWithShape="0">
-              <a:prstClr val="black">
-                <a:alpha val="15000"/>
-              </a:prstClr>
-            </a:outerShdw>
-          </a:effectLst>
-        </p:spPr>
-        <p:style>
-          <a:lnRef idx="2">
-            <a:schemeClr val="accent1">
-              <a:shade val="50000"/>
-            </a:schemeClr>
-          </a:lnRef>
-          <a:fillRef idx="1">
-            <a:schemeClr val="accent1"/>
-          </a:fillRef>
-          <a:effectRef idx="0">
-            <a:schemeClr val="accent1"/>
-          </a:effectRef>
-          <a:fontRef idx="minor">
-            <a:schemeClr val="lt1"/>
-          </a:fontRef>
-        </p:style>
+        <p:spPr/>
         <p:txBody>
-          <a:bodyPr lIns="731520" tIns="72000" rIns="108000" bIns="72000" rtlCol="0" anchor="ctr"/>
+          <a:bodyPr/>
           <a:lstStyle/>
           <a:p>
-            <a:endParaRPr lang="nl-NL" sz="1200" b="1" noProof="0" dirty="0">
-              <a:solidFill>
-                <a:schemeClr val="accent1"/>
-              </a:solidFill>
-            </a:endParaRPr>
+            <a:r>
+              <a:rPr lang="en-US" dirty="0"/>
+              <a:t>Generated with Sigrid</a:t>
+            </a:r>
+          </a:p>
+          <a:p>
+            <a:r>
+              <a:rPr lang="en-US" dirty="0"/>
+              <a:t>for CUSTOMER_NAME</a:t>
+            </a:r>
           </a:p>
         </p:txBody>
       </p:sp>
@@ -20398,39 +19741,6 @@
       </p:grpSp>
       <p:sp>
         <p:nvSpPr>
-          <p:cNvPr id="1004" name="Footer Placeholder 1004"/>
-          <p:cNvSpPr>
-            <a:spLocks noGrp="1"/>
-          </p:cNvSpPr>
-          <p:nvPr>
-            <p:ph type="ftr" sz="quarter" idx="3"/>
-          </p:nvPr>
-        </p:nvSpPr>
-        <p:spPr>
-          <a:xfrm>
-            <a:off x="192088" y="6392596"/>
-            <a:ext cx="1763922" cy="370422"/>
-          </a:xfrm>
-        </p:spPr>
-        <p:txBody>
-          <a:bodyPr/>
-          <a:lstStyle/>
-          <a:p>
-            <a:r>
-              <a:rPr lang="en-US" dirty="0"/>
-              <a:t>Generated with Sigrid</a:t>
-            </a:r>
-          </a:p>
-          <a:p>
-            <a:r>
-              <a:rPr lang="en-US" dirty="0"/>
-              <a:t>for CUSTOMER_NAME</a:t>
-            </a:r>
-          </a:p>
-        </p:txBody>
-      </p:sp>
-      <p:sp>
-        <p:nvSpPr>
           <p:cNvPr id="1071" name="TextBox 1071"/>
           <p:cNvSpPr txBox="1"/>
           <p:nvPr/>
@@ -20646,8 +19956,8 @@
         </p:nvSpPr>
         <p:spPr>
           <a:xfrm>
-            <a:off x="381600" y="129568"/>
-            <a:ext cx="1410176" cy="228209"/>
+            <a:off x="381600" y="129599"/>
+            <a:ext cx="1410176" cy="228145"/>
           </a:xfrm>
         </p:spPr>
         <p:txBody>
@@ -20660,25 +19970,6 @@
               <a:rPr lang="en-US" dirty="0"/>
               <a:t>Maintainability</a:t>
             </a:r>
-          </a:p>
-        </p:txBody>
-      </p:sp>
-      <p:sp>
-        <p:nvSpPr>
-          <p:cNvPr id="3" name="Content Placeholder 2"/>
-          <p:cNvSpPr>
-            <a:spLocks noGrp="1"/>
-          </p:cNvSpPr>
-          <p:nvPr>
-            <p:ph sz="quarter" idx="13"/>
-          </p:nvPr>
-        </p:nvSpPr>
-        <p:spPr/>
-        <p:txBody>
-          <a:bodyPr/>
-          <a:lstStyle/>
-          <a:p>
-            <a:endParaRPr/>
           </a:p>
         </p:txBody>
       </p:sp>
@@ -20708,63 +19999,29 @@
       </p:sp>
       <p:sp>
         <p:nvSpPr>
-          <p:cNvPr id="7" name="Rectangle 6">
-            <a:extLst>
-              <a:ext uri="{FF2B5EF4-FFF2-40B4-BE49-F238E27FC236}">
-                <a16:creationId xmlns:a16="http://schemas.microsoft.com/office/drawing/2014/main" id="{4D956AE0-666A-B966-0B15-61A5E6C88F75}"/>
-              </a:ext>
-            </a:extLst>
-          </p:cNvPr>
-          <p:cNvSpPr/>
-          <p:nvPr/>
+          <p:cNvPr id="2004" name="Footer Placeholder 2004"/>
+          <p:cNvSpPr>
+            <a:spLocks noGrp="1"/>
+          </p:cNvSpPr>
+          <p:nvPr>
+            <p:ph type="ftr" sz="quarter" idx="3"/>
+          </p:nvPr>
         </p:nvSpPr>
-        <p:spPr>
-          <a:xfrm>
-            <a:off x="0" y="1390132"/>
-            <a:ext cx="12192000" cy="4927867"/>
-          </a:xfrm>
-          <a:prstGeom prst="rect">
-            <a:avLst/>
-          </a:prstGeom>
-          <a:solidFill>
-            <a:schemeClr val="bg1"/>
-          </a:solidFill>
-          <a:ln>
-            <a:noFill/>
-          </a:ln>
-          <a:effectLst>
-            <a:outerShdw blurRad="190500" dist="38100" dir="2700000" algn="tl" rotWithShape="0">
-              <a:prstClr val="black">
-                <a:alpha val="15000"/>
-              </a:prstClr>
-            </a:outerShdw>
-          </a:effectLst>
-        </p:spPr>
-        <p:style>
-          <a:lnRef idx="2">
-            <a:schemeClr val="accent1">
-              <a:shade val="50000"/>
-            </a:schemeClr>
-          </a:lnRef>
-          <a:fillRef idx="1">
-            <a:schemeClr val="accent1"/>
-          </a:fillRef>
-          <a:effectRef idx="0">
-            <a:schemeClr val="accent1"/>
-          </a:effectRef>
-          <a:fontRef idx="minor">
-            <a:schemeClr val="lt1"/>
-          </a:fontRef>
-        </p:style>
+        <p:spPr/>
         <p:txBody>
-          <a:bodyPr lIns="731520" tIns="72000" rIns="108000" bIns="72000" rtlCol="0" anchor="ctr"/>
+          <a:bodyPr/>
           <a:lstStyle/>
           <a:p>
-            <a:endParaRPr lang="nl-NL" sz="1200" b="1" noProof="0" dirty="0">
-              <a:solidFill>
-                <a:schemeClr val="accent1"/>
-              </a:solidFill>
-            </a:endParaRPr>
+            <a:r>
+              <a:rPr lang="en-US" dirty="0"/>
+              <a:t>Generated with Sigrid</a:t>
+            </a:r>
+          </a:p>
+          <a:p>
+            <a:r>
+              <a:rPr lang="en-US" dirty="0"/>
+              <a:t>for CUSTOMER_NAME</a:t>
+            </a:r>
           </a:p>
         </p:txBody>
       </p:sp>
@@ -21163,39 +20420,6 @@
             <a:r>
               <a:rPr lang="en-US" sz="800" dirty="0"/>
               <a:t>★</a:t>
-            </a:r>
-          </a:p>
-        </p:txBody>
-      </p:sp>
-      <p:sp>
-        <p:nvSpPr>
-          <p:cNvPr id="2004" name="Footer Placeholder 2004"/>
-          <p:cNvSpPr>
-            <a:spLocks noGrp="1"/>
-          </p:cNvSpPr>
-          <p:nvPr>
-            <p:ph type="ftr" sz="quarter" idx="3"/>
-          </p:nvPr>
-        </p:nvSpPr>
-        <p:spPr>
-          <a:xfrm>
-            <a:off x="192088" y="6392596"/>
-            <a:ext cx="1763922" cy="370422"/>
-          </a:xfrm>
-        </p:spPr>
-        <p:txBody>
-          <a:bodyPr/>
-          <a:lstStyle/>
-          <a:p>
-            <a:r>
-              <a:rPr lang="en-US" dirty="0"/>
-              <a:t>Generated with Sigrid</a:t>
-            </a:r>
-          </a:p>
-          <a:p>
-            <a:r>
-              <a:rPr lang="en-US" dirty="0"/>
-              <a:t>for CUSTOMER_NAME</a:t>
             </a:r>
           </a:p>
         </p:txBody>
@@ -21353,8 +20577,8 @@
         </p:nvSpPr>
         <p:spPr>
           <a:xfrm>
-            <a:off x="381600" y="129568"/>
-            <a:ext cx="1410176" cy="228209"/>
+            <a:off x="381600" y="129599"/>
+            <a:ext cx="1410176" cy="228145"/>
           </a:xfrm>
         </p:spPr>
         <p:txBody>
@@ -21367,25 +20591,6 @@
               <a:rPr lang="en-US" dirty="0"/>
               <a:t>Maintainability</a:t>
             </a:r>
-          </a:p>
-        </p:txBody>
-      </p:sp>
-      <p:sp>
-        <p:nvSpPr>
-          <p:cNvPr id="3" name="Content Placeholder 2"/>
-          <p:cNvSpPr>
-            <a:spLocks noGrp="1"/>
-          </p:cNvSpPr>
-          <p:nvPr>
-            <p:ph sz="quarter" idx="13"/>
-          </p:nvPr>
-        </p:nvSpPr>
-        <p:spPr/>
-        <p:txBody>
-          <a:bodyPr/>
-          <a:lstStyle/>
-          <a:p>
-            <a:endParaRPr/>
           </a:p>
         </p:txBody>
       </p:sp>
@@ -21415,63 +20620,29 @@
       </p:sp>
       <p:sp>
         <p:nvSpPr>
-          <p:cNvPr id="7" name="Rectangle 6">
-            <a:extLst>
-              <a:ext uri="{FF2B5EF4-FFF2-40B4-BE49-F238E27FC236}">
-                <a16:creationId xmlns:a16="http://schemas.microsoft.com/office/drawing/2014/main" id="{4D956AE0-666A-B966-0B15-61A5E6C88F75}"/>
-              </a:ext>
-            </a:extLst>
-          </p:cNvPr>
-          <p:cNvSpPr/>
-          <p:nvPr/>
+          <p:cNvPr id="1004" name="Footer Placeholder 1004"/>
+          <p:cNvSpPr>
+            <a:spLocks noGrp="1"/>
+          </p:cNvSpPr>
+          <p:nvPr>
+            <p:ph type="ftr" sz="quarter" idx="3"/>
+          </p:nvPr>
         </p:nvSpPr>
-        <p:spPr>
-          <a:xfrm>
-            <a:off x="0" y="1390132"/>
-            <a:ext cx="12192000" cy="4927867"/>
-          </a:xfrm>
-          <a:prstGeom prst="rect">
-            <a:avLst/>
-          </a:prstGeom>
-          <a:solidFill>
-            <a:schemeClr val="bg1"/>
-          </a:solidFill>
-          <a:ln>
-            <a:noFill/>
-          </a:ln>
-          <a:effectLst>
-            <a:outerShdw blurRad="190500" dist="38100" dir="2700000" algn="tl" rotWithShape="0">
-              <a:prstClr val="black">
-                <a:alpha val="15000"/>
-              </a:prstClr>
-            </a:outerShdw>
-          </a:effectLst>
-        </p:spPr>
-        <p:style>
-          <a:lnRef idx="2">
-            <a:schemeClr val="accent1">
-              <a:shade val="50000"/>
-            </a:schemeClr>
-          </a:lnRef>
-          <a:fillRef idx="1">
-            <a:schemeClr val="accent1"/>
-          </a:fillRef>
-          <a:effectRef idx="0">
-            <a:schemeClr val="accent1"/>
-          </a:effectRef>
-          <a:fontRef idx="minor">
-            <a:schemeClr val="lt1"/>
-          </a:fontRef>
-        </p:style>
+        <p:spPr/>
         <p:txBody>
-          <a:bodyPr lIns="731520" tIns="72000" rIns="108000" bIns="72000" rtlCol="0" anchor="ctr"/>
+          <a:bodyPr/>
           <a:lstStyle/>
           <a:p>
-            <a:endParaRPr lang="nl-NL" sz="1200" b="1" noProof="0" dirty="0">
-              <a:solidFill>
-                <a:schemeClr val="accent1"/>
-              </a:solidFill>
-            </a:endParaRPr>
+            <a:r>
+              <a:rPr lang="en-US" dirty="0"/>
+              <a:t>Generated with Sigrid</a:t>
+            </a:r>
+          </a:p>
+          <a:p>
+            <a:r>
+              <a:rPr lang="en-US" dirty="0"/>
+              <a:t>for CUSTOMER_NAME</a:t>
+            </a:r>
           </a:p>
         </p:txBody>
       </p:sp>
@@ -22061,39 +21232,6 @@
       </p:grpSp>
       <p:sp>
         <p:nvSpPr>
-          <p:cNvPr id="1004" name="Footer Placeholder 1004"/>
-          <p:cNvSpPr>
-            <a:spLocks noGrp="1"/>
-          </p:cNvSpPr>
-          <p:nvPr>
-            <p:ph type="ftr" sz="quarter" idx="3"/>
-          </p:nvPr>
-        </p:nvSpPr>
-        <p:spPr>
-          <a:xfrm>
-            <a:off x="192088" y="6392596"/>
-            <a:ext cx="1763922" cy="370422"/>
-          </a:xfrm>
-        </p:spPr>
-        <p:txBody>
-          <a:bodyPr/>
-          <a:lstStyle/>
-          <a:p>
-            <a:r>
-              <a:rPr lang="en-US" dirty="0"/>
-              <a:t>Generated with Sigrid</a:t>
-            </a:r>
-          </a:p>
-          <a:p>
-            <a:r>
-              <a:rPr lang="en-US" dirty="0"/>
-              <a:t>for CUSTOMER_NAME</a:t>
-            </a:r>
-          </a:p>
-        </p:txBody>
-      </p:sp>
-      <p:sp>
-        <p:nvSpPr>
           <p:cNvPr id="1071" name="TextBox 1071"/>
           <p:cNvSpPr txBox="1"/>
           <p:nvPr/>
@@ -22309,8 +21447,8 @@
         </p:nvSpPr>
         <p:spPr>
           <a:xfrm>
-            <a:off x="381600" y="129568"/>
-            <a:ext cx="1410176" cy="228209"/>
+            <a:off x="381600" y="129599"/>
+            <a:ext cx="1410176" cy="228145"/>
           </a:xfrm>
         </p:spPr>
         <p:txBody>
@@ -22323,25 +21461,6 @@
               <a:rPr lang="en-US" dirty="0"/>
               <a:t>Maintainability</a:t>
             </a:r>
-          </a:p>
-        </p:txBody>
-      </p:sp>
-      <p:sp>
-        <p:nvSpPr>
-          <p:cNvPr id="3" name="Content Placeholder 2"/>
-          <p:cNvSpPr>
-            <a:spLocks noGrp="1"/>
-          </p:cNvSpPr>
-          <p:nvPr>
-            <p:ph sz="quarter" idx="13"/>
-          </p:nvPr>
-        </p:nvSpPr>
-        <p:spPr/>
-        <p:txBody>
-          <a:bodyPr/>
-          <a:lstStyle/>
-          <a:p>
-            <a:endParaRPr/>
           </a:p>
         </p:txBody>
       </p:sp>
@@ -22371,63 +21490,29 @@
       </p:sp>
       <p:sp>
         <p:nvSpPr>
-          <p:cNvPr id="7" name="Rectangle 6">
-            <a:extLst>
-              <a:ext uri="{FF2B5EF4-FFF2-40B4-BE49-F238E27FC236}">
-                <a16:creationId xmlns:a16="http://schemas.microsoft.com/office/drawing/2014/main" id="{4D956AE0-666A-B966-0B15-61A5E6C88F75}"/>
-              </a:ext>
-            </a:extLst>
-          </p:cNvPr>
-          <p:cNvSpPr/>
-          <p:nvPr/>
+          <p:cNvPr id="2004" name="Footer Placeholder 2004"/>
+          <p:cNvSpPr>
+            <a:spLocks noGrp="1"/>
+          </p:cNvSpPr>
+          <p:nvPr>
+            <p:ph type="ftr" sz="quarter" idx="3"/>
+          </p:nvPr>
         </p:nvSpPr>
-        <p:spPr>
-          <a:xfrm>
-            <a:off x="0" y="1390132"/>
-            <a:ext cx="12192000" cy="4927867"/>
-          </a:xfrm>
-          <a:prstGeom prst="rect">
-            <a:avLst/>
-          </a:prstGeom>
-          <a:solidFill>
-            <a:schemeClr val="bg1"/>
-          </a:solidFill>
-          <a:ln>
-            <a:noFill/>
-          </a:ln>
-          <a:effectLst>
-            <a:outerShdw blurRad="190500" dist="38100" dir="2700000" algn="tl" rotWithShape="0">
-              <a:prstClr val="black">
-                <a:alpha val="15000"/>
-              </a:prstClr>
-            </a:outerShdw>
-          </a:effectLst>
-        </p:spPr>
-        <p:style>
-          <a:lnRef idx="2">
-            <a:schemeClr val="accent1">
-              <a:shade val="50000"/>
-            </a:schemeClr>
-          </a:lnRef>
-          <a:fillRef idx="1">
-            <a:schemeClr val="accent1"/>
-          </a:fillRef>
-          <a:effectRef idx="0">
-            <a:schemeClr val="accent1"/>
-          </a:effectRef>
-          <a:fontRef idx="minor">
-            <a:schemeClr val="lt1"/>
-          </a:fontRef>
-        </p:style>
+        <p:spPr/>
         <p:txBody>
-          <a:bodyPr lIns="731520" tIns="72000" rIns="108000" bIns="72000" rtlCol="0" anchor="ctr"/>
+          <a:bodyPr/>
           <a:lstStyle/>
           <a:p>
-            <a:endParaRPr lang="nl-NL" sz="1200" b="1" noProof="0" dirty="0">
-              <a:solidFill>
-                <a:schemeClr val="accent1"/>
-              </a:solidFill>
-            </a:endParaRPr>
+            <a:r>
+              <a:rPr lang="en-US" dirty="0"/>
+              <a:t>Generated with Sigrid</a:t>
+            </a:r>
+          </a:p>
+          <a:p>
+            <a:r>
+              <a:rPr lang="en-US" dirty="0"/>
+              <a:t>for CUSTOMER_NAME</a:t>
+            </a:r>
           </a:p>
         </p:txBody>
       </p:sp>
@@ -22826,39 +21911,6 @@
             <a:r>
               <a:rPr lang="en-US" sz="800" dirty="0"/>
               <a:t>★</a:t>
-            </a:r>
-          </a:p>
-        </p:txBody>
-      </p:sp>
-      <p:sp>
-        <p:nvSpPr>
-          <p:cNvPr id="2004" name="Footer Placeholder 2004"/>
-          <p:cNvSpPr>
-            <a:spLocks noGrp="1"/>
-          </p:cNvSpPr>
-          <p:nvPr>
-            <p:ph type="ftr" sz="quarter" idx="3"/>
-          </p:nvPr>
-        </p:nvSpPr>
-        <p:spPr>
-          <a:xfrm>
-            <a:off x="192088" y="6392596"/>
-            <a:ext cx="1763922" cy="370422"/>
-          </a:xfrm>
-        </p:spPr>
-        <p:txBody>
-          <a:bodyPr/>
-          <a:lstStyle/>
-          <a:p>
-            <a:r>
-              <a:rPr lang="en-US" dirty="0"/>
-              <a:t>Generated with Sigrid</a:t>
-            </a:r>
-          </a:p>
-          <a:p>
-            <a:r>
-              <a:rPr lang="en-US" dirty="0"/>
-              <a:t>for CUSTOMER_NAME</a:t>
             </a:r>
           </a:p>
         </p:txBody>
@@ -23284,8 +22336,8 @@
         </p:nvSpPr>
         <p:spPr>
           <a:xfrm>
-            <a:off x="381600" y="129568"/>
-            <a:ext cx="1157222" cy="228209"/>
+            <a:off x="381600" y="129599"/>
+            <a:ext cx="1156940" cy="228145"/>
           </a:xfrm>
         </p:spPr>
         <p:txBody>
@@ -23298,25 +22350,6 @@
               <a:rPr lang="en-US" dirty="0"/>
               <a:t>Architecture</a:t>
             </a:r>
-          </a:p>
-        </p:txBody>
-      </p:sp>
-      <p:sp>
-        <p:nvSpPr>
-          <p:cNvPr id="3" name="Content Placeholder 2"/>
-          <p:cNvSpPr>
-            <a:spLocks noGrp="1"/>
-          </p:cNvSpPr>
-          <p:nvPr>
-            <p:ph sz="quarter" idx="13"/>
-          </p:nvPr>
-        </p:nvSpPr>
-        <p:spPr/>
-        <p:txBody>
-          <a:bodyPr/>
-          <a:lstStyle/>
-          <a:p>
-            <a:endParaRPr/>
           </a:p>
         </p:txBody>
       </p:sp>
@@ -23346,63 +22379,29 @@
       </p:sp>
       <p:sp>
         <p:nvSpPr>
-          <p:cNvPr id="7" name="Rectangle 6">
-            <a:extLst>
-              <a:ext uri="{FF2B5EF4-FFF2-40B4-BE49-F238E27FC236}">
-                <a16:creationId xmlns:a16="http://schemas.microsoft.com/office/drawing/2014/main" id="{4D956AE0-666A-B966-0B15-61A5E6C88F75}"/>
-              </a:ext>
-            </a:extLst>
-          </p:cNvPr>
-          <p:cNvSpPr/>
-          <p:nvPr/>
+          <p:cNvPr id="1004" name="Footer Placeholder 1004"/>
+          <p:cNvSpPr>
+            <a:spLocks noGrp="1"/>
+          </p:cNvSpPr>
+          <p:nvPr>
+            <p:ph type="ftr" sz="quarter" idx="3"/>
+          </p:nvPr>
         </p:nvSpPr>
-        <p:spPr>
-          <a:xfrm>
-            <a:off x="0" y="1390132"/>
-            <a:ext cx="12192000" cy="4927867"/>
-          </a:xfrm>
-          <a:prstGeom prst="rect">
-            <a:avLst/>
-          </a:prstGeom>
-          <a:solidFill>
-            <a:schemeClr val="bg1"/>
-          </a:solidFill>
-          <a:ln>
-            <a:noFill/>
-          </a:ln>
-          <a:effectLst>
-            <a:outerShdw blurRad="190500" dist="38100" dir="2700000" algn="tl" rotWithShape="0">
-              <a:prstClr val="black">
-                <a:alpha val="15000"/>
-              </a:prstClr>
-            </a:outerShdw>
-          </a:effectLst>
-        </p:spPr>
-        <p:style>
-          <a:lnRef idx="2">
-            <a:schemeClr val="accent1">
-              <a:shade val="50000"/>
-            </a:schemeClr>
-          </a:lnRef>
-          <a:fillRef idx="1">
-            <a:schemeClr val="accent1"/>
-          </a:fillRef>
-          <a:effectRef idx="0">
-            <a:schemeClr val="accent1"/>
-          </a:effectRef>
-          <a:fontRef idx="minor">
-            <a:schemeClr val="lt1"/>
-          </a:fontRef>
-        </p:style>
+        <p:spPr/>
         <p:txBody>
-          <a:bodyPr lIns="731520" tIns="72000" rIns="108000" bIns="72000" rtlCol="0" anchor="ctr"/>
+          <a:bodyPr/>
           <a:lstStyle/>
           <a:p>
-            <a:endParaRPr lang="nl-NL" sz="1200" b="1" noProof="0" dirty="0">
-              <a:solidFill>
-                <a:schemeClr val="accent1"/>
-              </a:solidFill>
-            </a:endParaRPr>
+            <a:r>
+              <a:rPr lang="en-US" dirty="0"/>
+              <a:t>Generated with Sigrid</a:t>
+            </a:r>
+          </a:p>
+          <a:p>
+            <a:r>
+              <a:rPr lang="en-US" dirty="0"/>
+              <a:t>for CUSTOMER_NAME</a:t>
+            </a:r>
           </a:p>
         </p:txBody>
       </p:sp>
@@ -23992,39 +22991,6 @@
       </p:grpSp>
       <p:sp>
         <p:nvSpPr>
-          <p:cNvPr id="1004" name="Footer Placeholder 1004"/>
-          <p:cNvSpPr>
-            <a:spLocks noGrp="1"/>
-          </p:cNvSpPr>
-          <p:nvPr>
-            <p:ph type="ftr" sz="quarter" idx="3"/>
-          </p:nvPr>
-        </p:nvSpPr>
-        <p:spPr>
-          <a:xfrm>
-            <a:off x="192088" y="6392596"/>
-            <a:ext cx="1763922" cy="370422"/>
-          </a:xfrm>
-        </p:spPr>
-        <p:txBody>
-          <a:bodyPr/>
-          <a:lstStyle/>
-          <a:p>
-            <a:r>
-              <a:rPr lang="en-US" dirty="0"/>
-              <a:t>Generated with Sigrid</a:t>
-            </a:r>
-          </a:p>
-          <a:p>
-            <a:r>
-              <a:rPr lang="en-US" dirty="0"/>
-              <a:t>for CUSTOMER_NAME</a:t>
-            </a:r>
-          </a:p>
-        </p:txBody>
-      </p:sp>
-      <p:sp>
-        <p:nvSpPr>
           <p:cNvPr id="1071" name="TextBox 1071"/>
           <p:cNvSpPr txBox="1"/>
           <p:nvPr/>
@@ -24240,8 +23206,8 @@
         </p:nvSpPr>
         <p:spPr>
           <a:xfrm>
-            <a:off x="381600" y="129568"/>
-            <a:ext cx="1157222" cy="228209"/>
+            <a:off x="381600" y="129599"/>
+            <a:ext cx="1156940" cy="228145"/>
           </a:xfrm>
         </p:spPr>
         <p:txBody>
@@ -24254,25 +23220,6 @@
               <a:rPr lang="en-US" dirty="0"/>
               <a:t>Architecture</a:t>
             </a:r>
-          </a:p>
-        </p:txBody>
-      </p:sp>
-      <p:sp>
-        <p:nvSpPr>
-          <p:cNvPr id="3" name="Content Placeholder 2"/>
-          <p:cNvSpPr>
-            <a:spLocks noGrp="1"/>
-          </p:cNvSpPr>
-          <p:nvPr>
-            <p:ph sz="quarter" idx="13"/>
-          </p:nvPr>
-        </p:nvSpPr>
-        <p:spPr/>
-        <p:txBody>
-          <a:bodyPr/>
-          <a:lstStyle/>
-          <a:p>
-            <a:endParaRPr/>
           </a:p>
         </p:txBody>
       </p:sp>
@@ -24302,63 +23249,29 @@
       </p:sp>
       <p:sp>
         <p:nvSpPr>
-          <p:cNvPr id="7" name="Rectangle 6">
-            <a:extLst>
-              <a:ext uri="{FF2B5EF4-FFF2-40B4-BE49-F238E27FC236}">
-                <a16:creationId xmlns:a16="http://schemas.microsoft.com/office/drawing/2014/main" id="{4D956AE0-666A-B966-0B15-61A5E6C88F75}"/>
-              </a:ext>
-            </a:extLst>
-          </p:cNvPr>
-          <p:cNvSpPr/>
-          <p:nvPr/>
+          <p:cNvPr id="2004" name="Footer Placeholder 2004"/>
+          <p:cNvSpPr>
+            <a:spLocks noGrp="1"/>
+          </p:cNvSpPr>
+          <p:nvPr>
+            <p:ph type="ftr" sz="quarter" idx="3"/>
+          </p:nvPr>
         </p:nvSpPr>
-        <p:spPr>
-          <a:xfrm>
-            <a:off x="0" y="1390132"/>
-            <a:ext cx="12192000" cy="4927867"/>
-          </a:xfrm>
-          <a:prstGeom prst="rect">
-            <a:avLst/>
-          </a:prstGeom>
-          <a:solidFill>
-            <a:schemeClr val="bg1"/>
-          </a:solidFill>
-          <a:ln>
-            <a:noFill/>
-          </a:ln>
-          <a:effectLst>
-            <a:outerShdw blurRad="190500" dist="38100" dir="2700000" algn="tl" rotWithShape="0">
-              <a:prstClr val="black">
-                <a:alpha val="15000"/>
-              </a:prstClr>
-            </a:outerShdw>
-          </a:effectLst>
-        </p:spPr>
-        <p:style>
-          <a:lnRef idx="2">
-            <a:schemeClr val="accent1">
-              <a:shade val="50000"/>
-            </a:schemeClr>
-          </a:lnRef>
-          <a:fillRef idx="1">
-            <a:schemeClr val="accent1"/>
-          </a:fillRef>
-          <a:effectRef idx="0">
-            <a:schemeClr val="accent1"/>
-          </a:effectRef>
-          <a:fontRef idx="minor">
-            <a:schemeClr val="lt1"/>
-          </a:fontRef>
-        </p:style>
+        <p:spPr/>
         <p:txBody>
-          <a:bodyPr lIns="731520" tIns="72000" rIns="108000" bIns="72000" rtlCol="0" anchor="ctr"/>
+          <a:bodyPr/>
           <a:lstStyle/>
           <a:p>
-            <a:endParaRPr lang="nl-NL" sz="1200" b="1" noProof="0" dirty="0">
-              <a:solidFill>
-                <a:schemeClr val="accent1"/>
-              </a:solidFill>
-            </a:endParaRPr>
+            <a:r>
+              <a:rPr lang="en-US" dirty="0"/>
+              <a:t>Generated with Sigrid</a:t>
+            </a:r>
+          </a:p>
+          <a:p>
+            <a:r>
+              <a:rPr lang="en-US" dirty="0"/>
+              <a:t>for CUSTOMER_NAME</a:t>
+            </a:r>
           </a:p>
         </p:txBody>
       </p:sp>
@@ -24757,39 +23670,6 @@
             <a:r>
               <a:rPr lang="en-US" sz="800" dirty="0"/>
               <a:t>★</a:t>
-            </a:r>
-          </a:p>
-        </p:txBody>
-      </p:sp>
-      <p:sp>
-        <p:nvSpPr>
-          <p:cNvPr id="2004" name="Footer Placeholder 2004"/>
-          <p:cNvSpPr>
-            <a:spLocks noGrp="1"/>
-          </p:cNvSpPr>
-          <p:nvPr>
-            <p:ph type="ftr" sz="quarter" idx="3"/>
-          </p:nvPr>
-        </p:nvSpPr>
-        <p:spPr>
-          <a:xfrm>
-            <a:off x="192088" y="6392596"/>
-            <a:ext cx="1763922" cy="370422"/>
-          </a:xfrm>
-        </p:spPr>
-        <p:txBody>
-          <a:bodyPr/>
-          <a:lstStyle/>
-          <a:p>
-            <a:r>
-              <a:rPr lang="en-US" dirty="0"/>
-              <a:t>Generated with Sigrid</a:t>
-            </a:r>
-          </a:p>
-          <a:p>
-            <a:r>
-              <a:rPr lang="en-US" dirty="0"/>
-              <a:t>for CUSTOMER_NAME</a:t>
             </a:r>
           </a:p>
         </p:txBody>
@@ -25209,8 +24089,8 @@
         </p:nvSpPr>
         <p:spPr>
           <a:xfrm>
-            <a:off x="381600" y="129568"/>
-            <a:ext cx="1157222" cy="228209"/>
+            <a:off x="381600" y="129599"/>
+            <a:ext cx="1156940" cy="228145"/>
           </a:xfrm>
         </p:spPr>
         <p:txBody>
@@ -25223,25 +24103,6 @@
               <a:rPr lang="en-US" dirty="0"/>
               <a:t>Architecture</a:t>
             </a:r>
-          </a:p>
-        </p:txBody>
-      </p:sp>
-      <p:sp>
-        <p:nvSpPr>
-          <p:cNvPr id="3" name="Content Placeholder 2"/>
-          <p:cNvSpPr>
-            <a:spLocks noGrp="1"/>
-          </p:cNvSpPr>
-          <p:nvPr>
-            <p:ph sz="quarter" idx="13"/>
-          </p:nvPr>
-        </p:nvSpPr>
-        <p:spPr/>
-        <p:txBody>
-          <a:bodyPr/>
-          <a:lstStyle/>
-          <a:p>
-            <a:endParaRPr/>
           </a:p>
         </p:txBody>
       </p:sp>
@@ -25271,63 +24132,29 @@
       </p:sp>
       <p:sp>
         <p:nvSpPr>
-          <p:cNvPr id="7" name="Rectangle 6">
-            <a:extLst>
-              <a:ext uri="{FF2B5EF4-FFF2-40B4-BE49-F238E27FC236}">
-                <a16:creationId xmlns:a16="http://schemas.microsoft.com/office/drawing/2014/main" id="{4D956AE0-666A-B966-0B15-61A5E6C88F75}"/>
-              </a:ext>
-            </a:extLst>
-          </p:cNvPr>
-          <p:cNvSpPr/>
-          <p:nvPr/>
+          <p:cNvPr id="1004" name="Footer Placeholder 1004"/>
+          <p:cNvSpPr>
+            <a:spLocks noGrp="1"/>
+          </p:cNvSpPr>
+          <p:nvPr>
+            <p:ph type="ftr" sz="quarter" idx="3"/>
+          </p:nvPr>
         </p:nvSpPr>
-        <p:spPr>
-          <a:xfrm>
-            <a:off x="0" y="1390132"/>
-            <a:ext cx="12192000" cy="4927867"/>
-          </a:xfrm>
-          <a:prstGeom prst="rect">
-            <a:avLst/>
-          </a:prstGeom>
-          <a:solidFill>
-            <a:schemeClr val="bg1"/>
-          </a:solidFill>
-          <a:ln>
-            <a:noFill/>
-          </a:ln>
-          <a:effectLst>
-            <a:outerShdw blurRad="190500" dist="38100" dir="2700000" algn="tl" rotWithShape="0">
-              <a:prstClr val="black">
-                <a:alpha val="15000"/>
-              </a:prstClr>
-            </a:outerShdw>
-          </a:effectLst>
-        </p:spPr>
-        <p:style>
-          <a:lnRef idx="2">
-            <a:schemeClr val="accent1">
-              <a:shade val="50000"/>
-            </a:schemeClr>
-          </a:lnRef>
-          <a:fillRef idx="1">
-            <a:schemeClr val="accent1"/>
-          </a:fillRef>
-          <a:effectRef idx="0">
-            <a:schemeClr val="accent1"/>
-          </a:effectRef>
-          <a:fontRef idx="minor">
-            <a:schemeClr val="lt1"/>
-          </a:fontRef>
-        </p:style>
+        <p:spPr/>
         <p:txBody>
-          <a:bodyPr lIns="731520" tIns="72000" rIns="108000" bIns="72000" rtlCol="0" anchor="ctr"/>
+          <a:bodyPr/>
           <a:lstStyle/>
           <a:p>
-            <a:endParaRPr lang="nl-NL" sz="1200" b="1" noProof="0" dirty="0">
-              <a:solidFill>
-                <a:schemeClr val="accent1"/>
-              </a:solidFill>
-            </a:endParaRPr>
+            <a:r>
+              <a:rPr lang="en-US" dirty="0"/>
+              <a:t>Generated with Sigrid</a:t>
+            </a:r>
+          </a:p>
+          <a:p>
+            <a:r>
+              <a:rPr lang="en-US" dirty="0"/>
+              <a:t>for CUSTOMER_NAME</a:t>
+            </a:r>
           </a:p>
         </p:txBody>
       </p:sp>
@@ -25917,39 +24744,6 @@
       </p:grpSp>
       <p:sp>
         <p:nvSpPr>
-          <p:cNvPr id="1004" name="Footer Placeholder 1004"/>
-          <p:cNvSpPr>
-            <a:spLocks noGrp="1"/>
-          </p:cNvSpPr>
-          <p:nvPr>
-            <p:ph type="ftr" sz="quarter" idx="3"/>
-          </p:nvPr>
-        </p:nvSpPr>
-        <p:spPr>
-          <a:xfrm>
-            <a:off x="192088" y="6392596"/>
-            <a:ext cx="1763922" cy="370422"/>
-          </a:xfrm>
-        </p:spPr>
-        <p:txBody>
-          <a:bodyPr/>
-          <a:lstStyle/>
-          <a:p>
-            <a:r>
-              <a:rPr lang="en-US" dirty="0"/>
-              <a:t>Generated with Sigrid</a:t>
-            </a:r>
-          </a:p>
-          <a:p>
-            <a:r>
-              <a:rPr lang="en-US" dirty="0"/>
-              <a:t>for CUSTOMER_NAME</a:t>
-            </a:r>
-          </a:p>
-        </p:txBody>
-      </p:sp>
-      <p:sp>
-        <p:nvSpPr>
           <p:cNvPr id="1071" name="TextBox 1071"/>
           <p:cNvSpPr txBox="1"/>
           <p:nvPr/>
@@ -26165,8 +24959,8 @@
         </p:nvSpPr>
         <p:spPr>
           <a:xfrm>
-            <a:off x="381600" y="129568"/>
-            <a:ext cx="1157222" cy="228209"/>
+            <a:off x="381600" y="129599"/>
+            <a:ext cx="1156940" cy="228145"/>
           </a:xfrm>
         </p:spPr>
         <p:txBody>
@@ -26179,25 +24973,6 @@
               <a:rPr lang="en-US" dirty="0"/>
               <a:t>Architecture</a:t>
             </a:r>
-          </a:p>
-        </p:txBody>
-      </p:sp>
-      <p:sp>
-        <p:nvSpPr>
-          <p:cNvPr id="3" name="Content Placeholder 2"/>
-          <p:cNvSpPr>
-            <a:spLocks noGrp="1"/>
-          </p:cNvSpPr>
-          <p:nvPr>
-            <p:ph sz="quarter" idx="13"/>
-          </p:nvPr>
-        </p:nvSpPr>
-        <p:spPr/>
-        <p:txBody>
-          <a:bodyPr/>
-          <a:lstStyle/>
-          <a:p>
-            <a:endParaRPr/>
           </a:p>
         </p:txBody>
       </p:sp>
@@ -26227,63 +25002,29 @@
       </p:sp>
       <p:sp>
         <p:nvSpPr>
-          <p:cNvPr id="7" name="Rectangle 6">
-            <a:extLst>
-              <a:ext uri="{FF2B5EF4-FFF2-40B4-BE49-F238E27FC236}">
-                <a16:creationId xmlns:a16="http://schemas.microsoft.com/office/drawing/2014/main" id="{4D956AE0-666A-B966-0B15-61A5E6C88F75}"/>
-              </a:ext>
-            </a:extLst>
-          </p:cNvPr>
-          <p:cNvSpPr/>
-          <p:nvPr/>
+          <p:cNvPr id="2004" name="Footer Placeholder 2004"/>
+          <p:cNvSpPr>
+            <a:spLocks noGrp="1"/>
+          </p:cNvSpPr>
+          <p:nvPr>
+            <p:ph type="ftr" sz="quarter" idx="3"/>
+          </p:nvPr>
         </p:nvSpPr>
-        <p:spPr>
-          <a:xfrm>
-            <a:off x="0" y="1390132"/>
-            <a:ext cx="12192000" cy="4927867"/>
-          </a:xfrm>
-          <a:prstGeom prst="rect">
-            <a:avLst/>
-          </a:prstGeom>
-          <a:solidFill>
-            <a:schemeClr val="bg1"/>
-          </a:solidFill>
-          <a:ln>
-            <a:noFill/>
-          </a:ln>
-          <a:effectLst>
-            <a:outerShdw blurRad="190500" dist="38100" dir="2700000" algn="tl" rotWithShape="0">
-              <a:prstClr val="black">
-                <a:alpha val="15000"/>
-              </a:prstClr>
-            </a:outerShdw>
-          </a:effectLst>
-        </p:spPr>
-        <p:style>
-          <a:lnRef idx="2">
-            <a:schemeClr val="accent1">
-              <a:shade val="50000"/>
-            </a:schemeClr>
-          </a:lnRef>
-          <a:fillRef idx="1">
-            <a:schemeClr val="accent1"/>
-          </a:fillRef>
-          <a:effectRef idx="0">
-            <a:schemeClr val="accent1"/>
-          </a:effectRef>
-          <a:fontRef idx="minor">
-            <a:schemeClr val="lt1"/>
-          </a:fontRef>
-        </p:style>
+        <p:spPr/>
         <p:txBody>
-          <a:bodyPr lIns="731520" tIns="72000" rIns="108000" bIns="72000" rtlCol="0" anchor="ctr"/>
+          <a:bodyPr/>
           <a:lstStyle/>
           <a:p>
-            <a:endParaRPr lang="nl-NL" sz="1200" b="1" noProof="0" dirty="0">
-              <a:solidFill>
-                <a:schemeClr val="accent1"/>
-              </a:solidFill>
-            </a:endParaRPr>
+            <a:r>
+              <a:rPr lang="en-US" dirty="0"/>
+              <a:t>Generated with Sigrid</a:t>
+            </a:r>
+          </a:p>
+          <a:p>
+            <a:r>
+              <a:rPr lang="en-US" dirty="0"/>
+              <a:t>for CUSTOMER_NAME</a:t>
+            </a:r>
           </a:p>
         </p:txBody>
       </p:sp>
@@ -26682,39 +25423,6 @@
             <a:r>
               <a:rPr lang="en-US" sz="800" dirty="0"/>
               <a:t>★</a:t>
-            </a:r>
-          </a:p>
-        </p:txBody>
-      </p:sp>
-      <p:sp>
-        <p:nvSpPr>
-          <p:cNvPr id="2004" name="Footer Placeholder 2004"/>
-          <p:cNvSpPr>
-            <a:spLocks noGrp="1"/>
-          </p:cNvSpPr>
-          <p:nvPr>
-            <p:ph type="ftr" sz="quarter" idx="3"/>
-          </p:nvPr>
-        </p:nvSpPr>
-        <p:spPr>
-          <a:xfrm>
-            <a:off x="192088" y="6392596"/>
-            <a:ext cx="1763922" cy="370422"/>
-          </a:xfrm>
-        </p:spPr>
-        <p:txBody>
-          <a:bodyPr/>
-          <a:lstStyle/>
-          <a:p>
-            <a:r>
-              <a:rPr lang="en-US" dirty="0"/>
-              <a:t>Generated with Sigrid</a:t>
-            </a:r>
-          </a:p>
-          <a:p>
-            <a:r>
-              <a:rPr lang="en-US" dirty="0"/>
-              <a:t>for CUSTOMER_NAME</a:t>
             </a:r>
           </a:p>
         </p:txBody>
@@ -26872,8 +25580,8 @@
         </p:nvSpPr>
         <p:spPr>
           <a:xfrm>
-            <a:off x="381600" y="129568"/>
-            <a:ext cx="1157222" cy="228209"/>
+            <a:off x="381600" y="129599"/>
+            <a:ext cx="1156940" cy="228145"/>
           </a:xfrm>
         </p:spPr>
         <p:txBody>
@@ -26886,25 +25594,6 @@
               <a:rPr lang="en-US" dirty="0"/>
               <a:t>Architecture</a:t>
             </a:r>
-          </a:p>
-        </p:txBody>
-      </p:sp>
-      <p:sp>
-        <p:nvSpPr>
-          <p:cNvPr id="3" name="Content Placeholder 2"/>
-          <p:cNvSpPr>
-            <a:spLocks noGrp="1"/>
-          </p:cNvSpPr>
-          <p:nvPr>
-            <p:ph sz="quarter" idx="13"/>
-          </p:nvPr>
-        </p:nvSpPr>
-        <p:spPr/>
-        <p:txBody>
-          <a:bodyPr/>
-          <a:lstStyle/>
-          <a:p>
-            <a:endParaRPr/>
           </a:p>
         </p:txBody>
       </p:sp>
@@ -26934,63 +25623,29 @@
       </p:sp>
       <p:sp>
         <p:nvSpPr>
-          <p:cNvPr id="7" name="Rectangle 6">
-            <a:extLst>
-              <a:ext uri="{FF2B5EF4-FFF2-40B4-BE49-F238E27FC236}">
-                <a16:creationId xmlns:a16="http://schemas.microsoft.com/office/drawing/2014/main" id="{4D956AE0-666A-B966-0B15-61A5E6C88F75}"/>
-              </a:ext>
-            </a:extLst>
-          </p:cNvPr>
-          <p:cNvSpPr/>
-          <p:nvPr/>
+          <p:cNvPr id="1004" name="Footer Placeholder 1004"/>
+          <p:cNvSpPr>
+            <a:spLocks noGrp="1"/>
+          </p:cNvSpPr>
+          <p:nvPr>
+            <p:ph type="ftr" sz="quarter" idx="3"/>
+          </p:nvPr>
         </p:nvSpPr>
-        <p:spPr>
-          <a:xfrm>
-            <a:off x="0" y="1390132"/>
-            <a:ext cx="12192000" cy="4927867"/>
-          </a:xfrm>
-          <a:prstGeom prst="rect">
-            <a:avLst/>
-          </a:prstGeom>
-          <a:solidFill>
-            <a:schemeClr val="bg1"/>
-          </a:solidFill>
-          <a:ln>
-            <a:noFill/>
-          </a:ln>
-          <a:effectLst>
-            <a:outerShdw blurRad="190500" dist="38100" dir="2700000" algn="tl" rotWithShape="0">
-              <a:prstClr val="black">
-                <a:alpha val="15000"/>
-              </a:prstClr>
-            </a:outerShdw>
-          </a:effectLst>
-        </p:spPr>
-        <p:style>
-          <a:lnRef idx="2">
-            <a:schemeClr val="accent1">
-              <a:shade val="50000"/>
-            </a:schemeClr>
-          </a:lnRef>
-          <a:fillRef idx="1">
-            <a:schemeClr val="accent1"/>
-          </a:fillRef>
-          <a:effectRef idx="0">
-            <a:schemeClr val="accent1"/>
-          </a:effectRef>
-          <a:fontRef idx="minor">
-            <a:schemeClr val="lt1"/>
-          </a:fontRef>
-        </p:style>
+        <p:spPr/>
         <p:txBody>
-          <a:bodyPr lIns="731520" tIns="72000" rIns="108000" bIns="72000" rtlCol="0" anchor="ctr"/>
+          <a:bodyPr/>
           <a:lstStyle/>
           <a:p>
-            <a:endParaRPr lang="nl-NL" sz="1200" b="1" noProof="0" dirty="0">
-              <a:solidFill>
-                <a:schemeClr val="accent1"/>
-              </a:solidFill>
-            </a:endParaRPr>
+            <a:r>
+              <a:rPr lang="en-US" dirty="0"/>
+              <a:t>Generated with Sigrid</a:t>
+            </a:r>
+          </a:p>
+          <a:p>
+            <a:r>
+              <a:rPr lang="en-US" dirty="0"/>
+              <a:t>for CUSTOMER_NAME</a:t>
+            </a:r>
           </a:p>
         </p:txBody>
       </p:sp>
@@ -27580,39 +26235,6 @@
       </p:grpSp>
       <p:sp>
         <p:nvSpPr>
-          <p:cNvPr id="1004" name="Footer Placeholder 1004"/>
-          <p:cNvSpPr>
-            <a:spLocks noGrp="1"/>
-          </p:cNvSpPr>
-          <p:nvPr>
-            <p:ph type="ftr" sz="quarter" idx="3"/>
-          </p:nvPr>
-        </p:nvSpPr>
-        <p:spPr>
-          <a:xfrm>
-            <a:off x="192088" y="6392596"/>
-            <a:ext cx="1763922" cy="370422"/>
-          </a:xfrm>
-        </p:spPr>
-        <p:txBody>
-          <a:bodyPr/>
-          <a:lstStyle/>
-          <a:p>
-            <a:r>
-              <a:rPr lang="en-US" dirty="0"/>
-              <a:t>Generated with Sigrid</a:t>
-            </a:r>
-          </a:p>
-          <a:p>
-            <a:r>
-              <a:rPr lang="en-US" dirty="0"/>
-              <a:t>for CUSTOMER_NAME</a:t>
-            </a:r>
-          </a:p>
-        </p:txBody>
-      </p:sp>
-      <p:sp>
-        <p:nvSpPr>
           <p:cNvPr id="1071" name="TextBox 1071"/>
           <p:cNvSpPr txBox="1"/>
           <p:nvPr/>
@@ -27828,8 +26450,8 @@
         </p:nvSpPr>
         <p:spPr>
           <a:xfrm>
-            <a:off x="381600" y="129568"/>
-            <a:ext cx="1157222" cy="228209"/>
+            <a:off x="381600" y="129599"/>
+            <a:ext cx="1156940" cy="228145"/>
           </a:xfrm>
         </p:spPr>
         <p:txBody>
@@ -27842,25 +26464,6 @@
               <a:rPr lang="en-US" dirty="0"/>
               <a:t>Architecture</a:t>
             </a:r>
-          </a:p>
-        </p:txBody>
-      </p:sp>
-      <p:sp>
-        <p:nvSpPr>
-          <p:cNvPr id="3" name="Content Placeholder 2"/>
-          <p:cNvSpPr>
-            <a:spLocks noGrp="1"/>
-          </p:cNvSpPr>
-          <p:nvPr>
-            <p:ph sz="quarter" idx="13"/>
-          </p:nvPr>
-        </p:nvSpPr>
-        <p:spPr/>
-        <p:txBody>
-          <a:bodyPr/>
-          <a:lstStyle/>
-          <a:p>
-            <a:endParaRPr/>
           </a:p>
         </p:txBody>
       </p:sp>
@@ -27890,63 +26493,29 @@
       </p:sp>
       <p:sp>
         <p:nvSpPr>
-          <p:cNvPr id="7" name="Rectangle 6">
-            <a:extLst>
-              <a:ext uri="{FF2B5EF4-FFF2-40B4-BE49-F238E27FC236}">
-                <a16:creationId xmlns:a16="http://schemas.microsoft.com/office/drawing/2014/main" id="{4D956AE0-666A-B966-0B15-61A5E6C88F75}"/>
-              </a:ext>
-            </a:extLst>
-          </p:cNvPr>
-          <p:cNvSpPr/>
-          <p:nvPr/>
+          <p:cNvPr id="2004" name="Footer Placeholder 2004"/>
+          <p:cNvSpPr>
+            <a:spLocks noGrp="1"/>
+          </p:cNvSpPr>
+          <p:nvPr>
+            <p:ph type="ftr" sz="quarter" idx="3"/>
+          </p:nvPr>
         </p:nvSpPr>
-        <p:spPr>
-          <a:xfrm>
-            <a:off x="0" y="1390132"/>
-            <a:ext cx="12192000" cy="4927867"/>
-          </a:xfrm>
-          <a:prstGeom prst="rect">
-            <a:avLst/>
-          </a:prstGeom>
-          <a:solidFill>
-            <a:schemeClr val="bg1"/>
-          </a:solidFill>
-          <a:ln>
-            <a:noFill/>
-          </a:ln>
-          <a:effectLst>
-            <a:outerShdw blurRad="190500" dist="38100" dir="2700000" algn="tl" rotWithShape="0">
-              <a:prstClr val="black">
-                <a:alpha val="15000"/>
-              </a:prstClr>
-            </a:outerShdw>
-          </a:effectLst>
-        </p:spPr>
-        <p:style>
-          <a:lnRef idx="2">
-            <a:schemeClr val="accent1">
-              <a:shade val="50000"/>
-            </a:schemeClr>
-          </a:lnRef>
-          <a:fillRef idx="1">
-            <a:schemeClr val="accent1"/>
-          </a:fillRef>
-          <a:effectRef idx="0">
-            <a:schemeClr val="accent1"/>
-          </a:effectRef>
-          <a:fontRef idx="minor">
-            <a:schemeClr val="lt1"/>
-          </a:fontRef>
-        </p:style>
+        <p:spPr/>
         <p:txBody>
-          <a:bodyPr lIns="731520" tIns="72000" rIns="108000" bIns="72000" rtlCol="0" anchor="ctr"/>
+          <a:bodyPr/>
           <a:lstStyle/>
           <a:p>
-            <a:endParaRPr lang="nl-NL" sz="1200" b="1" noProof="0" dirty="0">
-              <a:solidFill>
-                <a:schemeClr val="accent1"/>
-              </a:solidFill>
-            </a:endParaRPr>
+            <a:r>
+              <a:rPr lang="en-US" dirty="0"/>
+              <a:t>Generated with Sigrid</a:t>
+            </a:r>
+          </a:p>
+          <a:p>
+            <a:r>
+              <a:rPr lang="en-US" dirty="0"/>
+              <a:t>for CUSTOMER_NAME</a:t>
+            </a:r>
           </a:p>
         </p:txBody>
       </p:sp>
@@ -28345,39 +26914,6 @@
             <a:r>
               <a:rPr lang="en-US" sz="800" dirty="0"/>
               <a:t>★</a:t>
-            </a:r>
-          </a:p>
-        </p:txBody>
-      </p:sp>
-      <p:sp>
-        <p:nvSpPr>
-          <p:cNvPr id="2004" name="Footer Placeholder 2004"/>
-          <p:cNvSpPr>
-            <a:spLocks noGrp="1"/>
-          </p:cNvSpPr>
-          <p:nvPr>
-            <p:ph type="ftr" sz="quarter" idx="3"/>
-          </p:nvPr>
-        </p:nvSpPr>
-        <p:spPr>
-          <a:xfrm>
-            <a:off x="192088" y="6392596"/>
-            <a:ext cx="1763922" cy="370422"/>
-          </a:xfrm>
-        </p:spPr>
-        <p:txBody>
-          <a:bodyPr/>
-          <a:lstStyle/>
-          <a:p>
-            <a:r>
-              <a:rPr lang="en-US" dirty="0"/>
-              <a:t>Generated with Sigrid</a:t>
-            </a:r>
-          </a:p>
-          <a:p>
-            <a:r>
-              <a:rPr lang="en-US" dirty="0"/>
-              <a:t>for CUSTOMER_NAME</a:t>
             </a:r>
           </a:p>
         </p:txBody>
@@ -28535,8 +27071,8 @@
         </p:nvSpPr>
         <p:spPr>
           <a:xfrm>
-            <a:off x="381600" y="129568"/>
-            <a:ext cx="1157222" cy="228209"/>
+            <a:off x="381600" y="129599"/>
+            <a:ext cx="1156940" cy="228145"/>
           </a:xfrm>
         </p:spPr>
         <p:txBody>
@@ -28549,25 +27085,7 @@
               <a:rPr dirty="0"/>
               <a:t>Architecture</a:t>
             </a:r>
-          </a:p>
-        </p:txBody>
-      </p:sp>
-      <p:sp>
-        <p:nvSpPr>
-          <p:cNvPr id="3" name="Content Placeholder 2"/>
-          <p:cNvSpPr>
-            <a:spLocks noGrp="1"/>
-          </p:cNvSpPr>
-          <p:nvPr>
-            <p:ph sz="quarter" idx="13"/>
-          </p:nvPr>
-        </p:nvSpPr>
-        <p:spPr/>
-        <p:txBody>
-          <a:bodyPr/>
-          <a:lstStyle/>
-          <a:p>
-            <a:endParaRPr/>
+            <a:endParaRPr lang="en-US" dirty="0"/>
           </a:p>
         </p:txBody>
       </p:sp>
@@ -28597,63 +27115,29 @@
       </p:sp>
       <p:sp>
         <p:nvSpPr>
-          <p:cNvPr id="7" name="Rectangle 6">
-            <a:extLst>
-              <a:ext uri="{FF2B5EF4-FFF2-40B4-BE49-F238E27FC236}">
-                <a16:creationId xmlns:a16="http://schemas.microsoft.com/office/drawing/2014/main" id="{4D956AE0-666A-B966-0B15-61A5E6C88F75}"/>
-              </a:ext>
-            </a:extLst>
-          </p:cNvPr>
-          <p:cNvSpPr/>
-          <p:nvPr/>
+          <p:cNvPr id="1004" name="Footer Placeholder 1004"/>
+          <p:cNvSpPr>
+            <a:spLocks noGrp="1"/>
+          </p:cNvSpPr>
+          <p:nvPr>
+            <p:ph type="ftr" sz="quarter" idx="3"/>
+          </p:nvPr>
         </p:nvSpPr>
-        <p:spPr>
-          <a:xfrm>
-            <a:off x="0" y="1390132"/>
-            <a:ext cx="12192000" cy="4927867"/>
-          </a:xfrm>
-          <a:prstGeom prst="rect">
-            <a:avLst/>
-          </a:prstGeom>
-          <a:solidFill>
-            <a:schemeClr val="bg1"/>
-          </a:solidFill>
-          <a:ln>
-            <a:noFill/>
-          </a:ln>
-          <a:effectLst>
-            <a:outerShdw blurRad="190500" dist="38100" dir="2700000" algn="tl" rotWithShape="0">
-              <a:prstClr val="black">
-                <a:alpha val="15000"/>
-              </a:prstClr>
-            </a:outerShdw>
-          </a:effectLst>
-        </p:spPr>
-        <p:style>
-          <a:lnRef idx="2">
-            <a:schemeClr val="accent1">
-              <a:shade val="50000"/>
-            </a:schemeClr>
-          </a:lnRef>
-          <a:fillRef idx="1">
-            <a:schemeClr val="accent1"/>
-          </a:fillRef>
-          <a:effectRef idx="0">
-            <a:schemeClr val="accent1"/>
-          </a:effectRef>
-          <a:fontRef idx="minor">
-            <a:schemeClr val="lt1"/>
-          </a:fontRef>
-        </p:style>
+        <p:spPr/>
         <p:txBody>
-          <a:bodyPr lIns="731520" tIns="72000" rIns="108000" bIns="72000" rtlCol="0" anchor="ctr"/>
+          <a:bodyPr/>
           <a:lstStyle/>
           <a:p>
-            <a:endParaRPr lang="nl-NL" sz="1200" b="1" noProof="0" dirty="0">
-              <a:solidFill>
-                <a:schemeClr val="accent1"/>
-              </a:solidFill>
-            </a:endParaRPr>
+            <a:r>
+              <a:rPr lang="en-US" dirty="0"/>
+              <a:t>Generated with Sigrid</a:t>
+            </a:r>
+          </a:p>
+          <a:p>
+            <a:r>
+              <a:rPr lang="en-US" dirty="0"/>
+              <a:t>for CUSTOMER_NAME</a:t>
+            </a:r>
           </a:p>
         </p:txBody>
       </p:sp>
@@ -29243,39 +27727,6 @@
       </p:grpSp>
       <p:sp>
         <p:nvSpPr>
-          <p:cNvPr id="1004" name="Footer Placeholder 1004"/>
-          <p:cNvSpPr>
-            <a:spLocks noGrp="1"/>
-          </p:cNvSpPr>
-          <p:nvPr>
-            <p:ph type="ftr" sz="quarter" idx="3"/>
-          </p:nvPr>
-        </p:nvSpPr>
-        <p:spPr>
-          <a:xfrm>
-            <a:off x="192088" y="6392596"/>
-            <a:ext cx="1763922" cy="370422"/>
-          </a:xfrm>
-        </p:spPr>
-        <p:txBody>
-          <a:bodyPr/>
-          <a:lstStyle/>
-          <a:p>
-            <a:r>
-              <a:rPr lang="en-US" dirty="0"/>
-              <a:t>Generated with Sigrid</a:t>
-            </a:r>
-          </a:p>
-          <a:p>
-            <a:r>
-              <a:rPr lang="en-US" dirty="0"/>
-              <a:t>for CUSTOMER_NAME</a:t>
-            </a:r>
-          </a:p>
-        </p:txBody>
-      </p:sp>
-      <p:sp>
-        <p:nvSpPr>
           <p:cNvPr id="1071" name="TextBox 1071"/>
           <p:cNvSpPr txBox="1"/>
           <p:nvPr/>
@@ -29491,8 +27942,8 @@
         </p:nvSpPr>
         <p:spPr>
           <a:xfrm>
-            <a:off x="381600" y="129568"/>
-            <a:ext cx="1157222" cy="228209"/>
+            <a:off x="381600" y="129599"/>
+            <a:ext cx="1156940" cy="228145"/>
           </a:xfrm>
         </p:spPr>
         <p:txBody>
@@ -29505,25 +27956,6 @@
               <a:rPr lang="en-US" dirty="0"/>
               <a:t>Architecture</a:t>
             </a:r>
-          </a:p>
-        </p:txBody>
-      </p:sp>
-      <p:sp>
-        <p:nvSpPr>
-          <p:cNvPr id="3" name="Content Placeholder 2"/>
-          <p:cNvSpPr>
-            <a:spLocks noGrp="1"/>
-          </p:cNvSpPr>
-          <p:nvPr>
-            <p:ph sz="quarter" idx="13"/>
-          </p:nvPr>
-        </p:nvSpPr>
-        <p:spPr/>
-        <p:txBody>
-          <a:bodyPr/>
-          <a:lstStyle/>
-          <a:p>
-            <a:endParaRPr/>
           </a:p>
         </p:txBody>
       </p:sp>
@@ -29553,63 +27985,29 @@
       </p:sp>
       <p:sp>
         <p:nvSpPr>
-          <p:cNvPr id="7" name="Rectangle 6">
-            <a:extLst>
-              <a:ext uri="{FF2B5EF4-FFF2-40B4-BE49-F238E27FC236}">
-                <a16:creationId xmlns:a16="http://schemas.microsoft.com/office/drawing/2014/main" id="{4D956AE0-666A-B966-0B15-61A5E6C88F75}"/>
-              </a:ext>
-            </a:extLst>
-          </p:cNvPr>
-          <p:cNvSpPr/>
-          <p:nvPr/>
+          <p:cNvPr id="2004" name="Footer Placeholder 2004"/>
+          <p:cNvSpPr>
+            <a:spLocks noGrp="1"/>
+          </p:cNvSpPr>
+          <p:nvPr>
+            <p:ph type="ftr" sz="quarter" idx="3"/>
+          </p:nvPr>
         </p:nvSpPr>
-        <p:spPr>
-          <a:xfrm>
-            <a:off x="0" y="1390132"/>
-            <a:ext cx="12192000" cy="4927867"/>
-          </a:xfrm>
-          <a:prstGeom prst="rect">
-            <a:avLst/>
-          </a:prstGeom>
-          <a:solidFill>
-            <a:schemeClr val="bg1"/>
-          </a:solidFill>
-          <a:ln>
-            <a:noFill/>
-          </a:ln>
-          <a:effectLst>
-            <a:outerShdw blurRad="190500" dist="38100" dir="2700000" algn="tl" rotWithShape="0">
-              <a:prstClr val="black">
-                <a:alpha val="15000"/>
-              </a:prstClr>
-            </a:outerShdw>
-          </a:effectLst>
-        </p:spPr>
-        <p:style>
-          <a:lnRef idx="2">
-            <a:schemeClr val="accent1">
-              <a:shade val="50000"/>
-            </a:schemeClr>
-          </a:lnRef>
-          <a:fillRef idx="1">
-            <a:schemeClr val="accent1"/>
-          </a:fillRef>
-          <a:effectRef idx="0">
-            <a:schemeClr val="accent1"/>
-          </a:effectRef>
-          <a:fontRef idx="minor">
-            <a:schemeClr val="lt1"/>
-          </a:fontRef>
-        </p:style>
+        <p:spPr/>
         <p:txBody>
-          <a:bodyPr lIns="731520" tIns="72000" rIns="108000" bIns="72000" rtlCol="0" anchor="ctr"/>
+          <a:bodyPr/>
           <a:lstStyle/>
           <a:p>
-            <a:endParaRPr lang="nl-NL" sz="1200" b="1" noProof="0" dirty="0">
-              <a:solidFill>
-                <a:schemeClr val="accent1"/>
-              </a:solidFill>
-            </a:endParaRPr>
+            <a:r>
+              <a:rPr lang="en-US" dirty="0"/>
+              <a:t>Generated with Sigrid</a:t>
+            </a:r>
+          </a:p>
+          <a:p>
+            <a:r>
+              <a:rPr lang="en-US" dirty="0"/>
+              <a:t>for CUSTOMER_NAME</a:t>
+            </a:r>
           </a:p>
         </p:txBody>
       </p:sp>
@@ -30008,39 +28406,6 @@
             <a:r>
               <a:rPr lang="en-US" sz="800" dirty="0"/>
               <a:t>★</a:t>
-            </a:r>
-          </a:p>
-        </p:txBody>
-      </p:sp>
-      <p:sp>
-        <p:nvSpPr>
-          <p:cNvPr id="2004" name="Footer Placeholder 2004"/>
-          <p:cNvSpPr>
-            <a:spLocks noGrp="1"/>
-          </p:cNvSpPr>
-          <p:nvPr>
-            <p:ph type="ftr" sz="quarter" idx="3"/>
-          </p:nvPr>
-        </p:nvSpPr>
-        <p:spPr>
-          <a:xfrm>
-            <a:off x="192088" y="6392596"/>
-            <a:ext cx="1763922" cy="370422"/>
-          </a:xfrm>
-        </p:spPr>
-        <p:txBody>
-          <a:bodyPr/>
-          <a:lstStyle/>
-          <a:p>
-            <a:r>
-              <a:rPr lang="en-US" dirty="0"/>
-              <a:t>Generated with Sigrid</a:t>
-            </a:r>
-          </a:p>
-          <a:p>
-            <a:r>
-              <a:rPr lang="en-US" dirty="0"/>
-              <a:t>for CUSTOMER_NAME</a:t>
             </a:r>
           </a:p>
         </p:txBody>
@@ -30198,8 +28563,8 @@
         </p:nvSpPr>
         <p:spPr>
           <a:xfrm>
-            <a:off x="381600" y="129568"/>
-            <a:ext cx="1157222" cy="228209"/>
+            <a:off x="381600" y="129599"/>
+            <a:ext cx="1156940" cy="228145"/>
           </a:xfrm>
         </p:spPr>
         <p:txBody>
@@ -30212,25 +28577,6 @@
               <a:rPr lang="en-US" dirty="0"/>
               <a:t>Architecture</a:t>
             </a:r>
-          </a:p>
-        </p:txBody>
-      </p:sp>
-      <p:sp>
-        <p:nvSpPr>
-          <p:cNvPr id="3" name="Content Placeholder 2"/>
-          <p:cNvSpPr>
-            <a:spLocks noGrp="1"/>
-          </p:cNvSpPr>
-          <p:nvPr>
-            <p:ph sz="quarter" idx="13"/>
-          </p:nvPr>
-        </p:nvSpPr>
-        <p:spPr/>
-        <p:txBody>
-          <a:bodyPr/>
-          <a:lstStyle/>
-          <a:p>
-            <a:endParaRPr/>
           </a:p>
         </p:txBody>
       </p:sp>
@@ -30271,63 +28617,29 @@
       </p:sp>
       <p:sp>
         <p:nvSpPr>
-          <p:cNvPr id="7" name="Rectangle 6">
-            <a:extLst>
-              <a:ext uri="{FF2B5EF4-FFF2-40B4-BE49-F238E27FC236}">
-                <a16:creationId xmlns:a16="http://schemas.microsoft.com/office/drawing/2014/main" id="{4D956AE0-666A-B966-0B15-61A5E6C88F75}"/>
-              </a:ext>
-            </a:extLst>
-          </p:cNvPr>
-          <p:cNvSpPr/>
-          <p:nvPr/>
+          <p:cNvPr id="1004" name="Footer Placeholder 1004"/>
+          <p:cNvSpPr>
+            <a:spLocks noGrp="1"/>
+          </p:cNvSpPr>
+          <p:nvPr>
+            <p:ph type="ftr" sz="quarter" idx="3"/>
+          </p:nvPr>
         </p:nvSpPr>
-        <p:spPr>
-          <a:xfrm>
-            <a:off x="0" y="1390132"/>
-            <a:ext cx="12192000" cy="4927867"/>
-          </a:xfrm>
-          <a:prstGeom prst="rect">
-            <a:avLst/>
-          </a:prstGeom>
-          <a:solidFill>
-            <a:schemeClr val="bg1"/>
-          </a:solidFill>
-          <a:ln>
-            <a:noFill/>
-          </a:ln>
-          <a:effectLst>
-            <a:outerShdw blurRad="190500" dist="38100" dir="2700000" algn="tl" rotWithShape="0">
-              <a:prstClr val="black">
-                <a:alpha val="15000"/>
-              </a:prstClr>
-            </a:outerShdw>
-          </a:effectLst>
-        </p:spPr>
-        <p:style>
-          <a:lnRef idx="2">
-            <a:schemeClr val="accent1">
-              <a:shade val="50000"/>
-            </a:schemeClr>
-          </a:lnRef>
-          <a:fillRef idx="1">
-            <a:schemeClr val="accent1"/>
-          </a:fillRef>
-          <a:effectRef idx="0">
-            <a:schemeClr val="accent1"/>
-          </a:effectRef>
-          <a:fontRef idx="minor">
-            <a:schemeClr val="lt1"/>
-          </a:fontRef>
-        </p:style>
+        <p:spPr/>
         <p:txBody>
-          <a:bodyPr lIns="731520" tIns="72000" rIns="108000" bIns="72000" rtlCol="0" anchor="ctr"/>
+          <a:bodyPr/>
           <a:lstStyle/>
           <a:p>
-            <a:endParaRPr lang="nl-NL" sz="1200" b="1" noProof="0" dirty="0">
-              <a:solidFill>
-                <a:schemeClr val="accent1"/>
-              </a:solidFill>
-            </a:endParaRPr>
+            <a:r>
+              <a:rPr lang="en-US" dirty="0"/>
+              <a:t>Generated with Sigrid</a:t>
+            </a:r>
+          </a:p>
+          <a:p>
+            <a:r>
+              <a:rPr lang="en-US" dirty="0"/>
+              <a:t>for CUSTOMER_NAME</a:t>
+            </a:r>
           </a:p>
         </p:txBody>
       </p:sp>
@@ -30393,14 +28705,6 @@
                 <a:cs typeface="Calibri"/>
               </a:rPr>
               <a:t>_COMMUNICATION_CENTRALIZATION</a:t>
-            </a:r>
-            <a:r>
-              <a:rPr lang="en-US" sz="1600" dirty="0">
-                <a:solidFill>
-                  <a:schemeClr val="bg1"/>
-                </a:solidFill>
-              </a:rPr>
-              <a:t/>
             </a:r>
           </a:p>
         </p:txBody>
@@ -30932,39 +29236,6 @@
       </p:grpSp>
       <p:sp>
         <p:nvSpPr>
-          <p:cNvPr id="1004" name="Footer Placeholder 1004"/>
-          <p:cNvSpPr>
-            <a:spLocks noGrp="1"/>
-          </p:cNvSpPr>
-          <p:nvPr>
-            <p:ph type="ftr" sz="quarter" idx="3"/>
-          </p:nvPr>
-        </p:nvSpPr>
-        <p:spPr>
-          <a:xfrm>
-            <a:off x="192088" y="6392596"/>
-            <a:ext cx="1763922" cy="370422"/>
-          </a:xfrm>
-        </p:spPr>
-        <p:txBody>
-          <a:bodyPr/>
-          <a:lstStyle/>
-          <a:p>
-            <a:r>
-              <a:rPr lang="en-US" dirty="0"/>
-              <a:t>Generated with Sigrid</a:t>
-            </a:r>
-          </a:p>
-          <a:p>
-            <a:r>
-              <a:rPr lang="en-US" dirty="0"/>
-              <a:t>for CUSTOMER_NAME</a:t>
-            </a:r>
-          </a:p>
-        </p:txBody>
-      </p:sp>
-      <p:sp>
-        <p:nvSpPr>
           <p:cNvPr id="1071" name="TextBox 1071"/>
           <p:cNvSpPr txBox="1"/>
           <p:nvPr/>
@@ -31215,8 +29486,8 @@
         </p:nvSpPr>
         <p:spPr>
           <a:xfrm>
-            <a:off x="381600" y="129568"/>
-            <a:ext cx="1157222" cy="228209"/>
+            <a:off x="381600" y="129599"/>
+            <a:ext cx="1156940" cy="228145"/>
           </a:xfrm>
         </p:spPr>
         <p:txBody>
@@ -31229,25 +29500,6 @@
               <a:rPr lang="en-US" dirty="0"/>
               <a:t>Architecture</a:t>
             </a:r>
-          </a:p>
-        </p:txBody>
-      </p:sp>
-      <p:sp>
-        <p:nvSpPr>
-          <p:cNvPr id="3" name="Content Placeholder 2"/>
-          <p:cNvSpPr>
-            <a:spLocks noGrp="1"/>
-          </p:cNvSpPr>
-          <p:nvPr>
-            <p:ph sz="quarter" idx="13"/>
-          </p:nvPr>
-        </p:nvSpPr>
-        <p:spPr/>
-        <p:txBody>
-          <a:bodyPr/>
-          <a:lstStyle/>
-          <a:p>
-            <a:endParaRPr/>
           </a:p>
         </p:txBody>
       </p:sp>
@@ -31277,63 +29529,29 @@
       </p:sp>
       <p:sp>
         <p:nvSpPr>
-          <p:cNvPr id="7" name="Rectangle 6">
-            <a:extLst>
-              <a:ext uri="{FF2B5EF4-FFF2-40B4-BE49-F238E27FC236}">
-                <a16:creationId xmlns:a16="http://schemas.microsoft.com/office/drawing/2014/main" id="{4D956AE0-666A-B966-0B15-61A5E6C88F75}"/>
-              </a:ext>
-            </a:extLst>
-          </p:cNvPr>
-          <p:cNvSpPr/>
-          <p:nvPr/>
+          <p:cNvPr id="2004" name="Footer Placeholder 2004"/>
+          <p:cNvSpPr>
+            <a:spLocks noGrp="1"/>
+          </p:cNvSpPr>
+          <p:nvPr>
+            <p:ph type="ftr" sz="quarter" idx="3"/>
+          </p:nvPr>
         </p:nvSpPr>
-        <p:spPr>
-          <a:xfrm>
-            <a:off x="0" y="1390132"/>
-            <a:ext cx="12192000" cy="4927867"/>
-          </a:xfrm>
-          <a:prstGeom prst="rect">
-            <a:avLst/>
-          </a:prstGeom>
-          <a:solidFill>
-            <a:schemeClr val="bg1"/>
-          </a:solidFill>
-          <a:ln>
-            <a:noFill/>
-          </a:ln>
-          <a:effectLst>
-            <a:outerShdw blurRad="190500" dist="38100" dir="2700000" algn="tl" rotWithShape="0">
-              <a:prstClr val="black">
-                <a:alpha val="15000"/>
-              </a:prstClr>
-            </a:outerShdw>
-          </a:effectLst>
-        </p:spPr>
-        <p:style>
-          <a:lnRef idx="2">
-            <a:schemeClr val="accent1">
-              <a:shade val="50000"/>
-            </a:schemeClr>
-          </a:lnRef>
-          <a:fillRef idx="1">
-            <a:schemeClr val="accent1"/>
-          </a:fillRef>
-          <a:effectRef idx="0">
-            <a:schemeClr val="accent1"/>
-          </a:effectRef>
-          <a:fontRef idx="minor">
-            <a:schemeClr val="lt1"/>
-          </a:fontRef>
-        </p:style>
+        <p:spPr/>
         <p:txBody>
-          <a:bodyPr lIns="731520" tIns="72000" rIns="108000" bIns="72000" rtlCol="0" anchor="ctr"/>
+          <a:bodyPr/>
           <a:lstStyle/>
           <a:p>
-            <a:endParaRPr lang="nl-NL" sz="1200" b="1" noProof="0" dirty="0">
-              <a:solidFill>
-                <a:schemeClr val="accent1"/>
-              </a:solidFill>
-            </a:endParaRPr>
+            <a:r>
+              <a:rPr lang="en-US" dirty="0"/>
+              <a:t>Generated with Sigrid</a:t>
+            </a:r>
+          </a:p>
+          <a:p>
+            <a:r>
+              <a:rPr lang="en-US" dirty="0"/>
+              <a:t>for CUSTOMER_NAME</a:t>
+            </a:r>
           </a:p>
         </p:txBody>
       </p:sp>
@@ -31732,39 +29950,6 @@
             <a:r>
               <a:rPr lang="en-US" sz="800" dirty="0"/>
               <a:t>★</a:t>
-            </a:r>
-          </a:p>
-        </p:txBody>
-      </p:sp>
-      <p:sp>
-        <p:nvSpPr>
-          <p:cNvPr id="2004" name="Footer Placeholder 2004"/>
-          <p:cNvSpPr>
-            <a:spLocks noGrp="1"/>
-          </p:cNvSpPr>
-          <p:nvPr>
-            <p:ph type="ftr" sz="quarter" idx="3"/>
-          </p:nvPr>
-        </p:nvSpPr>
-        <p:spPr>
-          <a:xfrm>
-            <a:off x="192088" y="6392596"/>
-            <a:ext cx="1763922" cy="370422"/>
-          </a:xfrm>
-        </p:spPr>
-        <p:txBody>
-          <a:bodyPr/>
-          <a:lstStyle/>
-          <a:p>
-            <a:r>
-              <a:rPr lang="en-US" dirty="0"/>
-              <a:t>Generated with Sigrid</a:t>
-            </a:r>
-          </a:p>
-          <a:p>
-            <a:r>
-              <a:rPr lang="en-US" dirty="0"/>
-              <a:t>for CUSTOMER_NAME</a:t>
             </a:r>
           </a:p>
         </p:txBody>
@@ -31922,8 +30107,8 @@
         </p:nvSpPr>
         <p:spPr>
           <a:xfrm>
-            <a:off x="381600" y="129568"/>
-            <a:ext cx="1157222" cy="228209"/>
+            <a:off x="381600" y="129599"/>
+            <a:ext cx="1156940" cy="228145"/>
           </a:xfrm>
         </p:spPr>
         <p:txBody>
@@ -31936,25 +30121,6 @@
               <a:rPr lang="en-US" dirty="0"/>
               <a:t>Architecture</a:t>
             </a:r>
-          </a:p>
-        </p:txBody>
-      </p:sp>
-      <p:sp>
-        <p:nvSpPr>
-          <p:cNvPr id="3" name="Content Placeholder 2"/>
-          <p:cNvSpPr>
-            <a:spLocks noGrp="1"/>
-          </p:cNvSpPr>
-          <p:nvPr>
-            <p:ph sz="quarter" idx="13"/>
-          </p:nvPr>
-        </p:nvSpPr>
-        <p:spPr/>
-        <p:txBody>
-          <a:bodyPr/>
-          <a:lstStyle/>
-          <a:p>
-            <a:endParaRPr/>
           </a:p>
         </p:txBody>
       </p:sp>
@@ -31984,63 +30150,29 @@
       </p:sp>
       <p:sp>
         <p:nvSpPr>
-          <p:cNvPr id="7" name="Rectangle 6">
-            <a:extLst>
-              <a:ext uri="{FF2B5EF4-FFF2-40B4-BE49-F238E27FC236}">
-                <a16:creationId xmlns:a16="http://schemas.microsoft.com/office/drawing/2014/main" id="{4D956AE0-666A-B966-0B15-61A5E6C88F75}"/>
-              </a:ext>
-            </a:extLst>
-          </p:cNvPr>
-          <p:cNvSpPr/>
-          <p:nvPr/>
+          <p:cNvPr id="1004" name="Footer Placeholder 1004"/>
+          <p:cNvSpPr>
+            <a:spLocks noGrp="1"/>
+          </p:cNvSpPr>
+          <p:nvPr>
+            <p:ph type="ftr" sz="quarter" idx="3"/>
+          </p:nvPr>
         </p:nvSpPr>
-        <p:spPr>
-          <a:xfrm>
-            <a:off x="0" y="1390132"/>
-            <a:ext cx="12192000" cy="4927867"/>
-          </a:xfrm>
-          <a:prstGeom prst="rect">
-            <a:avLst/>
-          </a:prstGeom>
-          <a:solidFill>
-            <a:schemeClr val="bg1"/>
-          </a:solidFill>
-          <a:ln>
-            <a:noFill/>
-          </a:ln>
-          <a:effectLst>
-            <a:outerShdw blurRad="190500" dist="38100" dir="2700000" algn="tl" rotWithShape="0">
-              <a:prstClr val="black">
-                <a:alpha val="15000"/>
-              </a:prstClr>
-            </a:outerShdw>
-          </a:effectLst>
-        </p:spPr>
-        <p:style>
-          <a:lnRef idx="2">
-            <a:schemeClr val="accent1">
-              <a:shade val="50000"/>
-            </a:schemeClr>
-          </a:lnRef>
-          <a:fillRef idx="1">
-            <a:schemeClr val="accent1"/>
-          </a:fillRef>
-          <a:effectRef idx="0">
-            <a:schemeClr val="accent1"/>
-          </a:effectRef>
-          <a:fontRef idx="minor">
-            <a:schemeClr val="lt1"/>
-          </a:fontRef>
-        </p:style>
+        <p:spPr/>
         <p:txBody>
-          <a:bodyPr lIns="731520" tIns="72000" rIns="108000" bIns="72000" rtlCol="0" anchor="ctr"/>
+          <a:bodyPr/>
           <a:lstStyle/>
           <a:p>
-            <a:endParaRPr lang="nl-NL" sz="1200" b="1" noProof="0" dirty="0">
-              <a:solidFill>
-                <a:schemeClr val="accent1"/>
-              </a:solidFill>
-            </a:endParaRPr>
+            <a:r>
+              <a:rPr lang="en-US" dirty="0"/>
+              <a:t>Generated with Sigrid</a:t>
+            </a:r>
+          </a:p>
+          <a:p>
+            <a:r>
+              <a:rPr lang="en-US" dirty="0"/>
+              <a:t>for CUSTOMER_NAME</a:t>
+            </a:r>
           </a:p>
         </p:txBody>
       </p:sp>
@@ -32630,39 +30762,6 @@
       </p:grpSp>
       <p:sp>
         <p:nvSpPr>
-          <p:cNvPr id="1004" name="Footer Placeholder 1004"/>
-          <p:cNvSpPr>
-            <a:spLocks noGrp="1"/>
-          </p:cNvSpPr>
-          <p:nvPr>
-            <p:ph type="ftr" sz="quarter" idx="3"/>
-          </p:nvPr>
-        </p:nvSpPr>
-        <p:spPr>
-          <a:xfrm>
-            <a:off x="192088" y="6392596"/>
-            <a:ext cx="1763922" cy="370422"/>
-          </a:xfrm>
-        </p:spPr>
-        <p:txBody>
-          <a:bodyPr/>
-          <a:lstStyle/>
-          <a:p>
-            <a:r>
-              <a:rPr lang="en-US" dirty="0"/>
-              <a:t>Generated with Sigrid</a:t>
-            </a:r>
-          </a:p>
-          <a:p>
-            <a:r>
-              <a:rPr lang="en-US" dirty="0"/>
-              <a:t>for CUSTOMER_NAME</a:t>
-            </a:r>
-          </a:p>
-        </p:txBody>
-      </p:sp>
-      <p:sp>
-        <p:nvSpPr>
           <p:cNvPr id="1071" name="TextBox 1071"/>
           <p:cNvSpPr txBox="1"/>
           <p:nvPr/>
@@ -32878,8 +30977,8 @@
         </p:nvSpPr>
         <p:spPr>
           <a:xfrm>
-            <a:off x="381600" y="129568"/>
-            <a:ext cx="1157222" cy="228209"/>
+            <a:off x="381600" y="129599"/>
+            <a:ext cx="1156940" cy="228145"/>
           </a:xfrm>
         </p:spPr>
         <p:txBody>
@@ -32892,25 +30991,6 @@
               <a:rPr lang="en-US" dirty="0"/>
               <a:t>Architecture</a:t>
             </a:r>
-          </a:p>
-        </p:txBody>
-      </p:sp>
-      <p:sp>
-        <p:nvSpPr>
-          <p:cNvPr id="3" name="Content Placeholder 2"/>
-          <p:cNvSpPr>
-            <a:spLocks noGrp="1"/>
-          </p:cNvSpPr>
-          <p:nvPr>
-            <p:ph sz="quarter" idx="13"/>
-          </p:nvPr>
-        </p:nvSpPr>
-        <p:spPr/>
-        <p:txBody>
-          <a:bodyPr/>
-          <a:lstStyle/>
-          <a:p>
-            <a:endParaRPr/>
           </a:p>
         </p:txBody>
       </p:sp>
@@ -32940,63 +31020,29 @@
       </p:sp>
       <p:sp>
         <p:nvSpPr>
-          <p:cNvPr id="7" name="Rectangle 6">
-            <a:extLst>
-              <a:ext uri="{FF2B5EF4-FFF2-40B4-BE49-F238E27FC236}">
-                <a16:creationId xmlns:a16="http://schemas.microsoft.com/office/drawing/2014/main" id="{4D956AE0-666A-B966-0B15-61A5E6C88F75}"/>
-              </a:ext>
-            </a:extLst>
-          </p:cNvPr>
-          <p:cNvSpPr/>
-          <p:nvPr/>
+          <p:cNvPr id="2004" name="Footer Placeholder 2004"/>
+          <p:cNvSpPr>
+            <a:spLocks noGrp="1"/>
+          </p:cNvSpPr>
+          <p:nvPr>
+            <p:ph type="ftr" sz="quarter" idx="3"/>
+          </p:nvPr>
         </p:nvSpPr>
-        <p:spPr>
-          <a:xfrm>
-            <a:off x="0" y="1390132"/>
-            <a:ext cx="12192000" cy="4927867"/>
-          </a:xfrm>
-          <a:prstGeom prst="rect">
-            <a:avLst/>
-          </a:prstGeom>
-          <a:solidFill>
-            <a:schemeClr val="bg1"/>
-          </a:solidFill>
-          <a:ln>
-            <a:noFill/>
-          </a:ln>
-          <a:effectLst>
-            <a:outerShdw blurRad="190500" dist="38100" dir="2700000" algn="tl" rotWithShape="0">
-              <a:prstClr val="black">
-                <a:alpha val="15000"/>
-              </a:prstClr>
-            </a:outerShdw>
-          </a:effectLst>
-        </p:spPr>
-        <p:style>
-          <a:lnRef idx="2">
-            <a:schemeClr val="accent1">
-              <a:shade val="50000"/>
-            </a:schemeClr>
-          </a:lnRef>
-          <a:fillRef idx="1">
-            <a:schemeClr val="accent1"/>
-          </a:fillRef>
-          <a:effectRef idx="0">
-            <a:schemeClr val="accent1"/>
-          </a:effectRef>
-          <a:fontRef idx="minor">
-            <a:schemeClr val="lt1"/>
-          </a:fontRef>
-        </p:style>
+        <p:spPr/>
         <p:txBody>
-          <a:bodyPr lIns="731520" tIns="72000" rIns="108000" bIns="72000" rtlCol="0" anchor="ctr"/>
+          <a:bodyPr/>
           <a:lstStyle/>
           <a:p>
-            <a:endParaRPr lang="nl-NL" sz="1200" b="1" noProof="0" dirty="0">
-              <a:solidFill>
-                <a:schemeClr val="accent1"/>
-              </a:solidFill>
-            </a:endParaRPr>
+            <a:r>
+              <a:rPr lang="en-US" dirty="0"/>
+              <a:t>Generated with Sigrid</a:t>
+            </a:r>
+          </a:p>
+          <a:p>
+            <a:r>
+              <a:rPr lang="en-US" dirty="0"/>
+              <a:t>for CUSTOMER_NAME</a:t>
+            </a:r>
           </a:p>
         </p:txBody>
       </p:sp>
@@ -33395,39 +31441,6 @@
             <a:r>
               <a:rPr lang="en-US" sz="800" dirty="0"/>
               <a:t>★</a:t>
-            </a:r>
-          </a:p>
-        </p:txBody>
-      </p:sp>
-      <p:sp>
-        <p:nvSpPr>
-          <p:cNvPr id="2004" name="Footer Placeholder 2004"/>
-          <p:cNvSpPr>
-            <a:spLocks noGrp="1"/>
-          </p:cNvSpPr>
-          <p:nvPr>
-            <p:ph type="ftr" sz="quarter" idx="3"/>
-          </p:nvPr>
-        </p:nvSpPr>
-        <p:spPr>
-          <a:xfrm>
-            <a:off x="192088" y="6392596"/>
-            <a:ext cx="1763922" cy="370422"/>
-          </a:xfrm>
-        </p:spPr>
-        <p:txBody>
-          <a:bodyPr/>
-          <a:lstStyle/>
-          <a:p>
-            <a:r>
-              <a:rPr lang="en-US" dirty="0"/>
-              <a:t>Generated with Sigrid</a:t>
-            </a:r>
-          </a:p>
-          <a:p>
-            <a:r>
-              <a:rPr lang="en-US" dirty="0"/>
-              <a:t>for CUSTOMER_NAME</a:t>
             </a:r>
           </a:p>
         </p:txBody>
@@ -33585,8 +31598,8 @@
         </p:nvSpPr>
         <p:spPr>
           <a:xfrm>
-            <a:off x="381600" y="129568"/>
-            <a:ext cx="1410176" cy="228209"/>
+            <a:off x="381600" y="129600"/>
+            <a:ext cx="1410176" cy="228145"/>
           </a:xfrm>
         </p:spPr>
         <p:txBody>
@@ -33596,9 +31609,10 @@
           <a:lstStyle/>
           <a:p>
             <a:r>
-              <a:rPr lang="en-US" dirty="0"/>
+              <a:rPr lang="en-US"/>
               <a:t>Maintainability</a:t>
             </a:r>
+            <a:endParaRPr lang="en-US" dirty="0"/>
           </a:p>
         </p:txBody>
       </p:sp>
@@ -33622,6 +31636,34 @@
             <a:r>
               <a:rPr lang="en-US" dirty="0"/>
               <a:t>Overview of Duplication metric for portfolio CUSTOMER_NAME</a:t>
+            </a:r>
+          </a:p>
+        </p:txBody>
+      </p:sp>
+      <p:sp>
+        <p:nvSpPr>
+          <p:cNvPr id="1004" name="Footer Placeholder 1004"/>
+          <p:cNvSpPr>
+            <a:spLocks noGrp="1"/>
+          </p:cNvSpPr>
+          <p:nvPr>
+            <p:ph type="ftr" sz="quarter" idx="3"/>
+          </p:nvPr>
+        </p:nvSpPr>
+        <p:spPr/>
+        <p:txBody>
+          <a:bodyPr/>
+          <a:lstStyle/>
+          <a:p>
+            <a:r>
+              <a:rPr lang="en-US" dirty="0"/>
+              <a:t>Generated with Sigrid</a:t>
+            </a:r>
+          </a:p>
+          <a:p>
+            <a:r>
+              <a:rPr lang="en-US" dirty="0"/>
+              <a:t>for CUSTOMER_NAME</a:t>
             </a:r>
           </a:p>
         </p:txBody>
@@ -34212,39 +32254,6 @@
       </p:grpSp>
       <p:sp>
         <p:nvSpPr>
-          <p:cNvPr id="1004" name="Footer Placeholder 1004"/>
-          <p:cNvSpPr>
-            <a:spLocks noGrp="1"/>
-          </p:cNvSpPr>
-          <p:nvPr>
-            <p:ph type="ftr" sz="quarter" idx="3"/>
-          </p:nvPr>
-        </p:nvSpPr>
-        <p:spPr>
-          <a:xfrm>
-            <a:off x="192088" y="6392596"/>
-            <a:ext cx="1763922" cy="370422"/>
-          </a:xfrm>
-        </p:spPr>
-        <p:txBody>
-          <a:bodyPr/>
-          <a:lstStyle/>
-          <a:p>
-            <a:r>
-              <a:rPr lang="en-US" dirty="0"/>
-              <a:t>Generated with Sigrid</a:t>
-            </a:r>
-          </a:p>
-          <a:p>
-            <a:r>
-              <a:rPr lang="en-US" dirty="0"/>
-              <a:t>for CUSTOMER_NAME</a:t>
-            </a:r>
-          </a:p>
-        </p:txBody>
-      </p:sp>
-      <p:sp>
-        <p:nvSpPr>
           <p:cNvPr id="1071" name="TextBox 1071"/>
           <p:cNvSpPr txBox="1"/>
           <p:nvPr/>
@@ -34460,8 +32469,8 @@
         </p:nvSpPr>
         <p:spPr>
           <a:xfrm>
-            <a:off x="381600" y="129568"/>
-            <a:ext cx="1157222" cy="228209"/>
+            <a:off x="381600" y="129599"/>
+            <a:ext cx="1156940" cy="228145"/>
           </a:xfrm>
         </p:spPr>
         <p:txBody>
@@ -34474,25 +32483,6 @@
               <a:rPr lang="en-US" dirty="0"/>
               <a:t>Architecture</a:t>
             </a:r>
-          </a:p>
-        </p:txBody>
-      </p:sp>
-      <p:sp>
-        <p:nvSpPr>
-          <p:cNvPr id="3" name="Content Placeholder 2"/>
-          <p:cNvSpPr>
-            <a:spLocks noGrp="1"/>
-          </p:cNvSpPr>
-          <p:nvPr>
-            <p:ph sz="quarter" idx="13"/>
-          </p:nvPr>
-        </p:nvSpPr>
-        <p:spPr/>
-        <p:txBody>
-          <a:bodyPr/>
-          <a:lstStyle/>
-          <a:p>
-            <a:endParaRPr/>
           </a:p>
         </p:txBody>
       </p:sp>
@@ -34522,63 +32512,29 @@
       </p:sp>
       <p:sp>
         <p:nvSpPr>
-          <p:cNvPr id="7" name="Rectangle 6">
-            <a:extLst>
-              <a:ext uri="{FF2B5EF4-FFF2-40B4-BE49-F238E27FC236}">
-                <a16:creationId xmlns:a16="http://schemas.microsoft.com/office/drawing/2014/main" id="{4D956AE0-666A-B966-0B15-61A5E6C88F75}"/>
-              </a:ext>
-            </a:extLst>
-          </p:cNvPr>
-          <p:cNvSpPr/>
-          <p:nvPr/>
+          <p:cNvPr id="1004" name="Footer Placeholder 1004"/>
+          <p:cNvSpPr>
+            <a:spLocks noGrp="1"/>
+          </p:cNvSpPr>
+          <p:nvPr>
+            <p:ph type="ftr" sz="quarter" idx="3"/>
+          </p:nvPr>
         </p:nvSpPr>
-        <p:spPr>
-          <a:xfrm>
-            <a:off x="0" y="1390132"/>
-            <a:ext cx="12192000" cy="4927867"/>
-          </a:xfrm>
-          <a:prstGeom prst="rect">
-            <a:avLst/>
-          </a:prstGeom>
-          <a:solidFill>
-            <a:schemeClr val="bg1"/>
-          </a:solidFill>
-          <a:ln>
-            <a:noFill/>
-          </a:ln>
-          <a:effectLst>
-            <a:outerShdw blurRad="190500" dist="38100" dir="2700000" algn="tl" rotWithShape="0">
-              <a:prstClr val="black">
-                <a:alpha val="15000"/>
-              </a:prstClr>
-            </a:outerShdw>
-          </a:effectLst>
-        </p:spPr>
-        <p:style>
-          <a:lnRef idx="2">
-            <a:schemeClr val="accent1">
-              <a:shade val="50000"/>
-            </a:schemeClr>
-          </a:lnRef>
-          <a:fillRef idx="1">
-            <a:schemeClr val="accent1"/>
-          </a:fillRef>
-          <a:effectRef idx="0">
-            <a:schemeClr val="accent1"/>
-          </a:effectRef>
-          <a:fontRef idx="minor">
-            <a:schemeClr val="lt1"/>
-          </a:fontRef>
-        </p:style>
+        <p:spPr/>
         <p:txBody>
-          <a:bodyPr lIns="731520" tIns="72000" rIns="108000" bIns="72000" rtlCol="0" anchor="ctr"/>
+          <a:bodyPr/>
           <a:lstStyle/>
           <a:p>
-            <a:endParaRPr lang="nl-NL" sz="1200" b="1" noProof="0" dirty="0">
-              <a:solidFill>
-                <a:schemeClr val="accent1"/>
-              </a:solidFill>
-            </a:endParaRPr>
+            <a:r>
+              <a:rPr lang="en-US" dirty="0"/>
+              <a:t>Generated with Sigrid</a:t>
+            </a:r>
+          </a:p>
+          <a:p>
+            <a:r>
+              <a:rPr lang="en-US" dirty="0"/>
+              <a:t>for CUSTOMER_NAME</a:t>
+            </a:r>
           </a:p>
         </p:txBody>
       </p:sp>
@@ -35168,39 +33124,6 @@
       </p:grpSp>
       <p:sp>
         <p:nvSpPr>
-          <p:cNvPr id="1004" name="Footer Placeholder 1004"/>
-          <p:cNvSpPr>
-            <a:spLocks noGrp="1"/>
-          </p:cNvSpPr>
-          <p:nvPr>
-            <p:ph type="ftr" sz="quarter" idx="3"/>
-          </p:nvPr>
-        </p:nvSpPr>
-        <p:spPr>
-          <a:xfrm>
-            <a:off x="192088" y="6392596"/>
-            <a:ext cx="1763922" cy="370422"/>
-          </a:xfrm>
-        </p:spPr>
-        <p:txBody>
-          <a:bodyPr/>
-          <a:lstStyle/>
-          <a:p>
-            <a:r>
-              <a:rPr lang="en-US" dirty="0"/>
-              <a:t>Generated with Sigrid</a:t>
-            </a:r>
-          </a:p>
-          <a:p>
-            <a:r>
-              <a:rPr lang="en-US" dirty="0"/>
-              <a:t>for CUSTOMER_NAME</a:t>
-            </a:r>
-          </a:p>
-        </p:txBody>
-      </p:sp>
-      <p:sp>
-        <p:nvSpPr>
           <p:cNvPr id="1071" name="TextBox 1071"/>
           <p:cNvSpPr txBox="1"/>
           <p:nvPr/>
@@ -35416,8 +33339,8 @@
         </p:nvSpPr>
         <p:spPr>
           <a:xfrm>
-            <a:off x="381600" y="129568"/>
-            <a:ext cx="1157222" cy="228209"/>
+            <a:off x="381600" y="129599"/>
+            <a:ext cx="1156940" cy="228145"/>
           </a:xfrm>
         </p:spPr>
         <p:txBody>
@@ -35430,25 +33353,6 @@
               <a:rPr lang="en-US" dirty="0"/>
               <a:t>Architecture</a:t>
             </a:r>
-          </a:p>
-        </p:txBody>
-      </p:sp>
-      <p:sp>
-        <p:nvSpPr>
-          <p:cNvPr id="3" name="Content Placeholder 2"/>
-          <p:cNvSpPr>
-            <a:spLocks noGrp="1"/>
-          </p:cNvSpPr>
-          <p:nvPr>
-            <p:ph sz="quarter" idx="13"/>
-          </p:nvPr>
-        </p:nvSpPr>
-        <p:spPr/>
-        <p:txBody>
-          <a:bodyPr/>
-          <a:lstStyle/>
-          <a:p>
-            <a:endParaRPr/>
           </a:p>
         </p:txBody>
       </p:sp>
@@ -35478,63 +33382,29 @@
       </p:sp>
       <p:sp>
         <p:nvSpPr>
-          <p:cNvPr id="7" name="Rectangle 6">
-            <a:extLst>
-              <a:ext uri="{FF2B5EF4-FFF2-40B4-BE49-F238E27FC236}">
-                <a16:creationId xmlns:a16="http://schemas.microsoft.com/office/drawing/2014/main" id="{4D956AE0-666A-B966-0B15-61A5E6C88F75}"/>
-              </a:ext>
-            </a:extLst>
-          </p:cNvPr>
-          <p:cNvSpPr/>
-          <p:nvPr/>
+          <p:cNvPr id="2004" name="Footer Placeholder 2004"/>
+          <p:cNvSpPr>
+            <a:spLocks noGrp="1"/>
+          </p:cNvSpPr>
+          <p:nvPr>
+            <p:ph type="ftr" sz="quarter" idx="3"/>
+          </p:nvPr>
         </p:nvSpPr>
-        <p:spPr>
-          <a:xfrm>
-            <a:off x="0" y="1390132"/>
-            <a:ext cx="12192000" cy="4927867"/>
-          </a:xfrm>
-          <a:prstGeom prst="rect">
-            <a:avLst/>
-          </a:prstGeom>
-          <a:solidFill>
-            <a:schemeClr val="bg1"/>
-          </a:solidFill>
-          <a:ln>
-            <a:noFill/>
-          </a:ln>
-          <a:effectLst>
-            <a:outerShdw blurRad="190500" dist="38100" dir="2700000" algn="tl" rotWithShape="0">
-              <a:prstClr val="black">
-                <a:alpha val="15000"/>
-              </a:prstClr>
-            </a:outerShdw>
-          </a:effectLst>
-        </p:spPr>
-        <p:style>
-          <a:lnRef idx="2">
-            <a:schemeClr val="accent1">
-              <a:shade val="50000"/>
-            </a:schemeClr>
-          </a:lnRef>
-          <a:fillRef idx="1">
-            <a:schemeClr val="accent1"/>
-          </a:fillRef>
-          <a:effectRef idx="0">
-            <a:schemeClr val="accent1"/>
-          </a:effectRef>
-          <a:fontRef idx="minor">
-            <a:schemeClr val="lt1"/>
-          </a:fontRef>
-        </p:style>
+        <p:spPr/>
         <p:txBody>
-          <a:bodyPr lIns="731520" tIns="72000" rIns="108000" bIns="72000" rtlCol="0" anchor="ctr"/>
+          <a:bodyPr/>
           <a:lstStyle/>
           <a:p>
-            <a:endParaRPr lang="nl-NL" sz="1200" b="1" noProof="0" dirty="0">
-              <a:solidFill>
-                <a:schemeClr val="accent1"/>
-              </a:solidFill>
-            </a:endParaRPr>
+            <a:r>
+              <a:rPr lang="en-US" dirty="0"/>
+              <a:t>Generated with Sigrid</a:t>
+            </a:r>
+          </a:p>
+          <a:p>
+            <a:r>
+              <a:rPr lang="en-US" dirty="0"/>
+              <a:t>for CUSTOMER_NAME</a:t>
+            </a:r>
           </a:p>
         </p:txBody>
       </p:sp>
@@ -35933,39 +33803,6 @@
             <a:r>
               <a:rPr lang="en-US" sz="800" dirty="0"/>
               <a:t>★</a:t>
-            </a:r>
-          </a:p>
-        </p:txBody>
-      </p:sp>
-      <p:sp>
-        <p:nvSpPr>
-          <p:cNvPr id="2004" name="Footer Placeholder 2004"/>
-          <p:cNvSpPr>
-            <a:spLocks noGrp="1"/>
-          </p:cNvSpPr>
-          <p:nvPr>
-            <p:ph type="ftr" sz="quarter" idx="3"/>
-          </p:nvPr>
-        </p:nvSpPr>
-        <p:spPr>
-          <a:xfrm>
-            <a:off x="192088" y="6392596"/>
-            <a:ext cx="1763922" cy="370422"/>
-          </a:xfrm>
-        </p:spPr>
-        <p:txBody>
-          <a:bodyPr/>
-          <a:lstStyle/>
-          <a:p>
-            <a:r>
-              <a:rPr lang="en-US" dirty="0"/>
-              <a:t>Generated with Sigrid</a:t>
-            </a:r>
-          </a:p>
-          <a:p>
-            <a:r>
-              <a:rPr lang="en-US" dirty="0"/>
-              <a:t>for CUSTOMER_NAME</a:t>
             </a:r>
           </a:p>
         </p:txBody>
@@ -36123,8 +33960,8 @@
         </p:nvSpPr>
         <p:spPr>
           <a:xfrm>
-            <a:off x="381600" y="129568"/>
-            <a:ext cx="1157222" cy="228209"/>
+            <a:off x="381600" y="129599"/>
+            <a:ext cx="1156940" cy="228145"/>
           </a:xfrm>
         </p:spPr>
         <p:txBody>
@@ -36137,25 +33974,6 @@
               <a:rPr lang="en-US" dirty="0"/>
               <a:t>Architecture</a:t>
             </a:r>
-          </a:p>
-        </p:txBody>
-      </p:sp>
-      <p:sp>
-        <p:nvSpPr>
-          <p:cNvPr id="3" name="Content Placeholder 2"/>
-          <p:cNvSpPr>
-            <a:spLocks noGrp="1"/>
-          </p:cNvSpPr>
-          <p:nvPr>
-            <p:ph sz="quarter" idx="13"/>
-          </p:nvPr>
-        </p:nvSpPr>
-        <p:spPr/>
-        <p:txBody>
-          <a:bodyPr/>
-          <a:lstStyle/>
-          <a:p>
-            <a:endParaRPr/>
           </a:p>
         </p:txBody>
       </p:sp>
@@ -36185,63 +34003,29 @@
       </p:sp>
       <p:sp>
         <p:nvSpPr>
-          <p:cNvPr id="7" name="Rectangle 6">
-            <a:extLst>
-              <a:ext uri="{FF2B5EF4-FFF2-40B4-BE49-F238E27FC236}">
-                <a16:creationId xmlns:a16="http://schemas.microsoft.com/office/drawing/2014/main" id="{4D956AE0-666A-B966-0B15-61A5E6C88F75}"/>
-              </a:ext>
-            </a:extLst>
-          </p:cNvPr>
-          <p:cNvSpPr/>
-          <p:nvPr/>
+          <p:cNvPr id="1004" name="Footer Placeholder 1004"/>
+          <p:cNvSpPr>
+            <a:spLocks noGrp="1"/>
+          </p:cNvSpPr>
+          <p:nvPr>
+            <p:ph type="ftr" sz="quarter" idx="3"/>
+          </p:nvPr>
         </p:nvSpPr>
-        <p:spPr>
-          <a:xfrm>
-            <a:off x="0" y="1390132"/>
-            <a:ext cx="12192000" cy="4927867"/>
-          </a:xfrm>
-          <a:prstGeom prst="rect">
-            <a:avLst/>
-          </a:prstGeom>
-          <a:solidFill>
-            <a:schemeClr val="bg1"/>
-          </a:solidFill>
-          <a:ln>
-            <a:noFill/>
-          </a:ln>
-          <a:effectLst>
-            <a:outerShdw blurRad="190500" dist="38100" dir="2700000" algn="tl" rotWithShape="0">
-              <a:prstClr val="black">
-                <a:alpha val="15000"/>
-              </a:prstClr>
-            </a:outerShdw>
-          </a:effectLst>
-        </p:spPr>
-        <p:style>
-          <a:lnRef idx="2">
-            <a:schemeClr val="accent1">
-              <a:shade val="50000"/>
-            </a:schemeClr>
-          </a:lnRef>
-          <a:fillRef idx="1">
-            <a:schemeClr val="accent1"/>
-          </a:fillRef>
-          <a:effectRef idx="0">
-            <a:schemeClr val="accent1"/>
-          </a:effectRef>
-          <a:fontRef idx="minor">
-            <a:schemeClr val="lt1"/>
-          </a:fontRef>
-        </p:style>
+        <p:spPr/>
         <p:txBody>
-          <a:bodyPr lIns="731520" tIns="72000" rIns="108000" bIns="72000" rtlCol="0" anchor="ctr"/>
+          <a:bodyPr/>
           <a:lstStyle/>
           <a:p>
-            <a:endParaRPr lang="nl-NL" sz="1200" b="1" noProof="0" dirty="0">
-              <a:solidFill>
-                <a:schemeClr val="accent1"/>
-              </a:solidFill>
-            </a:endParaRPr>
+            <a:r>
+              <a:rPr lang="en-US" dirty="0"/>
+              <a:t>Generated with Sigrid</a:t>
+            </a:r>
+          </a:p>
+          <a:p>
+            <a:r>
+              <a:rPr lang="en-US" dirty="0"/>
+              <a:t>for CUSTOMER_NAME</a:t>
+            </a:r>
           </a:p>
         </p:txBody>
       </p:sp>
@@ -36831,39 +34615,6 @@
       </p:grpSp>
       <p:sp>
         <p:nvSpPr>
-          <p:cNvPr id="1004" name="Footer Placeholder 1004"/>
-          <p:cNvSpPr>
-            <a:spLocks noGrp="1"/>
-          </p:cNvSpPr>
-          <p:nvPr>
-            <p:ph type="ftr" sz="quarter" idx="3"/>
-          </p:nvPr>
-        </p:nvSpPr>
-        <p:spPr>
-          <a:xfrm>
-            <a:off x="192088" y="6392596"/>
-            <a:ext cx="1763922" cy="370422"/>
-          </a:xfrm>
-        </p:spPr>
-        <p:txBody>
-          <a:bodyPr/>
-          <a:lstStyle/>
-          <a:p>
-            <a:r>
-              <a:rPr lang="en-US" dirty="0"/>
-              <a:t>Generated with Sigrid</a:t>
-            </a:r>
-          </a:p>
-          <a:p>
-            <a:r>
-              <a:rPr lang="en-US" dirty="0"/>
-              <a:t>for CUSTOMER_NAME</a:t>
-            </a:r>
-          </a:p>
-        </p:txBody>
-      </p:sp>
-      <p:sp>
-        <p:nvSpPr>
           <p:cNvPr id="1071" name="TextBox 1071"/>
           <p:cNvSpPr txBox="1"/>
           <p:nvPr/>
@@ -37079,8 +34830,8 @@
         </p:nvSpPr>
         <p:spPr>
           <a:xfrm>
-            <a:off x="381600" y="129568"/>
-            <a:ext cx="1157222" cy="228209"/>
+            <a:off x="381600" y="129599"/>
+            <a:ext cx="1156940" cy="228145"/>
           </a:xfrm>
         </p:spPr>
         <p:txBody>
@@ -37093,25 +34844,6 @@
               <a:rPr lang="en-US" dirty="0"/>
               <a:t>Architecture</a:t>
             </a:r>
-          </a:p>
-        </p:txBody>
-      </p:sp>
-      <p:sp>
-        <p:nvSpPr>
-          <p:cNvPr id="3" name="Content Placeholder 2"/>
-          <p:cNvSpPr>
-            <a:spLocks noGrp="1"/>
-          </p:cNvSpPr>
-          <p:nvPr>
-            <p:ph sz="quarter" idx="13"/>
-          </p:nvPr>
-        </p:nvSpPr>
-        <p:spPr/>
-        <p:txBody>
-          <a:bodyPr/>
-          <a:lstStyle/>
-          <a:p>
-            <a:endParaRPr/>
           </a:p>
         </p:txBody>
       </p:sp>
@@ -37141,63 +34873,29 @@
       </p:sp>
       <p:sp>
         <p:nvSpPr>
-          <p:cNvPr id="7" name="Rectangle 6">
-            <a:extLst>
-              <a:ext uri="{FF2B5EF4-FFF2-40B4-BE49-F238E27FC236}">
-                <a16:creationId xmlns:a16="http://schemas.microsoft.com/office/drawing/2014/main" id="{4D956AE0-666A-B966-0B15-61A5E6C88F75}"/>
-              </a:ext>
-            </a:extLst>
-          </p:cNvPr>
-          <p:cNvSpPr/>
-          <p:nvPr/>
+          <p:cNvPr id="2004" name="Footer Placeholder 2004"/>
+          <p:cNvSpPr>
+            <a:spLocks noGrp="1"/>
+          </p:cNvSpPr>
+          <p:nvPr>
+            <p:ph type="ftr" sz="quarter" idx="3"/>
+          </p:nvPr>
         </p:nvSpPr>
-        <p:spPr>
-          <a:xfrm>
-            <a:off x="0" y="1390132"/>
-            <a:ext cx="12192000" cy="4927867"/>
-          </a:xfrm>
-          <a:prstGeom prst="rect">
-            <a:avLst/>
-          </a:prstGeom>
-          <a:solidFill>
-            <a:schemeClr val="bg1"/>
-          </a:solidFill>
-          <a:ln>
-            <a:noFill/>
-          </a:ln>
-          <a:effectLst>
-            <a:outerShdw blurRad="190500" dist="38100" dir="2700000" algn="tl" rotWithShape="0">
-              <a:prstClr val="black">
-                <a:alpha val="15000"/>
-              </a:prstClr>
-            </a:outerShdw>
-          </a:effectLst>
-        </p:spPr>
-        <p:style>
-          <a:lnRef idx="2">
-            <a:schemeClr val="accent1">
-              <a:shade val="50000"/>
-            </a:schemeClr>
-          </a:lnRef>
-          <a:fillRef idx="1">
-            <a:schemeClr val="accent1"/>
-          </a:fillRef>
-          <a:effectRef idx="0">
-            <a:schemeClr val="accent1"/>
-          </a:effectRef>
-          <a:fontRef idx="minor">
-            <a:schemeClr val="lt1"/>
-          </a:fontRef>
-        </p:style>
+        <p:spPr/>
         <p:txBody>
-          <a:bodyPr lIns="731520" tIns="72000" rIns="108000" bIns="72000" rtlCol="0" anchor="ctr"/>
+          <a:bodyPr/>
           <a:lstStyle/>
           <a:p>
-            <a:endParaRPr lang="nl-NL" sz="1200" b="1" noProof="0" dirty="0">
-              <a:solidFill>
-                <a:schemeClr val="accent1"/>
-              </a:solidFill>
-            </a:endParaRPr>
+            <a:r>
+              <a:rPr lang="en-US" dirty="0"/>
+              <a:t>Generated with Sigrid</a:t>
+            </a:r>
+          </a:p>
+          <a:p>
+            <a:r>
+              <a:rPr lang="en-US" dirty="0"/>
+              <a:t>for CUSTOMER_NAME</a:t>
+            </a:r>
           </a:p>
         </p:txBody>
       </p:sp>
@@ -37596,39 +35294,6 @@
             <a:r>
               <a:rPr lang="en-US" sz="800" dirty="0"/>
               <a:t>★</a:t>
-            </a:r>
-          </a:p>
-        </p:txBody>
-      </p:sp>
-      <p:sp>
-        <p:nvSpPr>
-          <p:cNvPr id="2004" name="Footer Placeholder 2004"/>
-          <p:cNvSpPr>
-            <a:spLocks noGrp="1"/>
-          </p:cNvSpPr>
-          <p:nvPr>
-            <p:ph type="ftr" sz="quarter" idx="3"/>
-          </p:nvPr>
-        </p:nvSpPr>
-        <p:spPr>
-          <a:xfrm>
-            <a:off x="192088" y="6392596"/>
-            <a:ext cx="1763922" cy="370422"/>
-          </a:xfrm>
-        </p:spPr>
-        <p:txBody>
-          <a:bodyPr/>
-          <a:lstStyle/>
-          <a:p>
-            <a:r>
-              <a:rPr lang="en-US" dirty="0"/>
-              <a:t>Generated with Sigrid</a:t>
-            </a:r>
-          </a:p>
-          <a:p>
-            <a:r>
-              <a:rPr lang="en-US" dirty="0"/>
-              <a:t>for CUSTOMER_NAME</a:t>
             </a:r>
           </a:p>
         </p:txBody>
@@ -37786,8 +35451,8 @@
         </p:nvSpPr>
         <p:spPr>
           <a:xfrm>
-            <a:off x="381600" y="129568"/>
-            <a:ext cx="1157222" cy="228209"/>
+            <a:off x="381600" y="129599"/>
+            <a:ext cx="1156940" cy="228145"/>
           </a:xfrm>
         </p:spPr>
         <p:txBody>
@@ -37800,25 +35465,6 @@
               <a:rPr lang="en-US" dirty="0"/>
               <a:t>Architecture</a:t>
             </a:r>
-          </a:p>
-        </p:txBody>
-      </p:sp>
-      <p:sp>
-        <p:nvSpPr>
-          <p:cNvPr id="3" name="Content Placeholder 2"/>
-          <p:cNvSpPr>
-            <a:spLocks noGrp="1"/>
-          </p:cNvSpPr>
-          <p:nvPr>
-            <p:ph sz="quarter" idx="13"/>
-          </p:nvPr>
-        </p:nvSpPr>
-        <p:spPr/>
-        <p:txBody>
-          <a:bodyPr/>
-          <a:lstStyle/>
-          <a:p>
-            <a:endParaRPr/>
           </a:p>
         </p:txBody>
       </p:sp>
@@ -37848,63 +35494,29 @@
       </p:sp>
       <p:sp>
         <p:nvSpPr>
-          <p:cNvPr id="7" name="Rectangle 6">
-            <a:extLst>
-              <a:ext uri="{FF2B5EF4-FFF2-40B4-BE49-F238E27FC236}">
-                <a16:creationId xmlns:a16="http://schemas.microsoft.com/office/drawing/2014/main" id="{4D956AE0-666A-B966-0B15-61A5E6C88F75}"/>
-              </a:ext>
-            </a:extLst>
-          </p:cNvPr>
-          <p:cNvSpPr/>
-          <p:nvPr/>
+          <p:cNvPr id="1004" name="Footer Placeholder 1004"/>
+          <p:cNvSpPr>
+            <a:spLocks noGrp="1"/>
+          </p:cNvSpPr>
+          <p:nvPr>
+            <p:ph type="ftr" sz="quarter" idx="3"/>
+          </p:nvPr>
         </p:nvSpPr>
-        <p:spPr>
-          <a:xfrm>
-            <a:off x="0" y="1390132"/>
-            <a:ext cx="12192000" cy="4927867"/>
-          </a:xfrm>
-          <a:prstGeom prst="rect">
-            <a:avLst/>
-          </a:prstGeom>
-          <a:solidFill>
-            <a:schemeClr val="bg1"/>
-          </a:solidFill>
-          <a:ln>
-            <a:noFill/>
-          </a:ln>
-          <a:effectLst>
-            <a:outerShdw blurRad="190500" dist="38100" dir="2700000" algn="tl" rotWithShape="0">
-              <a:prstClr val="black">
-                <a:alpha val="15000"/>
-              </a:prstClr>
-            </a:outerShdw>
-          </a:effectLst>
-        </p:spPr>
-        <p:style>
-          <a:lnRef idx="2">
-            <a:schemeClr val="accent1">
-              <a:shade val="50000"/>
-            </a:schemeClr>
-          </a:lnRef>
-          <a:fillRef idx="1">
-            <a:schemeClr val="accent1"/>
-          </a:fillRef>
-          <a:effectRef idx="0">
-            <a:schemeClr val="accent1"/>
-          </a:effectRef>
-          <a:fontRef idx="minor">
-            <a:schemeClr val="lt1"/>
-          </a:fontRef>
-        </p:style>
+        <p:spPr/>
         <p:txBody>
-          <a:bodyPr lIns="731520" tIns="72000" rIns="108000" bIns="72000" rtlCol="0" anchor="ctr"/>
+          <a:bodyPr/>
           <a:lstStyle/>
           <a:p>
-            <a:endParaRPr lang="nl-NL" sz="1200" b="1" noProof="0" dirty="0">
-              <a:solidFill>
-                <a:schemeClr val="accent1"/>
-              </a:solidFill>
-            </a:endParaRPr>
+            <a:r>
+              <a:rPr lang="en-US" dirty="0"/>
+              <a:t>Generated with Sigrid</a:t>
+            </a:r>
+          </a:p>
+          <a:p>
+            <a:r>
+              <a:rPr lang="en-US" dirty="0"/>
+              <a:t>for CUSTOMER_NAME</a:t>
+            </a:r>
           </a:p>
         </p:txBody>
       </p:sp>
@@ -38494,39 +36106,6 @@
       </p:grpSp>
       <p:sp>
         <p:nvSpPr>
-          <p:cNvPr id="1004" name="Footer Placeholder 1004"/>
-          <p:cNvSpPr>
-            <a:spLocks noGrp="1"/>
-          </p:cNvSpPr>
-          <p:nvPr>
-            <p:ph type="ftr" sz="quarter" idx="3"/>
-          </p:nvPr>
-        </p:nvSpPr>
-        <p:spPr>
-          <a:xfrm>
-            <a:off x="192088" y="6392596"/>
-            <a:ext cx="1763922" cy="370422"/>
-          </a:xfrm>
-        </p:spPr>
-        <p:txBody>
-          <a:bodyPr/>
-          <a:lstStyle/>
-          <a:p>
-            <a:r>
-              <a:rPr lang="en-US" dirty="0"/>
-              <a:t>Generated with Sigrid</a:t>
-            </a:r>
-          </a:p>
-          <a:p>
-            <a:r>
-              <a:rPr lang="en-US" dirty="0"/>
-              <a:t>for CUSTOMER_NAME</a:t>
-            </a:r>
-          </a:p>
-        </p:txBody>
-      </p:sp>
-      <p:sp>
-        <p:nvSpPr>
           <p:cNvPr id="1071" name="TextBox 1071"/>
           <p:cNvSpPr txBox="1"/>
           <p:nvPr/>
@@ -38742,8 +36321,8 @@
         </p:nvSpPr>
         <p:spPr>
           <a:xfrm>
-            <a:off x="381600" y="129568"/>
-            <a:ext cx="1157222" cy="228209"/>
+            <a:off x="381600" y="129599"/>
+            <a:ext cx="1156940" cy="228145"/>
           </a:xfrm>
         </p:spPr>
         <p:txBody>
@@ -38756,25 +36335,6 @@
               <a:rPr lang="en-US" dirty="0"/>
               <a:t>Architecture</a:t>
             </a:r>
-          </a:p>
-        </p:txBody>
-      </p:sp>
-      <p:sp>
-        <p:nvSpPr>
-          <p:cNvPr id="3" name="Content Placeholder 2"/>
-          <p:cNvSpPr>
-            <a:spLocks noGrp="1"/>
-          </p:cNvSpPr>
-          <p:nvPr>
-            <p:ph sz="quarter" idx="13"/>
-          </p:nvPr>
-        </p:nvSpPr>
-        <p:spPr/>
-        <p:txBody>
-          <a:bodyPr/>
-          <a:lstStyle/>
-          <a:p>
-            <a:endParaRPr/>
           </a:p>
         </p:txBody>
       </p:sp>
@@ -38804,63 +36364,29 @@
       </p:sp>
       <p:sp>
         <p:nvSpPr>
-          <p:cNvPr id="7" name="Rectangle 6">
-            <a:extLst>
-              <a:ext uri="{FF2B5EF4-FFF2-40B4-BE49-F238E27FC236}">
-                <a16:creationId xmlns:a16="http://schemas.microsoft.com/office/drawing/2014/main" id="{4D956AE0-666A-B966-0B15-61A5E6C88F75}"/>
-              </a:ext>
-            </a:extLst>
-          </p:cNvPr>
-          <p:cNvSpPr/>
-          <p:nvPr/>
+          <p:cNvPr id="2004" name="Footer Placeholder 2004"/>
+          <p:cNvSpPr>
+            <a:spLocks noGrp="1"/>
+          </p:cNvSpPr>
+          <p:nvPr>
+            <p:ph type="ftr" sz="quarter" idx="3"/>
+          </p:nvPr>
         </p:nvSpPr>
-        <p:spPr>
-          <a:xfrm>
-            <a:off x="0" y="1390132"/>
-            <a:ext cx="12192000" cy="4927867"/>
-          </a:xfrm>
-          <a:prstGeom prst="rect">
-            <a:avLst/>
-          </a:prstGeom>
-          <a:solidFill>
-            <a:schemeClr val="bg1"/>
-          </a:solidFill>
-          <a:ln>
-            <a:noFill/>
-          </a:ln>
-          <a:effectLst>
-            <a:outerShdw blurRad="190500" dist="38100" dir="2700000" algn="tl" rotWithShape="0">
-              <a:prstClr val="black">
-                <a:alpha val="15000"/>
-              </a:prstClr>
-            </a:outerShdw>
-          </a:effectLst>
-        </p:spPr>
-        <p:style>
-          <a:lnRef idx="2">
-            <a:schemeClr val="accent1">
-              <a:shade val="50000"/>
-            </a:schemeClr>
-          </a:lnRef>
-          <a:fillRef idx="1">
-            <a:schemeClr val="accent1"/>
-          </a:fillRef>
-          <a:effectRef idx="0">
-            <a:schemeClr val="accent1"/>
-          </a:effectRef>
-          <a:fontRef idx="minor">
-            <a:schemeClr val="lt1"/>
-          </a:fontRef>
-        </p:style>
+        <p:spPr/>
         <p:txBody>
-          <a:bodyPr lIns="731520" tIns="72000" rIns="108000" bIns="72000" rtlCol="0" anchor="ctr"/>
+          <a:bodyPr/>
           <a:lstStyle/>
           <a:p>
-            <a:endParaRPr lang="nl-NL" sz="1200" b="1" noProof="0" dirty="0">
-              <a:solidFill>
-                <a:schemeClr val="accent1"/>
-              </a:solidFill>
-            </a:endParaRPr>
+            <a:r>
+              <a:rPr lang="en-US" dirty="0"/>
+              <a:t>Generated with Sigrid</a:t>
+            </a:r>
+          </a:p>
+          <a:p>
+            <a:r>
+              <a:rPr lang="en-US" dirty="0"/>
+              <a:t>for CUSTOMER_NAME</a:t>
+            </a:r>
           </a:p>
         </p:txBody>
       </p:sp>
@@ -39259,39 +36785,6 @@
             <a:r>
               <a:rPr lang="en-US" sz="800" dirty="0"/>
               <a:t>★</a:t>
-            </a:r>
-          </a:p>
-        </p:txBody>
-      </p:sp>
-      <p:sp>
-        <p:nvSpPr>
-          <p:cNvPr id="2004" name="Footer Placeholder 2004"/>
-          <p:cNvSpPr>
-            <a:spLocks noGrp="1"/>
-          </p:cNvSpPr>
-          <p:nvPr>
-            <p:ph type="ftr" sz="quarter" idx="3"/>
-          </p:nvPr>
-        </p:nvSpPr>
-        <p:spPr>
-          <a:xfrm>
-            <a:off x="192088" y="6392596"/>
-            <a:ext cx="1763922" cy="370422"/>
-          </a:xfrm>
-        </p:spPr>
-        <p:txBody>
-          <a:bodyPr/>
-          <a:lstStyle/>
-          <a:p>
-            <a:r>
-              <a:rPr lang="en-US" dirty="0"/>
-              <a:t>Generated with Sigrid</a:t>
-            </a:r>
-          </a:p>
-          <a:p>
-            <a:r>
-              <a:rPr lang="en-US" dirty="0"/>
-              <a:t>for CUSTOMER_NAME</a:t>
             </a:r>
           </a:p>
         </p:txBody>
@@ -39449,8 +36942,8 @@
         </p:nvSpPr>
         <p:spPr>
           <a:xfrm>
-            <a:off x="381600" y="129568"/>
-            <a:ext cx="1157222" cy="228209"/>
+            <a:off x="381600" y="129599"/>
+            <a:ext cx="1156940" cy="228145"/>
           </a:xfrm>
         </p:spPr>
         <p:txBody>
@@ -39463,25 +36956,6 @@
               <a:rPr lang="en-US" dirty="0"/>
               <a:t>Architecture</a:t>
             </a:r>
-          </a:p>
-        </p:txBody>
-      </p:sp>
-      <p:sp>
-        <p:nvSpPr>
-          <p:cNvPr id="3" name="Content Placeholder 2"/>
-          <p:cNvSpPr>
-            <a:spLocks noGrp="1"/>
-          </p:cNvSpPr>
-          <p:nvPr>
-            <p:ph sz="quarter" idx="13"/>
-          </p:nvPr>
-        </p:nvSpPr>
-        <p:spPr/>
-        <p:txBody>
-          <a:bodyPr/>
-          <a:lstStyle/>
-          <a:p>
-            <a:endParaRPr/>
           </a:p>
         </p:txBody>
       </p:sp>
@@ -39511,63 +36985,29 @@
       </p:sp>
       <p:sp>
         <p:nvSpPr>
-          <p:cNvPr id="7" name="Rectangle 6">
-            <a:extLst>
-              <a:ext uri="{FF2B5EF4-FFF2-40B4-BE49-F238E27FC236}">
-                <a16:creationId xmlns:a16="http://schemas.microsoft.com/office/drawing/2014/main" id="{4D956AE0-666A-B966-0B15-61A5E6C88F75}"/>
-              </a:ext>
-            </a:extLst>
-          </p:cNvPr>
-          <p:cNvSpPr/>
-          <p:nvPr/>
+          <p:cNvPr id="1004" name="Footer Placeholder 1004"/>
+          <p:cNvSpPr>
+            <a:spLocks noGrp="1"/>
+          </p:cNvSpPr>
+          <p:nvPr>
+            <p:ph type="ftr" sz="quarter" idx="3"/>
+          </p:nvPr>
         </p:nvSpPr>
-        <p:spPr>
-          <a:xfrm>
-            <a:off x="0" y="1390132"/>
-            <a:ext cx="12192000" cy="4927867"/>
-          </a:xfrm>
-          <a:prstGeom prst="rect">
-            <a:avLst/>
-          </a:prstGeom>
-          <a:solidFill>
-            <a:schemeClr val="bg1"/>
-          </a:solidFill>
-          <a:ln>
-            <a:noFill/>
-          </a:ln>
-          <a:effectLst>
-            <a:outerShdw blurRad="190500" dist="38100" dir="2700000" algn="tl" rotWithShape="0">
-              <a:prstClr val="black">
-                <a:alpha val="15000"/>
-              </a:prstClr>
-            </a:outerShdw>
-          </a:effectLst>
-        </p:spPr>
-        <p:style>
-          <a:lnRef idx="2">
-            <a:schemeClr val="accent1">
-              <a:shade val="50000"/>
-            </a:schemeClr>
-          </a:lnRef>
-          <a:fillRef idx="1">
-            <a:schemeClr val="accent1"/>
-          </a:fillRef>
-          <a:effectRef idx="0">
-            <a:schemeClr val="accent1"/>
-          </a:effectRef>
-          <a:fontRef idx="minor">
-            <a:schemeClr val="lt1"/>
-          </a:fontRef>
-        </p:style>
+        <p:spPr/>
         <p:txBody>
-          <a:bodyPr lIns="731520" tIns="72000" rIns="108000" bIns="72000" rtlCol="0" anchor="ctr"/>
+          <a:bodyPr/>
           <a:lstStyle/>
           <a:p>
-            <a:endParaRPr lang="nl-NL" sz="1200" b="1" noProof="0" dirty="0">
-              <a:solidFill>
-                <a:schemeClr val="accent1"/>
-              </a:solidFill>
-            </a:endParaRPr>
+            <a:r>
+              <a:rPr lang="en-US" dirty="0"/>
+              <a:t>Generated with Sigrid</a:t>
+            </a:r>
+          </a:p>
+          <a:p>
+            <a:r>
+              <a:rPr lang="en-US" dirty="0"/>
+              <a:t>for CUSTOMER_NAME</a:t>
+            </a:r>
           </a:p>
         </p:txBody>
       </p:sp>
@@ -40157,39 +37597,6 @@
       </p:grpSp>
       <p:sp>
         <p:nvSpPr>
-          <p:cNvPr id="1004" name="Footer Placeholder 1004"/>
-          <p:cNvSpPr>
-            <a:spLocks noGrp="1"/>
-          </p:cNvSpPr>
-          <p:nvPr>
-            <p:ph type="ftr" sz="quarter" idx="3"/>
-          </p:nvPr>
-        </p:nvSpPr>
-        <p:spPr>
-          <a:xfrm>
-            <a:off x="192088" y="6392596"/>
-            <a:ext cx="1763922" cy="370422"/>
-          </a:xfrm>
-        </p:spPr>
-        <p:txBody>
-          <a:bodyPr/>
-          <a:lstStyle/>
-          <a:p>
-            <a:r>
-              <a:rPr lang="en-US" dirty="0"/>
-              <a:t>Generated with Sigrid</a:t>
-            </a:r>
-          </a:p>
-          <a:p>
-            <a:r>
-              <a:rPr lang="en-US" dirty="0"/>
-              <a:t>for CUSTOMER_NAME</a:t>
-            </a:r>
-          </a:p>
-        </p:txBody>
-      </p:sp>
-      <p:sp>
-        <p:nvSpPr>
           <p:cNvPr id="1071" name="TextBox 1071"/>
           <p:cNvSpPr txBox="1"/>
           <p:nvPr/>
@@ -40405,8 +37812,8 @@
         </p:nvSpPr>
         <p:spPr>
           <a:xfrm>
-            <a:off x="381600" y="129568"/>
-            <a:ext cx="1157222" cy="228209"/>
+            <a:off x="381600" y="129599"/>
+            <a:ext cx="1156940" cy="228145"/>
           </a:xfrm>
         </p:spPr>
         <p:txBody>
@@ -40419,25 +37826,6 @@
               <a:rPr lang="en-US" dirty="0"/>
               <a:t>Architecture</a:t>
             </a:r>
-          </a:p>
-        </p:txBody>
-      </p:sp>
-      <p:sp>
-        <p:nvSpPr>
-          <p:cNvPr id="3" name="Content Placeholder 2"/>
-          <p:cNvSpPr>
-            <a:spLocks noGrp="1"/>
-          </p:cNvSpPr>
-          <p:nvPr>
-            <p:ph sz="quarter" idx="13"/>
-          </p:nvPr>
-        </p:nvSpPr>
-        <p:spPr/>
-        <p:txBody>
-          <a:bodyPr/>
-          <a:lstStyle/>
-          <a:p>
-            <a:endParaRPr/>
           </a:p>
         </p:txBody>
       </p:sp>
@@ -40467,63 +37855,29 @@
       </p:sp>
       <p:sp>
         <p:nvSpPr>
-          <p:cNvPr id="7" name="Rectangle 6">
-            <a:extLst>
-              <a:ext uri="{FF2B5EF4-FFF2-40B4-BE49-F238E27FC236}">
-                <a16:creationId xmlns:a16="http://schemas.microsoft.com/office/drawing/2014/main" id="{4D956AE0-666A-B966-0B15-61A5E6C88F75}"/>
-              </a:ext>
-            </a:extLst>
-          </p:cNvPr>
-          <p:cNvSpPr/>
-          <p:nvPr/>
+          <p:cNvPr id="2004" name="Footer Placeholder 2004"/>
+          <p:cNvSpPr>
+            <a:spLocks noGrp="1"/>
+          </p:cNvSpPr>
+          <p:nvPr>
+            <p:ph type="ftr" sz="quarter" idx="3"/>
+          </p:nvPr>
         </p:nvSpPr>
-        <p:spPr>
-          <a:xfrm>
-            <a:off x="0" y="1390132"/>
-            <a:ext cx="12192000" cy="4927867"/>
-          </a:xfrm>
-          <a:prstGeom prst="rect">
-            <a:avLst/>
-          </a:prstGeom>
-          <a:solidFill>
-            <a:schemeClr val="bg1"/>
-          </a:solidFill>
-          <a:ln>
-            <a:noFill/>
-          </a:ln>
-          <a:effectLst>
-            <a:outerShdw blurRad="190500" dist="38100" dir="2700000" algn="tl" rotWithShape="0">
-              <a:prstClr val="black">
-                <a:alpha val="15000"/>
-              </a:prstClr>
-            </a:outerShdw>
-          </a:effectLst>
-        </p:spPr>
-        <p:style>
-          <a:lnRef idx="2">
-            <a:schemeClr val="accent1">
-              <a:shade val="50000"/>
-            </a:schemeClr>
-          </a:lnRef>
-          <a:fillRef idx="1">
-            <a:schemeClr val="accent1"/>
-          </a:fillRef>
-          <a:effectRef idx="0">
-            <a:schemeClr val="accent1"/>
-          </a:effectRef>
-          <a:fontRef idx="minor">
-            <a:schemeClr val="lt1"/>
-          </a:fontRef>
-        </p:style>
+        <p:spPr/>
         <p:txBody>
-          <a:bodyPr lIns="731520" tIns="72000" rIns="108000" bIns="72000" rtlCol="0" anchor="ctr"/>
+          <a:bodyPr/>
           <a:lstStyle/>
           <a:p>
-            <a:endParaRPr lang="nl-NL" sz="1200" b="1" noProof="0" dirty="0">
-              <a:solidFill>
-                <a:schemeClr val="accent1"/>
-              </a:solidFill>
-            </a:endParaRPr>
+            <a:r>
+              <a:rPr lang="en-US" dirty="0"/>
+              <a:t>Generated with Sigrid</a:t>
+            </a:r>
+          </a:p>
+          <a:p>
+            <a:r>
+              <a:rPr lang="en-US" dirty="0"/>
+              <a:t>for CUSTOMER_NAME</a:t>
+            </a:r>
           </a:p>
         </p:txBody>
       </p:sp>
@@ -40922,39 +38276,6 @@
             <a:r>
               <a:rPr lang="en-US" sz="800" dirty="0"/>
               <a:t>★</a:t>
-            </a:r>
-          </a:p>
-        </p:txBody>
-      </p:sp>
-      <p:sp>
-        <p:nvSpPr>
-          <p:cNvPr id="2004" name="Footer Placeholder 2004"/>
-          <p:cNvSpPr>
-            <a:spLocks noGrp="1"/>
-          </p:cNvSpPr>
-          <p:nvPr>
-            <p:ph type="ftr" sz="quarter" idx="3"/>
-          </p:nvPr>
-        </p:nvSpPr>
-        <p:spPr>
-          <a:xfrm>
-            <a:off x="192088" y="6392596"/>
-            <a:ext cx="1763922" cy="370422"/>
-          </a:xfrm>
-        </p:spPr>
-        <p:txBody>
-          <a:bodyPr/>
-          <a:lstStyle/>
-          <a:p>
-            <a:r>
-              <a:rPr lang="en-US" dirty="0"/>
-              <a:t>Generated with Sigrid</a:t>
-            </a:r>
-          </a:p>
-          <a:p>
-            <a:r>
-              <a:rPr lang="en-US" dirty="0"/>
-              <a:t>for CUSTOMER_NAME</a:t>
             </a:r>
           </a:p>
         </p:txBody>
@@ -41380,8 +38701,8 @@
         </p:nvSpPr>
         <p:spPr>
           <a:xfrm>
-            <a:off x="381600" y="129568"/>
-            <a:ext cx="1663129" cy="228209"/>
+            <a:off x="381600" y="129599"/>
+            <a:ext cx="1663411" cy="228145"/>
           </a:xfrm>
         </p:spPr>
         <p:txBody>
@@ -41394,25 +38715,6 @@
               <a:rPr lang="en-US" dirty="0"/>
               <a:t>Open Source Health</a:t>
             </a:r>
-          </a:p>
-        </p:txBody>
-      </p:sp>
-      <p:sp>
-        <p:nvSpPr>
-          <p:cNvPr id="3" name="Content Placeholder 2"/>
-          <p:cNvSpPr>
-            <a:spLocks noGrp="1"/>
-          </p:cNvSpPr>
-          <p:nvPr>
-            <p:ph sz="quarter" idx="13"/>
-          </p:nvPr>
-        </p:nvSpPr>
-        <p:spPr/>
-        <p:txBody>
-          <a:bodyPr/>
-          <a:lstStyle/>
-          <a:p>
-            <a:endParaRPr/>
           </a:p>
         </p:txBody>
       </p:sp>
@@ -41442,63 +38744,29 @@
       </p:sp>
       <p:sp>
         <p:nvSpPr>
-          <p:cNvPr id="7" name="Rectangle 6">
-            <a:extLst>
-              <a:ext uri="{FF2B5EF4-FFF2-40B4-BE49-F238E27FC236}">
-                <a16:creationId xmlns:a16="http://schemas.microsoft.com/office/drawing/2014/main" id="{4D956AE0-666A-B966-0B15-61A5E6C88F75}"/>
-              </a:ext>
-            </a:extLst>
-          </p:cNvPr>
-          <p:cNvSpPr/>
-          <p:nvPr/>
+          <p:cNvPr id="1004" name="Footer Placeholder 1004"/>
+          <p:cNvSpPr>
+            <a:spLocks noGrp="1"/>
+          </p:cNvSpPr>
+          <p:nvPr>
+            <p:ph type="ftr" sz="quarter" idx="3"/>
+          </p:nvPr>
         </p:nvSpPr>
-        <p:spPr>
-          <a:xfrm>
-            <a:off x="0" y="1390132"/>
-            <a:ext cx="12192000" cy="4927867"/>
-          </a:xfrm>
-          <a:prstGeom prst="rect">
-            <a:avLst/>
-          </a:prstGeom>
-          <a:solidFill>
-            <a:schemeClr val="bg1"/>
-          </a:solidFill>
-          <a:ln>
-            <a:noFill/>
-          </a:ln>
-          <a:effectLst>
-            <a:outerShdw blurRad="190500" dist="38100" dir="2700000" algn="tl" rotWithShape="0">
-              <a:prstClr val="black">
-                <a:alpha val="15000"/>
-              </a:prstClr>
-            </a:outerShdw>
-          </a:effectLst>
-        </p:spPr>
-        <p:style>
-          <a:lnRef idx="2">
-            <a:schemeClr val="accent1">
-              <a:shade val="50000"/>
-            </a:schemeClr>
-          </a:lnRef>
-          <a:fillRef idx="1">
-            <a:schemeClr val="accent1"/>
-          </a:fillRef>
-          <a:effectRef idx="0">
-            <a:schemeClr val="accent1"/>
-          </a:effectRef>
-          <a:fontRef idx="minor">
-            <a:schemeClr val="lt1"/>
-          </a:fontRef>
-        </p:style>
+        <p:spPr/>
         <p:txBody>
-          <a:bodyPr lIns="731520" tIns="72000" rIns="108000" bIns="72000" rtlCol="0" anchor="ctr"/>
+          <a:bodyPr/>
           <a:lstStyle/>
           <a:p>
-            <a:endParaRPr lang="nl-NL" sz="1200" b="1" noProof="0" dirty="0">
-              <a:solidFill>
-                <a:schemeClr val="accent1"/>
-              </a:solidFill>
-            </a:endParaRPr>
+            <a:r>
+              <a:rPr lang="en-US" dirty="0"/>
+              <a:t>Generated with Sigrid</a:t>
+            </a:r>
+          </a:p>
+          <a:p>
+            <a:r>
+              <a:rPr lang="en-US" dirty="0"/>
+              <a:t>for CUSTOMER_NAME</a:t>
+            </a:r>
           </a:p>
         </p:txBody>
       </p:sp>
@@ -42088,39 +39356,6 @@
       </p:grpSp>
       <p:sp>
         <p:nvSpPr>
-          <p:cNvPr id="1004" name="Footer Placeholder 1004"/>
-          <p:cNvSpPr>
-            <a:spLocks noGrp="1"/>
-          </p:cNvSpPr>
-          <p:nvPr>
-            <p:ph type="ftr" sz="quarter" idx="3"/>
-          </p:nvPr>
-        </p:nvSpPr>
-        <p:spPr>
-          <a:xfrm>
-            <a:off x="192088" y="6392596"/>
-            <a:ext cx="1763922" cy="370422"/>
-          </a:xfrm>
-        </p:spPr>
-        <p:txBody>
-          <a:bodyPr/>
-          <a:lstStyle/>
-          <a:p>
-            <a:r>
-              <a:rPr lang="en-US" dirty="0"/>
-              <a:t>Generated with Sigrid</a:t>
-            </a:r>
-          </a:p>
-          <a:p>
-            <a:r>
-              <a:rPr lang="en-US" dirty="0"/>
-              <a:t>for CUSTOMER_NAME</a:t>
-            </a:r>
-          </a:p>
-        </p:txBody>
-      </p:sp>
-      <p:sp>
-        <p:nvSpPr>
           <p:cNvPr id="1071" name="TextBox 1071"/>
           <p:cNvSpPr txBox="1"/>
           <p:nvPr/>
@@ -42336,8 +39571,8 @@
         </p:nvSpPr>
         <p:spPr>
           <a:xfrm>
-            <a:off x="381600" y="129568"/>
-            <a:ext cx="1410176" cy="228209"/>
+            <a:off x="381600" y="129599"/>
+            <a:ext cx="1410176" cy="228145"/>
           </a:xfrm>
         </p:spPr>
         <p:txBody>
@@ -42350,25 +39585,6 @@
               <a:rPr lang="en-US" dirty="0"/>
               <a:t>Maintainability</a:t>
             </a:r>
-          </a:p>
-        </p:txBody>
-      </p:sp>
-      <p:sp>
-        <p:nvSpPr>
-          <p:cNvPr id="3" name="Content Placeholder 2"/>
-          <p:cNvSpPr>
-            <a:spLocks noGrp="1"/>
-          </p:cNvSpPr>
-          <p:nvPr>
-            <p:ph sz="quarter" idx="13"/>
-          </p:nvPr>
-        </p:nvSpPr>
-        <p:spPr/>
-        <p:txBody>
-          <a:bodyPr/>
-          <a:lstStyle/>
-          <a:p>
-            <a:endParaRPr/>
           </a:p>
         </p:txBody>
       </p:sp>
@@ -42398,63 +39614,29 @@
       </p:sp>
       <p:sp>
         <p:nvSpPr>
-          <p:cNvPr id="7" name="Rectangle 6">
-            <a:extLst>
-              <a:ext uri="{FF2B5EF4-FFF2-40B4-BE49-F238E27FC236}">
-                <a16:creationId xmlns:a16="http://schemas.microsoft.com/office/drawing/2014/main" id="{4D956AE0-666A-B966-0B15-61A5E6C88F75}"/>
-              </a:ext>
-            </a:extLst>
-          </p:cNvPr>
-          <p:cNvSpPr/>
-          <p:nvPr/>
+          <p:cNvPr id="2004" name="Footer Placeholder 2004"/>
+          <p:cNvSpPr>
+            <a:spLocks noGrp="1"/>
+          </p:cNvSpPr>
+          <p:nvPr>
+            <p:ph type="ftr" sz="quarter" idx="3"/>
+          </p:nvPr>
         </p:nvSpPr>
-        <p:spPr>
-          <a:xfrm>
-            <a:off x="0" y="1390132"/>
-            <a:ext cx="12192000" cy="4927867"/>
-          </a:xfrm>
-          <a:prstGeom prst="rect">
-            <a:avLst/>
-          </a:prstGeom>
-          <a:solidFill>
-            <a:schemeClr val="bg1"/>
-          </a:solidFill>
-          <a:ln>
-            <a:noFill/>
-          </a:ln>
-          <a:effectLst>
-            <a:outerShdw blurRad="190500" dist="38100" dir="2700000" algn="tl" rotWithShape="0">
-              <a:prstClr val="black">
-                <a:alpha val="15000"/>
-              </a:prstClr>
-            </a:outerShdw>
-          </a:effectLst>
-        </p:spPr>
-        <p:style>
-          <a:lnRef idx="2">
-            <a:schemeClr val="accent1">
-              <a:shade val="50000"/>
-            </a:schemeClr>
-          </a:lnRef>
-          <a:fillRef idx="1">
-            <a:schemeClr val="accent1"/>
-          </a:fillRef>
-          <a:effectRef idx="0">
-            <a:schemeClr val="accent1"/>
-          </a:effectRef>
-          <a:fontRef idx="minor">
-            <a:schemeClr val="lt1"/>
-          </a:fontRef>
-        </p:style>
+        <p:spPr/>
         <p:txBody>
-          <a:bodyPr lIns="731520" tIns="72000" rIns="108000" bIns="72000" rtlCol="0" anchor="ctr"/>
+          <a:bodyPr/>
           <a:lstStyle/>
           <a:p>
-            <a:endParaRPr lang="nl-NL" sz="1200" b="1" noProof="0" dirty="0">
-              <a:solidFill>
-                <a:schemeClr val="accent1"/>
-              </a:solidFill>
-            </a:endParaRPr>
+            <a:r>
+              <a:rPr lang="en-US" dirty="0"/>
+              <a:t>Generated with Sigrid</a:t>
+            </a:r>
+          </a:p>
+          <a:p>
+            <a:r>
+              <a:rPr lang="en-US" dirty="0"/>
+              <a:t>for CUSTOMER_NAME</a:t>
+            </a:r>
           </a:p>
         </p:txBody>
       </p:sp>
@@ -42853,39 +40035,6 @@
             <a:r>
               <a:rPr lang="en-US" sz="800" dirty="0"/>
               <a:t>★</a:t>
-            </a:r>
-          </a:p>
-        </p:txBody>
-      </p:sp>
-      <p:sp>
-        <p:nvSpPr>
-          <p:cNvPr id="2004" name="Footer Placeholder 2004"/>
-          <p:cNvSpPr>
-            <a:spLocks noGrp="1"/>
-          </p:cNvSpPr>
-          <p:nvPr>
-            <p:ph type="ftr" sz="quarter" idx="3"/>
-          </p:nvPr>
-        </p:nvSpPr>
-        <p:spPr>
-          <a:xfrm>
-            <a:off x="192088" y="6392596"/>
-            <a:ext cx="1763922" cy="370422"/>
-          </a:xfrm>
-        </p:spPr>
-        <p:txBody>
-          <a:bodyPr/>
-          <a:lstStyle/>
-          <a:p>
-            <a:r>
-              <a:rPr lang="en-US" dirty="0"/>
-              <a:t>Generated with Sigrid</a:t>
-            </a:r>
-          </a:p>
-          <a:p>
-            <a:r>
-              <a:rPr lang="en-US" dirty="0"/>
-              <a:t>for CUSTOMER_NAME</a:t>
             </a:r>
           </a:p>
         </p:txBody>
@@ -43043,8 +40192,8 @@
         </p:nvSpPr>
         <p:spPr>
           <a:xfrm>
-            <a:off x="381600" y="129568"/>
-            <a:ext cx="1663129" cy="228209"/>
+            <a:off x="381600" y="129599"/>
+            <a:ext cx="1663411" cy="228145"/>
           </a:xfrm>
         </p:spPr>
         <p:txBody>
@@ -43057,25 +40206,6 @@
               <a:rPr lang="en-US" dirty="0"/>
               <a:t>Open Source Health</a:t>
             </a:r>
-          </a:p>
-        </p:txBody>
-      </p:sp>
-      <p:sp>
-        <p:nvSpPr>
-          <p:cNvPr id="3" name="Content Placeholder 2"/>
-          <p:cNvSpPr>
-            <a:spLocks noGrp="1"/>
-          </p:cNvSpPr>
-          <p:nvPr>
-            <p:ph sz="quarter" idx="13"/>
-          </p:nvPr>
-        </p:nvSpPr>
-        <p:spPr/>
-        <p:txBody>
-          <a:bodyPr/>
-          <a:lstStyle/>
-          <a:p>
-            <a:endParaRPr/>
           </a:p>
         </p:txBody>
       </p:sp>
@@ -43105,63 +40235,29 @@
       </p:sp>
       <p:sp>
         <p:nvSpPr>
-          <p:cNvPr id="7" name="Rectangle 6">
-            <a:extLst>
-              <a:ext uri="{FF2B5EF4-FFF2-40B4-BE49-F238E27FC236}">
-                <a16:creationId xmlns:a16="http://schemas.microsoft.com/office/drawing/2014/main" id="{4D956AE0-666A-B966-0B15-61A5E6C88F75}"/>
-              </a:ext>
-            </a:extLst>
-          </p:cNvPr>
-          <p:cNvSpPr/>
-          <p:nvPr/>
+          <p:cNvPr id="1004" name="Footer Placeholder 1004"/>
+          <p:cNvSpPr>
+            <a:spLocks noGrp="1"/>
+          </p:cNvSpPr>
+          <p:nvPr>
+            <p:ph type="ftr" sz="quarter" idx="3"/>
+          </p:nvPr>
         </p:nvSpPr>
-        <p:spPr>
-          <a:xfrm>
-            <a:off x="0" y="1390132"/>
-            <a:ext cx="12192000" cy="4927867"/>
-          </a:xfrm>
-          <a:prstGeom prst="rect">
-            <a:avLst/>
-          </a:prstGeom>
-          <a:solidFill>
-            <a:schemeClr val="bg1"/>
-          </a:solidFill>
-          <a:ln>
-            <a:noFill/>
-          </a:ln>
-          <a:effectLst>
-            <a:outerShdw blurRad="190500" dist="38100" dir="2700000" algn="tl" rotWithShape="0">
-              <a:prstClr val="black">
-                <a:alpha val="15000"/>
-              </a:prstClr>
-            </a:outerShdw>
-          </a:effectLst>
-        </p:spPr>
-        <p:style>
-          <a:lnRef idx="2">
-            <a:schemeClr val="accent1">
-              <a:shade val="50000"/>
-            </a:schemeClr>
-          </a:lnRef>
-          <a:fillRef idx="1">
-            <a:schemeClr val="accent1"/>
-          </a:fillRef>
-          <a:effectRef idx="0">
-            <a:schemeClr val="accent1"/>
-          </a:effectRef>
-          <a:fontRef idx="minor">
-            <a:schemeClr val="lt1"/>
-          </a:fontRef>
-        </p:style>
+        <p:spPr/>
         <p:txBody>
-          <a:bodyPr lIns="731520" tIns="72000" rIns="108000" bIns="72000" rtlCol="0" anchor="ctr"/>
+          <a:bodyPr/>
           <a:lstStyle/>
           <a:p>
-            <a:endParaRPr lang="nl-NL" sz="1200" b="1" noProof="0" dirty="0">
-              <a:solidFill>
-                <a:schemeClr val="accent1"/>
-              </a:solidFill>
-            </a:endParaRPr>
+            <a:r>
+              <a:rPr lang="en-US" dirty="0"/>
+              <a:t>Generated with Sigrid</a:t>
+            </a:r>
+          </a:p>
+          <a:p>
+            <a:r>
+              <a:rPr lang="en-US" dirty="0"/>
+              <a:t>for CUSTOMER_NAME</a:t>
+            </a:r>
           </a:p>
         </p:txBody>
       </p:sp>
@@ -43751,39 +40847,6 @@
       </p:grpSp>
       <p:sp>
         <p:nvSpPr>
-          <p:cNvPr id="1004" name="Footer Placeholder 1004"/>
-          <p:cNvSpPr>
-            <a:spLocks noGrp="1"/>
-          </p:cNvSpPr>
-          <p:nvPr>
-            <p:ph type="ftr" sz="quarter" idx="3"/>
-          </p:nvPr>
-        </p:nvSpPr>
-        <p:spPr>
-          <a:xfrm>
-            <a:off x="192088" y="6392596"/>
-            <a:ext cx="1763922" cy="370422"/>
-          </a:xfrm>
-        </p:spPr>
-        <p:txBody>
-          <a:bodyPr/>
-          <a:lstStyle/>
-          <a:p>
-            <a:r>
-              <a:rPr lang="en-US" dirty="0"/>
-              <a:t>Generated with Sigrid</a:t>
-            </a:r>
-          </a:p>
-          <a:p>
-            <a:r>
-              <a:rPr lang="en-US" dirty="0"/>
-              <a:t>for CUSTOMER_NAME</a:t>
-            </a:r>
-          </a:p>
-        </p:txBody>
-      </p:sp>
-      <p:sp>
-        <p:nvSpPr>
           <p:cNvPr id="1071" name="TextBox 1071"/>
           <p:cNvSpPr txBox="1"/>
           <p:nvPr/>
@@ -43999,8 +41062,8 @@
         </p:nvSpPr>
         <p:spPr>
           <a:xfrm>
-            <a:off x="381600" y="129568"/>
-            <a:ext cx="1663129" cy="228209"/>
+            <a:off x="381600" y="129599"/>
+            <a:ext cx="1663411" cy="228145"/>
           </a:xfrm>
         </p:spPr>
         <p:txBody>
@@ -44013,25 +41076,6 @@
               <a:rPr lang="en-US" dirty="0"/>
               <a:t>Open Source Health</a:t>
             </a:r>
-          </a:p>
-        </p:txBody>
-      </p:sp>
-      <p:sp>
-        <p:nvSpPr>
-          <p:cNvPr id="3" name="Content Placeholder 2"/>
-          <p:cNvSpPr>
-            <a:spLocks noGrp="1"/>
-          </p:cNvSpPr>
-          <p:nvPr>
-            <p:ph sz="quarter" idx="13"/>
-          </p:nvPr>
-        </p:nvSpPr>
-        <p:spPr/>
-        <p:txBody>
-          <a:bodyPr/>
-          <a:lstStyle/>
-          <a:p>
-            <a:endParaRPr/>
           </a:p>
         </p:txBody>
       </p:sp>
@@ -44061,63 +41105,29 @@
       </p:sp>
       <p:sp>
         <p:nvSpPr>
-          <p:cNvPr id="7" name="Rectangle 6">
-            <a:extLst>
-              <a:ext uri="{FF2B5EF4-FFF2-40B4-BE49-F238E27FC236}">
-                <a16:creationId xmlns:a16="http://schemas.microsoft.com/office/drawing/2014/main" id="{4D956AE0-666A-B966-0B15-61A5E6C88F75}"/>
-              </a:ext>
-            </a:extLst>
-          </p:cNvPr>
-          <p:cNvSpPr/>
-          <p:nvPr/>
+          <p:cNvPr id="1004" name="Footer Placeholder 1004"/>
+          <p:cNvSpPr>
+            <a:spLocks noGrp="1"/>
+          </p:cNvSpPr>
+          <p:nvPr>
+            <p:ph type="ftr" sz="quarter" idx="3"/>
+          </p:nvPr>
         </p:nvSpPr>
-        <p:spPr>
-          <a:xfrm>
-            <a:off x="0" y="1390132"/>
-            <a:ext cx="12192000" cy="4927867"/>
-          </a:xfrm>
-          <a:prstGeom prst="rect">
-            <a:avLst/>
-          </a:prstGeom>
-          <a:solidFill>
-            <a:schemeClr val="bg1"/>
-          </a:solidFill>
-          <a:ln>
-            <a:noFill/>
-          </a:ln>
-          <a:effectLst>
-            <a:outerShdw blurRad="190500" dist="38100" dir="2700000" algn="tl" rotWithShape="0">
-              <a:prstClr val="black">
-                <a:alpha val="15000"/>
-              </a:prstClr>
-            </a:outerShdw>
-          </a:effectLst>
-        </p:spPr>
-        <p:style>
-          <a:lnRef idx="2">
-            <a:schemeClr val="accent1">
-              <a:shade val="50000"/>
-            </a:schemeClr>
-          </a:lnRef>
-          <a:fillRef idx="1">
-            <a:schemeClr val="accent1"/>
-          </a:fillRef>
-          <a:effectRef idx="0">
-            <a:schemeClr val="accent1"/>
-          </a:effectRef>
-          <a:fontRef idx="minor">
-            <a:schemeClr val="lt1"/>
-          </a:fontRef>
-        </p:style>
+        <p:spPr/>
         <p:txBody>
-          <a:bodyPr lIns="731520" tIns="72000" rIns="108000" bIns="72000" rtlCol="0" anchor="ctr"/>
+          <a:bodyPr/>
           <a:lstStyle/>
           <a:p>
-            <a:endParaRPr lang="nl-NL" sz="1200" b="1" noProof="0" dirty="0">
-              <a:solidFill>
-                <a:schemeClr val="accent1"/>
-              </a:solidFill>
-            </a:endParaRPr>
+            <a:r>
+              <a:rPr lang="en-US" dirty="0"/>
+              <a:t>Generated with Sigrid</a:t>
+            </a:r>
+          </a:p>
+          <a:p>
+            <a:r>
+              <a:rPr lang="en-US" dirty="0"/>
+              <a:t>for CUSTOMER_NAME</a:t>
+            </a:r>
           </a:p>
         </p:txBody>
       </p:sp>
@@ -44707,39 +41717,6 @@
       </p:grpSp>
       <p:sp>
         <p:nvSpPr>
-          <p:cNvPr id="1004" name="Footer Placeholder 1004"/>
-          <p:cNvSpPr>
-            <a:spLocks noGrp="1"/>
-          </p:cNvSpPr>
-          <p:nvPr>
-            <p:ph type="ftr" sz="quarter" idx="3"/>
-          </p:nvPr>
-        </p:nvSpPr>
-        <p:spPr>
-          <a:xfrm>
-            <a:off x="192088" y="6392596"/>
-            <a:ext cx="1763922" cy="370422"/>
-          </a:xfrm>
-        </p:spPr>
-        <p:txBody>
-          <a:bodyPr/>
-          <a:lstStyle/>
-          <a:p>
-            <a:r>
-              <a:rPr lang="en-US" dirty="0"/>
-              <a:t>Generated with Sigrid</a:t>
-            </a:r>
-          </a:p>
-          <a:p>
-            <a:r>
-              <a:rPr lang="en-US" dirty="0"/>
-              <a:t>for CUSTOMER_NAME</a:t>
-            </a:r>
-          </a:p>
-        </p:txBody>
-      </p:sp>
-      <p:sp>
-        <p:nvSpPr>
           <p:cNvPr id="1071" name="TextBox 1071"/>
           <p:cNvSpPr txBox="1"/>
           <p:nvPr/>
@@ -44955,8 +41932,8 @@
         </p:nvSpPr>
         <p:spPr>
           <a:xfrm>
-            <a:off x="381600" y="129568"/>
-            <a:ext cx="1663129" cy="228209"/>
+            <a:off x="381600" y="129599"/>
+            <a:ext cx="1663129" cy="228145"/>
           </a:xfrm>
         </p:spPr>
         <p:txBody>
@@ -44969,25 +41946,6 @@
               <a:rPr lang="en-US" dirty="0"/>
               <a:t>Open Source Health</a:t>
             </a:r>
-          </a:p>
-        </p:txBody>
-      </p:sp>
-      <p:sp>
-        <p:nvSpPr>
-          <p:cNvPr id="3" name="Content Placeholder 2"/>
-          <p:cNvSpPr>
-            <a:spLocks noGrp="1"/>
-          </p:cNvSpPr>
-          <p:nvPr>
-            <p:ph sz="quarter" idx="13"/>
-          </p:nvPr>
-        </p:nvSpPr>
-        <p:spPr/>
-        <p:txBody>
-          <a:bodyPr/>
-          <a:lstStyle/>
-          <a:p>
-            <a:endParaRPr/>
           </a:p>
         </p:txBody>
       </p:sp>
@@ -45017,63 +41975,29 @@
       </p:sp>
       <p:sp>
         <p:nvSpPr>
-          <p:cNvPr id="7" name="Rectangle 6">
-            <a:extLst>
-              <a:ext uri="{FF2B5EF4-FFF2-40B4-BE49-F238E27FC236}">
-                <a16:creationId xmlns:a16="http://schemas.microsoft.com/office/drawing/2014/main" id="{4D956AE0-666A-B966-0B15-61A5E6C88F75}"/>
-              </a:ext>
-            </a:extLst>
-          </p:cNvPr>
-          <p:cNvSpPr/>
-          <p:nvPr/>
+          <p:cNvPr id="1004" name="Footer Placeholder 1004"/>
+          <p:cNvSpPr>
+            <a:spLocks noGrp="1"/>
+          </p:cNvSpPr>
+          <p:nvPr>
+            <p:ph type="ftr" sz="quarter" idx="3"/>
+          </p:nvPr>
         </p:nvSpPr>
-        <p:spPr>
-          <a:xfrm>
-            <a:off x="0" y="1390132"/>
-            <a:ext cx="12192000" cy="4927867"/>
-          </a:xfrm>
-          <a:prstGeom prst="rect">
-            <a:avLst/>
-          </a:prstGeom>
-          <a:solidFill>
-            <a:schemeClr val="bg1"/>
-          </a:solidFill>
-          <a:ln>
-            <a:noFill/>
-          </a:ln>
-          <a:effectLst>
-            <a:outerShdw blurRad="190500" dist="38100" dir="2700000" algn="tl" rotWithShape="0">
-              <a:prstClr val="black">
-                <a:alpha val="15000"/>
-              </a:prstClr>
-            </a:outerShdw>
-          </a:effectLst>
-        </p:spPr>
-        <p:style>
-          <a:lnRef idx="2">
-            <a:schemeClr val="accent1">
-              <a:shade val="50000"/>
-            </a:schemeClr>
-          </a:lnRef>
-          <a:fillRef idx="1">
-            <a:schemeClr val="accent1"/>
-          </a:fillRef>
-          <a:effectRef idx="0">
-            <a:schemeClr val="accent1"/>
-          </a:effectRef>
-          <a:fontRef idx="minor">
-            <a:schemeClr val="lt1"/>
-          </a:fontRef>
-        </p:style>
+        <p:spPr/>
         <p:txBody>
-          <a:bodyPr lIns="731520" tIns="72000" rIns="108000" bIns="72000" rtlCol="0" anchor="ctr"/>
+          <a:bodyPr/>
           <a:lstStyle/>
           <a:p>
-            <a:endParaRPr lang="nl-NL" sz="1200" b="1" noProof="0" dirty="0">
-              <a:solidFill>
-                <a:schemeClr val="accent1"/>
-              </a:solidFill>
-            </a:endParaRPr>
+            <a:r>
+              <a:rPr lang="en-US" dirty="0"/>
+              <a:t>Generated with Sigrid</a:t>
+            </a:r>
+          </a:p>
+          <a:p>
+            <a:r>
+              <a:rPr lang="en-US" dirty="0"/>
+              <a:t>for CUSTOMER_NAME</a:t>
+            </a:r>
           </a:p>
         </p:txBody>
       </p:sp>
@@ -45663,39 +42587,6 @@
       </p:grpSp>
       <p:sp>
         <p:nvSpPr>
-          <p:cNvPr id="1004" name="Footer Placeholder 1004"/>
-          <p:cNvSpPr>
-            <a:spLocks noGrp="1"/>
-          </p:cNvSpPr>
-          <p:nvPr>
-            <p:ph type="ftr" sz="quarter" idx="3"/>
-          </p:nvPr>
-        </p:nvSpPr>
-        <p:spPr>
-          <a:xfrm>
-            <a:off x="192088" y="6392596"/>
-            <a:ext cx="1763922" cy="370422"/>
-          </a:xfrm>
-        </p:spPr>
-        <p:txBody>
-          <a:bodyPr/>
-          <a:lstStyle/>
-          <a:p>
-            <a:r>
-              <a:rPr lang="en-US" dirty="0"/>
-              <a:t>Generated with Sigrid</a:t>
-            </a:r>
-          </a:p>
-          <a:p>
-            <a:r>
-              <a:rPr lang="en-US" dirty="0"/>
-              <a:t>for CUSTOMER_NAME</a:t>
-            </a:r>
-          </a:p>
-        </p:txBody>
-      </p:sp>
-      <p:sp>
-        <p:nvSpPr>
           <p:cNvPr id="1071" name="TextBox 1071"/>
           <p:cNvSpPr txBox="1"/>
           <p:nvPr/>
@@ -45911,8 +42802,8 @@
         </p:nvSpPr>
         <p:spPr>
           <a:xfrm>
-            <a:off x="381600" y="129568"/>
-            <a:ext cx="1663129" cy="228209"/>
+            <a:off x="381600" y="129599"/>
+            <a:ext cx="1663411" cy="228145"/>
           </a:xfrm>
         </p:spPr>
         <p:txBody>
@@ -45925,25 +42816,6 @@
               <a:rPr lang="en-US" dirty="0"/>
               <a:t>Open Source Health</a:t>
             </a:r>
-          </a:p>
-        </p:txBody>
-      </p:sp>
-      <p:sp>
-        <p:nvSpPr>
-          <p:cNvPr id="3" name="Content Placeholder 2"/>
-          <p:cNvSpPr>
-            <a:spLocks noGrp="1"/>
-          </p:cNvSpPr>
-          <p:nvPr>
-            <p:ph sz="quarter" idx="13"/>
-          </p:nvPr>
-        </p:nvSpPr>
-        <p:spPr/>
-        <p:txBody>
-          <a:bodyPr/>
-          <a:lstStyle/>
-          <a:p>
-            <a:endParaRPr/>
           </a:p>
         </p:txBody>
       </p:sp>
@@ -45973,63 +42845,35 @@
       </p:sp>
       <p:sp>
         <p:nvSpPr>
-          <p:cNvPr id="7" name="Rectangle 6">
+          <p:cNvPr id="22" name="Footer Placeholder 1004">
             <a:extLst>
               <a:ext uri="{FF2B5EF4-FFF2-40B4-BE49-F238E27FC236}">
-                <a16:creationId xmlns:a16="http://schemas.microsoft.com/office/drawing/2014/main" id="{4D956AE0-666A-B966-0B15-61A5E6C88F75}"/>
+                <a16:creationId xmlns:a16="http://schemas.microsoft.com/office/drawing/2014/main" id="{3003FB07-67E0-4E3E-208C-0F579A9ED44E}"/>
               </a:ext>
             </a:extLst>
           </p:cNvPr>
-          <p:cNvSpPr/>
-          <p:nvPr/>
+          <p:cNvSpPr>
+            <a:spLocks noGrp="1"/>
+          </p:cNvSpPr>
+          <p:nvPr>
+            <p:ph type="ftr" sz="quarter" idx="3"/>
+          </p:nvPr>
         </p:nvSpPr>
-        <p:spPr>
-          <a:xfrm>
-            <a:off x="0" y="1390132"/>
-            <a:ext cx="12192000" cy="4927867"/>
-          </a:xfrm>
-          <a:prstGeom prst="rect">
-            <a:avLst/>
-          </a:prstGeom>
-          <a:solidFill>
-            <a:schemeClr val="bg1"/>
-          </a:solidFill>
-          <a:ln>
-            <a:noFill/>
-          </a:ln>
-          <a:effectLst>
-            <a:outerShdw blurRad="190500" dist="38100" dir="2700000" algn="tl" rotWithShape="0">
-              <a:prstClr val="black">
-                <a:alpha val="15000"/>
-              </a:prstClr>
-            </a:outerShdw>
-          </a:effectLst>
-        </p:spPr>
-        <p:style>
-          <a:lnRef idx="2">
-            <a:schemeClr val="accent1">
-              <a:shade val="50000"/>
-            </a:schemeClr>
-          </a:lnRef>
-          <a:fillRef idx="1">
-            <a:schemeClr val="accent1"/>
-          </a:fillRef>
-          <a:effectRef idx="0">
-            <a:schemeClr val="accent1"/>
-          </a:effectRef>
-          <a:fontRef idx="minor">
-            <a:schemeClr val="lt1"/>
-          </a:fontRef>
-        </p:style>
+        <p:spPr/>
         <p:txBody>
-          <a:bodyPr lIns="731520" tIns="72000" rIns="108000" bIns="72000" rtlCol="0" anchor="ctr"/>
+          <a:bodyPr/>
           <a:lstStyle/>
           <a:p>
-            <a:endParaRPr lang="nl-NL" sz="1200" b="1" noProof="0" dirty="0">
-              <a:solidFill>
-                <a:schemeClr val="accent1"/>
-              </a:solidFill>
-            </a:endParaRPr>
+            <a:r>
+              <a:rPr lang="en-US" dirty="0"/>
+              <a:t>Generated with Sigrid</a:t>
+            </a:r>
+          </a:p>
+          <a:p>
+            <a:r>
+              <a:rPr lang="en-US" dirty="0"/>
+              <a:t>for CUSTOMER_NAME</a:t>
+            </a:r>
           </a:p>
         </p:txBody>
       </p:sp>
@@ -46882,45 +43726,6 @@
           </p:txBody>
         </p:sp>
       </p:grpSp>
-      <p:sp>
-        <p:nvSpPr>
-          <p:cNvPr id="22" name="Footer Placeholder 1004">
-            <a:extLst>
-              <a:ext uri="{FF2B5EF4-FFF2-40B4-BE49-F238E27FC236}">
-                <a16:creationId xmlns:a16="http://schemas.microsoft.com/office/drawing/2014/main" id="{3003FB07-67E0-4E3E-208C-0F579A9ED44E}"/>
-              </a:ext>
-            </a:extLst>
-          </p:cNvPr>
-          <p:cNvSpPr>
-            <a:spLocks noGrp="1"/>
-          </p:cNvSpPr>
-          <p:nvPr>
-            <p:ph type="ftr" sz="quarter" idx="3"/>
-          </p:nvPr>
-        </p:nvSpPr>
-        <p:spPr>
-          <a:xfrm>
-            <a:off x="192088" y="6392596"/>
-            <a:ext cx="1763922" cy="370422"/>
-          </a:xfrm>
-        </p:spPr>
-        <p:txBody>
-          <a:bodyPr/>
-          <a:lstStyle/>
-          <a:p>
-            <a:r>
-              <a:rPr lang="en-US" dirty="0"/>
-              <a:t>Generated with Sigrid</a:t>
-            </a:r>
-          </a:p>
-          <a:p>
-            <a:r>
-              <a:rPr lang="en-US" dirty="0"/>
-              <a:t>for CUSTOMER_NAME</a:t>
-            </a:r>
-          </a:p>
-        </p:txBody>
-      </p:sp>
     </p:spTree>
     <p:extLst>
       <p:ext uri="{BB962C8B-B14F-4D97-AF65-F5344CB8AC3E}">
@@ -46963,8 +43768,8 @@
         </p:nvSpPr>
         <p:spPr>
           <a:xfrm>
-            <a:off x="381600" y="129568"/>
-            <a:ext cx="1410176" cy="228209"/>
+            <a:off x="381600" y="129599"/>
+            <a:ext cx="1410176" cy="228145"/>
           </a:xfrm>
         </p:spPr>
         <p:txBody>
@@ -46977,25 +43782,6 @@
               <a:rPr lang="en-US" dirty="0"/>
               <a:t>Maintainability</a:t>
             </a:r>
-          </a:p>
-        </p:txBody>
-      </p:sp>
-      <p:sp>
-        <p:nvSpPr>
-          <p:cNvPr id="3" name="Content Placeholder 2"/>
-          <p:cNvSpPr>
-            <a:spLocks noGrp="1"/>
-          </p:cNvSpPr>
-          <p:nvPr>
-            <p:ph sz="quarter" idx="13"/>
-          </p:nvPr>
-        </p:nvSpPr>
-        <p:spPr/>
-        <p:txBody>
-          <a:bodyPr/>
-          <a:lstStyle/>
-          <a:p>
-            <a:endParaRPr/>
           </a:p>
         </p:txBody>
       </p:sp>
@@ -47025,63 +43811,29 @@
       </p:sp>
       <p:sp>
         <p:nvSpPr>
-          <p:cNvPr id="7" name="Rectangle 6">
-            <a:extLst>
-              <a:ext uri="{FF2B5EF4-FFF2-40B4-BE49-F238E27FC236}">
-                <a16:creationId xmlns:a16="http://schemas.microsoft.com/office/drawing/2014/main" id="{4D956AE0-666A-B966-0B15-61A5E6C88F75}"/>
-              </a:ext>
-            </a:extLst>
-          </p:cNvPr>
-          <p:cNvSpPr/>
-          <p:nvPr/>
+          <p:cNvPr id="1004" name="Footer Placeholder 1004"/>
+          <p:cNvSpPr>
+            <a:spLocks noGrp="1"/>
+          </p:cNvSpPr>
+          <p:nvPr>
+            <p:ph type="ftr" sz="quarter" idx="3"/>
+          </p:nvPr>
         </p:nvSpPr>
-        <p:spPr>
-          <a:xfrm>
-            <a:off x="0" y="1390132"/>
-            <a:ext cx="12192000" cy="4927867"/>
-          </a:xfrm>
-          <a:prstGeom prst="rect">
-            <a:avLst/>
-          </a:prstGeom>
-          <a:solidFill>
-            <a:schemeClr val="bg1"/>
-          </a:solidFill>
-          <a:ln>
-            <a:noFill/>
-          </a:ln>
-          <a:effectLst>
-            <a:outerShdw blurRad="190500" dist="38100" dir="2700000" algn="tl" rotWithShape="0">
-              <a:prstClr val="black">
-                <a:alpha val="15000"/>
-              </a:prstClr>
-            </a:outerShdw>
-          </a:effectLst>
-        </p:spPr>
-        <p:style>
-          <a:lnRef idx="2">
-            <a:schemeClr val="accent1">
-              <a:shade val="50000"/>
-            </a:schemeClr>
-          </a:lnRef>
-          <a:fillRef idx="1">
-            <a:schemeClr val="accent1"/>
-          </a:fillRef>
-          <a:effectRef idx="0">
-            <a:schemeClr val="accent1"/>
-          </a:effectRef>
-          <a:fontRef idx="minor">
-            <a:schemeClr val="lt1"/>
-          </a:fontRef>
-        </p:style>
+        <p:spPr/>
         <p:txBody>
-          <a:bodyPr lIns="731520" tIns="72000" rIns="108000" bIns="72000" rtlCol="0" anchor="ctr"/>
+          <a:bodyPr/>
           <a:lstStyle/>
           <a:p>
-            <a:endParaRPr lang="nl-NL" sz="1200" b="1" noProof="0" dirty="0">
-              <a:solidFill>
-                <a:schemeClr val="accent1"/>
-              </a:solidFill>
-            </a:endParaRPr>
+            <a:r>
+              <a:rPr lang="en-US" dirty="0"/>
+              <a:t>Generated with Sigrid</a:t>
+            </a:r>
+          </a:p>
+          <a:p>
+            <a:r>
+              <a:rPr lang="en-US" dirty="0"/>
+              <a:t>for CUSTOMER_NAME</a:t>
+            </a:r>
           </a:p>
         </p:txBody>
       </p:sp>
@@ -47671,39 +44423,6 @@
       </p:grpSp>
       <p:sp>
         <p:nvSpPr>
-          <p:cNvPr id="1004" name="Footer Placeholder 1004"/>
-          <p:cNvSpPr>
-            <a:spLocks noGrp="1"/>
-          </p:cNvSpPr>
-          <p:nvPr>
-            <p:ph type="ftr" sz="quarter" idx="3"/>
-          </p:nvPr>
-        </p:nvSpPr>
-        <p:spPr>
-          <a:xfrm>
-            <a:off x="192088" y="6392596"/>
-            <a:ext cx="1763922" cy="370422"/>
-          </a:xfrm>
-        </p:spPr>
-        <p:txBody>
-          <a:bodyPr/>
-          <a:lstStyle/>
-          <a:p>
-            <a:r>
-              <a:rPr lang="en-US" dirty="0"/>
-              <a:t>Generated with Sigrid</a:t>
-            </a:r>
-          </a:p>
-          <a:p>
-            <a:r>
-              <a:rPr lang="en-US" dirty="0"/>
-              <a:t>for CUSTOMER_NAME</a:t>
-            </a:r>
-          </a:p>
-        </p:txBody>
-      </p:sp>
-      <p:sp>
-        <p:nvSpPr>
           <p:cNvPr id="1071" name="TextBox 1071"/>
           <p:cNvSpPr txBox="1"/>
           <p:nvPr/>
@@ -47919,8 +44638,8 @@
         </p:nvSpPr>
         <p:spPr>
           <a:xfrm>
-            <a:off x="381600" y="129568"/>
-            <a:ext cx="1410176" cy="228209"/>
+            <a:off x="381600" y="129599"/>
+            <a:ext cx="1410176" cy="228145"/>
           </a:xfrm>
         </p:spPr>
         <p:txBody>
@@ -47933,25 +44652,6 @@
               <a:rPr lang="en-US" dirty="0"/>
               <a:t>Maintainability</a:t>
             </a:r>
-          </a:p>
-        </p:txBody>
-      </p:sp>
-      <p:sp>
-        <p:nvSpPr>
-          <p:cNvPr id="3" name="Content Placeholder 2"/>
-          <p:cNvSpPr>
-            <a:spLocks noGrp="1"/>
-          </p:cNvSpPr>
-          <p:nvPr>
-            <p:ph sz="quarter" idx="13"/>
-          </p:nvPr>
-        </p:nvSpPr>
-        <p:spPr/>
-        <p:txBody>
-          <a:bodyPr/>
-          <a:lstStyle/>
-          <a:p>
-            <a:endParaRPr/>
           </a:p>
         </p:txBody>
       </p:sp>
@@ -47981,63 +44681,29 @@
       </p:sp>
       <p:sp>
         <p:nvSpPr>
-          <p:cNvPr id="7" name="Rectangle 6">
-            <a:extLst>
-              <a:ext uri="{FF2B5EF4-FFF2-40B4-BE49-F238E27FC236}">
-                <a16:creationId xmlns:a16="http://schemas.microsoft.com/office/drawing/2014/main" id="{4D956AE0-666A-B966-0B15-61A5E6C88F75}"/>
-              </a:ext>
-            </a:extLst>
-          </p:cNvPr>
-          <p:cNvSpPr/>
-          <p:nvPr/>
+          <p:cNvPr id="2004" name="Footer Placeholder 2004"/>
+          <p:cNvSpPr>
+            <a:spLocks noGrp="1"/>
+          </p:cNvSpPr>
+          <p:nvPr>
+            <p:ph type="ftr" sz="quarter" idx="3"/>
+          </p:nvPr>
         </p:nvSpPr>
-        <p:spPr>
-          <a:xfrm>
-            <a:off x="0" y="1390132"/>
-            <a:ext cx="12192000" cy="4927867"/>
-          </a:xfrm>
-          <a:prstGeom prst="rect">
-            <a:avLst/>
-          </a:prstGeom>
-          <a:solidFill>
-            <a:schemeClr val="bg1"/>
-          </a:solidFill>
-          <a:ln>
-            <a:noFill/>
-          </a:ln>
-          <a:effectLst>
-            <a:outerShdw blurRad="190500" dist="38100" dir="2700000" algn="tl" rotWithShape="0">
-              <a:prstClr val="black">
-                <a:alpha val="15000"/>
-              </a:prstClr>
-            </a:outerShdw>
-          </a:effectLst>
-        </p:spPr>
-        <p:style>
-          <a:lnRef idx="2">
-            <a:schemeClr val="accent1">
-              <a:shade val="50000"/>
-            </a:schemeClr>
-          </a:lnRef>
-          <a:fillRef idx="1">
-            <a:schemeClr val="accent1"/>
-          </a:fillRef>
-          <a:effectRef idx="0">
-            <a:schemeClr val="accent1"/>
-          </a:effectRef>
-          <a:fontRef idx="minor">
-            <a:schemeClr val="lt1"/>
-          </a:fontRef>
-        </p:style>
+        <p:spPr/>
         <p:txBody>
-          <a:bodyPr lIns="731520" tIns="72000" rIns="108000" bIns="72000" rtlCol="0" anchor="ctr"/>
+          <a:bodyPr/>
           <a:lstStyle/>
           <a:p>
-            <a:endParaRPr lang="nl-NL" sz="1200" b="1" noProof="0" dirty="0">
-              <a:solidFill>
-                <a:schemeClr val="accent1"/>
-              </a:solidFill>
-            </a:endParaRPr>
+            <a:r>
+              <a:rPr lang="en-US" dirty="0"/>
+              <a:t>Generated with Sigrid</a:t>
+            </a:r>
+          </a:p>
+          <a:p>
+            <a:r>
+              <a:rPr lang="en-US" dirty="0"/>
+              <a:t>for CUSTOMER_NAME</a:t>
+            </a:r>
           </a:p>
         </p:txBody>
       </p:sp>
@@ -48436,39 +45102,6 @@
             <a:r>
               <a:rPr lang="en-US" sz="800" dirty="0"/>
               <a:t>★</a:t>
-            </a:r>
-          </a:p>
-        </p:txBody>
-      </p:sp>
-      <p:sp>
-        <p:nvSpPr>
-          <p:cNvPr id="2004" name="Footer Placeholder 2004"/>
-          <p:cNvSpPr>
-            <a:spLocks noGrp="1"/>
-          </p:cNvSpPr>
-          <p:nvPr>
-            <p:ph type="ftr" sz="quarter" idx="3"/>
-          </p:nvPr>
-        </p:nvSpPr>
-        <p:spPr>
-          <a:xfrm>
-            <a:off x="192088" y="6392596"/>
-            <a:ext cx="1763922" cy="370422"/>
-          </a:xfrm>
-        </p:spPr>
-        <p:txBody>
-          <a:bodyPr/>
-          <a:lstStyle/>
-          <a:p>
-            <a:r>
-              <a:rPr lang="en-US" dirty="0"/>
-              <a:t>Generated with Sigrid</a:t>
-            </a:r>
-          </a:p>
-          <a:p>
-            <a:r>
-              <a:rPr lang="en-US" dirty="0"/>
-              <a:t>for CUSTOMER_NAME</a:t>
             </a:r>
           </a:p>
         </p:txBody>
@@ -48626,8 +45259,8 @@
         </p:nvSpPr>
         <p:spPr>
           <a:xfrm>
-            <a:off x="381600" y="129568"/>
-            <a:ext cx="1410176" cy="228209"/>
+            <a:off x="381600" y="129599"/>
+            <a:ext cx="1410176" cy="228145"/>
           </a:xfrm>
         </p:spPr>
         <p:txBody>
@@ -48640,25 +45273,6 @@
               <a:rPr lang="en-US" dirty="0"/>
               <a:t>Maintainability</a:t>
             </a:r>
-          </a:p>
-        </p:txBody>
-      </p:sp>
-      <p:sp>
-        <p:nvSpPr>
-          <p:cNvPr id="3" name="Content Placeholder 2"/>
-          <p:cNvSpPr>
-            <a:spLocks noGrp="1"/>
-          </p:cNvSpPr>
-          <p:nvPr>
-            <p:ph sz="quarter" idx="13"/>
-          </p:nvPr>
-        </p:nvSpPr>
-        <p:spPr/>
-        <p:txBody>
-          <a:bodyPr/>
-          <a:lstStyle/>
-          <a:p>
-            <a:endParaRPr/>
           </a:p>
         </p:txBody>
       </p:sp>
@@ -48688,63 +45302,29 @@
       </p:sp>
       <p:sp>
         <p:nvSpPr>
-          <p:cNvPr id="7" name="Rectangle 6">
-            <a:extLst>
-              <a:ext uri="{FF2B5EF4-FFF2-40B4-BE49-F238E27FC236}">
-                <a16:creationId xmlns:a16="http://schemas.microsoft.com/office/drawing/2014/main" id="{4D956AE0-666A-B966-0B15-61A5E6C88F75}"/>
-              </a:ext>
-            </a:extLst>
-          </p:cNvPr>
-          <p:cNvSpPr/>
-          <p:nvPr/>
+          <p:cNvPr id="1004" name="Footer Placeholder 1004"/>
+          <p:cNvSpPr>
+            <a:spLocks noGrp="1"/>
+          </p:cNvSpPr>
+          <p:nvPr>
+            <p:ph type="ftr" sz="quarter" idx="3"/>
+          </p:nvPr>
         </p:nvSpPr>
-        <p:spPr>
-          <a:xfrm>
-            <a:off x="0" y="1390132"/>
-            <a:ext cx="12192000" cy="4927867"/>
-          </a:xfrm>
-          <a:prstGeom prst="rect">
-            <a:avLst/>
-          </a:prstGeom>
-          <a:solidFill>
-            <a:schemeClr val="bg1"/>
-          </a:solidFill>
-          <a:ln>
-            <a:noFill/>
-          </a:ln>
-          <a:effectLst>
-            <a:outerShdw blurRad="190500" dist="38100" dir="2700000" algn="tl" rotWithShape="0">
-              <a:prstClr val="black">
-                <a:alpha val="15000"/>
-              </a:prstClr>
-            </a:outerShdw>
-          </a:effectLst>
-        </p:spPr>
-        <p:style>
-          <a:lnRef idx="2">
-            <a:schemeClr val="accent1">
-              <a:shade val="50000"/>
-            </a:schemeClr>
-          </a:lnRef>
-          <a:fillRef idx="1">
-            <a:schemeClr val="accent1"/>
-          </a:fillRef>
-          <a:effectRef idx="0">
-            <a:schemeClr val="accent1"/>
-          </a:effectRef>
-          <a:fontRef idx="minor">
-            <a:schemeClr val="lt1"/>
-          </a:fontRef>
-        </p:style>
+        <p:spPr/>
         <p:txBody>
-          <a:bodyPr lIns="731520" tIns="72000" rIns="108000" bIns="72000" rtlCol="0" anchor="ctr"/>
+          <a:bodyPr/>
           <a:lstStyle/>
           <a:p>
-            <a:endParaRPr lang="nl-NL" sz="1200" b="1" noProof="0" dirty="0">
-              <a:solidFill>
-                <a:schemeClr val="accent1"/>
-              </a:solidFill>
-            </a:endParaRPr>
+            <a:r>
+              <a:rPr lang="en-US" dirty="0"/>
+              <a:t>Generated with Sigrid</a:t>
+            </a:r>
+          </a:p>
+          <a:p>
+            <a:r>
+              <a:rPr lang="en-US" dirty="0"/>
+              <a:t>for CUSTOMER_NAME</a:t>
+            </a:r>
           </a:p>
         </p:txBody>
       </p:sp>
@@ -49334,39 +45914,6 @@
       </p:grpSp>
       <p:sp>
         <p:nvSpPr>
-          <p:cNvPr id="1004" name="Footer Placeholder 1004"/>
-          <p:cNvSpPr>
-            <a:spLocks noGrp="1"/>
-          </p:cNvSpPr>
-          <p:nvPr>
-            <p:ph type="ftr" sz="quarter" idx="3"/>
-          </p:nvPr>
-        </p:nvSpPr>
-        <p:spPr>
-          <a:xfrm>
-            <a:off x="192088" y="6392596"/>
-            <a:ext cx="1763922" cy="370422"/>
-          </a:xfrm>
-        </p:spPr>
-        <p:txBody>
-          <a:bodyPr/>
-          <a:lstStyle/>
-          <a:p>
-            <a:r>
-              <a:rPr lang="en-US" dirty="0"/>
-              <a:t>Generated with Sigrid</a:t>
-            </a:r>
-          </a:p>
-          <a:p>
-            <a:r>
-              <a:rPr lang="en-US" dirty="0"/>
-              <a:t>for CUSTOMER_NAME</a:t>
-            </a:r>
-          </a:p>
-        </p:txBody>
-      </p:sp>
-      <p:sp>
-        <p:nvSpPr>
           <p:cNvPr id="1071" name="TextBox 1071"/>
           <p:cNvSpPr txBox="1"/>
           <p:nvPr/>
@@ -49582,8 +46129,8 @@
         </p:nvSpPr>
         <p:spPr>
           <a:xfrm>
-            <a:off x="381600" y="129568"/>
-            <a:ext cx="1410176" cy="228209"/>
+            <a:off x="381600" y="129599"/>
+            <a:ext cx="1410176" cy="228145"/>
           </a:xfrm>
         </p:spPr>
         <p:txBody>
@@ -49596,25 +46143,6 @@
               <a:rPr lang="en-US" dirty="0"/>
               <a:t>Maintainability</a:t>
             </a:r>
-          </a:p>
-        </p:txBody>
-      </p:sp>
-      <p:sp>
-        <p:nvSpPr>
-          <p:cNvPr id="3" name="Content Placeholder 2"/>
-          <p:cNvSpPr>
-            <a:spLocks noGrp="1"/>
-          </p:cNvSpPr>
-          <p:nvPr>
-            <p:ph sz="quarter" idx="13"/>
-          </p:nvPr>
-        </p:nvSpPr>
-        <p:spPr/>
-        <p:txBody>
-          <a:bodyPr/>
-          <a:lstStyle/>
-          <a:p>
-            <a:endParaRPr/>
           </a:p>
         </p:txBody>
       </p:sp>
@@ -49644,63 +46172,29 @@
       </p:sp>
       <p:sp>
         <p:nvSpPr>
-          <p:cNvPr id="7" name="Rectangle 6">
-            <a:extLst>
-              <a:ext uri="{FF2B5EF4-FFF2-40B4-BE49-F238E27FC236}">
-                <a16:creationId xmlns:a16="http://schemas.microsoft.com/office/drawing/2014/main" id="{4D956AE0-666A-B966-0B15-61A5E6C88F75}"/>
-              </a:ext>
-            </a:extLst>
-          </p:cNvPr>
-          <p:cNvSpPr/>
-          <p:nvPr/>
+          <p:cNvPr id="2004" name="Footer Placeholder 2004"/>
+          <p:cNvSpPr>
+            <a:spLocks noGrp="1"/>
+          </p:cNvSpPr>
+          <p:nvPr>
+            <p:ph type="ftr" sz="quarter" idx="3"/>
+          </p:nvPr>
         </p:nvSpPr>
-        <p:spPr>
-          <a:xfrm>
-            <a:off x="0" y="1390132"/>
-            <a:ext cx="12192000" cy="4927867"/>
-          </a:xfrm>
-          <a:prstGeom prst="rect">
-            <a:avLst/>
-          </a:prstGeom>
-          <a:solidFill>
-            <a:schemeClr val="bg1"/>
-          </a:solidFill>
-          <a:ln>
-            <a:noFill/>
-          </a:ln>
-          <a:effectLst>
-            <a:outerShdw blurRad="190500" dist="38100" dir="2700000" algn="tl" rotWithShape="0">
-              <a:prstClr val="black">
-                <a:alpha val="15000"/>
-              </a:prstClr>
-            </a:outerShdw>
-          </a:effectLst>
-        </p:spPr>
-        <p:style>
-          <a:lnRef idx="2">
-            <a:schemeClr val="accent1">
-              <a:shade val="50000"/>
-            </a:schemeClr>
-          </a:lnRef>
-          <a:fillRef idx="1">
-            <a:schemeClr val="accent1"/>
-          </a:fillRef>
-          <a:effectRef idx="0">
-            <a:schemeClr val="accent1"/>
-          </a:effectRef>
-          <a:fontRef idx="minor">
-            <a:schemeClr val="lt1"/>
-          </a:fontRef>
-        </p:style>
+        <p:spPr/>
         <p:txBody>
-          <a:bodyPr lIns="731520" tIns="72000" rIns="108000" bIns="72000" rtlCol="0" anchor="ctr"/>
+          <a:bodyPr/>
           <a:lstStyle/>
           <a:p>
-            <a:endParaRPr lang="nl-NL" sz="1200" b="1" noProof="0" dirty="0">
-              <a:solidFill>
-                <a:schemeClr val="accent1"/>
-              </a:solidFill>
-            </a:endParaRPr>
+            <a:r>
+              <a:rPr lang="en-US" dirty="0"/>
+              <a:t>Generated with Sigrid</a:t>
+            </a:r>
+          </a:p>
+          <a:p>
+            <a:r>
+              <a:rPr lang="en-US" dirty="0"/>
+              <a:t>for CUSTOMER_NAME</a:t>
+            </a:r>
           </a:p>
         </p:txBody>
       </p:sp>
@@ -50099,39 +46593,6 @@
             <a:r>
               <a:rPr lang="en-US" sz="800" dirty="0"/>
               <a:t>★</a:t>
-            </a:r>
-          </a:p>
-        </p:txBody>
-      </p:sp>
-      <p:sp>
-        <p:nvSpPr>
-          <p:cNvPr id="2004" name="Footer Placeholder 2004"/>
-          <p:cNvSpPr>
-            <a:spLocks noGrp="1"/>
-          </p:cNvSpPr>
-          <p:nvPr>
-            <p:ph type="ftr" sz="quarter" idx="3"/>
-          </p:nvPr>
-        </p:nvSpPr>
-        <p:spPr>
-          <a:xfrm>
-            <a:off x="192088" y="6392596"/>
-            <a:ext cx="1763922" cy="370422"/>
-          </a:xfrm>
-        </p:spPr>
-        <p:txBody>
-          <a:bodyPr/>
-          <a:lstStyle/>
-          <a:p>
-            <a:r>
-              <a:rPr lang="en-US" dirty="0"/>
-              <a:t>Generated with Sigrid</a:t>
-            </a:r>
-          </a:p>
-          <a:p>
-            <a:r>
-              <a:rPr lang="en-US" dirty="0"/>
-              <a:t>for CUSTOMER_NAME</a:t>
             </a:r>
           </a:p>
         </p:txBody>
@@ -50289,8 +46750,8 @@
         </p:nvSpPr>
         <p:spPr>
           <a:xfrm>
-            <a:off x="381600" y="129568"/>
-            <a:ext cx="1410176" cy="228209"/>
+            <a:off x="381600" y="129599"/>
+            <a:ext cx="1410176" cy="228145"/>
           </a:xfrm>
         </p:spPr>
         <p:txBody>
@@ -50303,25 +46764,6 @@
               <a:rPr lang="en-US" dirty="0"/>
               <a:t>Maintainability</a:t>
             </a:r>
-          </a:p>
-        </p:txBody>
-      </p:sp>
-      <p:sp>
-        <p:nvSpPr>
-          <p:cNvPr id="3" name="Content Placeholder 2"/>
-          <p:cNvSpPr>
-            <a:spLocks noGrp="1"/>
-          </p:cNvSpPr>
-          <p:nvPr>
-            <p:ph sz="quarter" idx="13"/>
-          </p:nvPr>
-        </p:nvSpPr>
-        <p:spPr/>
-        <p:txBody>
-          <a:bodyPr/>
-          <a:lstStyle/>
-          <a:p>
-            <a:endParaRPr/>
           </a:p>
         </p:txBody>
       </p:sp>
@@ -50351,63 +46793,29 @@
       </p:sp>
       <p:sp>
         <p:nvSpPr>
-          <p:cNvPr id="7" name="Rectangle 6">
-            <a:extLst>
-              <a:ext uri="{FF2B5EF4-FFF2-40B4-BE49-F238E27FC236}">
-                <a16:creationId xmlns:a16="http://schemas.microsoft.com/office/drawing/2014/main" id="{4D956AE0-666A-B966-0B15-61A5E6C88F75}"/>
-              </a:ext>
-            </a:extLst>
-          </p:cNvPr>
-          <p:cNvSpPr/>
-          <p:nvPr/>
+          <p:cNvPr id="1004" name="Footer Placeholder 1004"/>
+          <p:cNvSpPr>
+            <a:spLocks noGrp="1"/>
+          </p:cNvSpPr>
+          <p:nvPr>
+            <p:ph type="ftr" sz="quarter" idx="3"/>
+          </p:nvPr>
         </p:nvSpPr>
-        <p:spPr>
-          <a:xfrm>
-            <a:off x="0" y="1390132"/>
-            <a:ext cx="12192000" cy="4927867"/>
-          </a:xfrm>
-          <a:prstGeom prst="rect">
-            <a:avLst/>
-          </a:prstGeom>
-          <a:solidFill>
-            <a:schemeClr val="bg1"/>
-          </a:solidFill>
-          <a:ln>
-            <a:noFill/>
-          </a:ln>
-          <a:effectLst>
-            <a:outerShdw blurRad="190500" dist="38100" dir="2700000" algn="tl" rotWithShape="0">
-              <a:prstClr val="black">
-                <a:alpha val="15000"/>
-              </a:prstClr>
-            </a:outerShdw>
-          </a:effectLst>
-        </p:spPr>
-        <p:style>
-          <a:lnRef idx="2">
-            <a:schemeClr val="accent1">
-              <a:shade val="50000"/>
-            </a:schemeClr>
-          </a:lnRef>
-          <a:fillRef idx="1">
-            <a:schemeClr val="accent1"/>
-          </a:fillRef>
-          <a:effectRef idx="0">
-            <a:schemeClr val="accent1"/>
-          </a:effectRef>
-          <a:fontRef idx="minor">
-            <a:schemeClr val="lt1"/>
-          </a:fontRef>
-        </p:style>
+        <p:spPr/>
         <p:txBody>
-          <a:bodyPr lIns="731520" tIns="72000" rIns="108000" bIns="72000" rtlCol="0" anchor="ctr"/>
+          <a:bodyPr/>
           <a:lstStyle/>
           <a:p>
-            <a:endParaRPr lang="nl-NL" sz="1200" b="1" noProof="0" dirty="0">
-              <a:solidFill>
-                <a:schemeClr val="accent1"/>
-              </a:solidFill>
-            </a:endParaRPr>
+            <a:r>
+              <a:rPr lang="en-US" dirty="0"/>
+              <a:t>Generated with Sigrid</a:t>
+            </a:r>
+          </a:p>
+          <a:p>
+            <a:r>
+              <a:rPr lang="en-US" dirty="0"/>
+              <a:t>for CUSTOMER_NAME</a:t>
+            </a:r>
           </a:p>
         </p:txBody>
       </p:sp>
@@ -50995,39 +47403,6 @@
           </p:txBody>
         </p:sp>
       </p:grpSp>
-      <p:sp>
-        <p:nvSpPr>
-          <p:cNvPr id="1004" name="Footer Placeholder 1004"/>
-          <p:cNvSpPr>
-            <a:spLocks noGrp="1"/>
-          </p:cNvSpPr>
-          <p:nvPr>
-            <p:ph type="ftr" sz="quarter" idx="3"/>
-          </p:nvPr>
-        </p:nvSpPr>
-        <p:spPr>
-          <a:xfrm>
-            <a:off x="192088" y="6392596"/>
-            <a:ext cx="1763922" cy="370422"/>
-          </a:xfrm>
-        </p:spPr>
-        <p:txBody>
-          <a:bodyPr/>
-          <a:lstStyle/>
-          <a:p>
-            <a:r>
-              <a:rPr lang="en-US" dirty="0"/>
-              <a:t>Generated with Sigrid</a:t>
-            </a:r>
-          </a:p>
-          <a:p>
-            <a:r>
-              <a:rPr lang="en-US" dirty="0"/>
-              <a:t>for CUSTOMER_NAME</a:t>
-            </a:r>
-          </a:p>
-        </p:txBody>
-      </p:sp>
       <p:sp>
         <p:nvSpPr>
           <p:cNvPr id="1071" name="TextBox 1071"/>
@@ -52487,15 +48862,6 @@
 </file>
 
 <file path=customXml/item1.xml><?xml version="1.0" encoding="utf-8"?>
-<?mso-contentType ?>
-<FormTemplates xmlns="http://schemas.microsoft.com/sharepoint/v3/contenttype/forms">
-  <Display>DocumentLibraryForm</Display>
-  <Edit>DocumentLibraryForm</Edit>
-  <New>DocumentLibraryForm</New>
-</FormTemplates>
-</file>
-
-<file path=customXml/item2.xml><?xml version="1.0" encoding="utf-8"?>
 <ct:contentTypeSchema xmlns:ct="http://schemas.microsoft.com/office/2006/metadata/contentType" xmlns:ma="http://schemas.microsoft.com/office/2006/metadata/properties/metaAttributes" ct:_="" ma:_="" ma:contentTypeName="Document" ma:contentTypeID="0x0101004DEF897B6A9E5243A3BAB7B7BDA55B95" ma:contentTypeVersion="3" ma:contentTypeDescription="Een nieuw document maken." ma:contentTypeScope="" ma:versionID="0a97628efbdf127f23042160181f1d9a">
   <xsd:schema xmlns:xsd="http://www.w3.org/2001/XMLSchema" xmlns:xs="http://www.w3.org/2001/XMLSchema" xmlns:p="http://schemas.microsoft.com/office/2006/metadata/properties" xmlns:ns2="444ebd02-7183-4d1c-abe9-f175efe83725" targetNamespace="http://schemas.microsoft.com/office/2006/metadata/properties" ma:root="true" ma:fieldsID="44a7a3b93c857102c842f6fb1da07824" ns2:_="">
     <xsd:import namespace="444ebd02-7183-4d1c-abe9-f175efe83725"/>
@@ -52633,21 +48999,22 @@
 </ct:contentTypeSchema>
 </file>
 
-<file path=customXml/item3.xml><?xml version="1.0" encoding="utf-8"?>
+<file path=customXml/item2.xml><?xml version="1.0" encoding="utf-8"?>
 <p:properties xmlns:p="http://schemas.microsoft.com/office/2006/metadata/properties" xmlns:xsi="http://www.w3.org/2001/XMLSchema-instance" xmlns:pc="http://schemas.microsoft.com/office/infopath/2007/PartnerControls">
   <documentManagement/>
 </p:properties>
 </file>
 
-<file path=customXml/itemProps1.xml><?xml version="1.0" encoding="utf-8"?>
-<ds:datastoreItem xmlns:ds="http://schemas.openxmlformats.org/officeDocument/2006/customXml" ds:itemID="{88AD9160-B56A-4FCD-857D-8AE63521E7FB}">
-  <ds:schemaRefs>
-    <ds:schemaRef ds:uri="http://schemas.microsoft.com/sharepoint/v3/contenttype/forms"/>
-  </ds:schemaRefs>
-</ds:datastoreItem>
+<file path=customXml/item3.xml><?xml version="1.0" encoding="utf-8"?>
+<?mso-contentType ?>
+<FormTemplates xmlns="http://schemas.microsoft.com/sharepoint/v3/contenttype/forms">
+  <Display>DocumentLibraryForm</Display>
+  <Edit>DocumentLibraryForm</Edit>
+  <New>DocumentLibraryForm</New>
+</FormTemplates>
 </file>
 
-<file path=customXml/itemProps2.xml><?xml version="1.0" encoding="utf-8"?>
+<file path=customXml/itemProps1.xml><?xml version="1.0" encoding="utf-8"?>
 <ds:datastoreItem xmlns:ds="http://schemas.openxmlformats.org/officeDocument/2006/customXml" ds:itemID="{3AFAF3E6-8A11-4BDC-9823-6F0ACEBB33D3}">
   <ds:schemaRefs>
     <ds:schemaRef ds:uri="http://schemas.microsoft.com/office/2006/metadata/contentType"/>
@@ -52665,7 +49032,7 @@
 </ds:datastoreItem>
 </file>
 
-<file path=customXml/itemProps3.xml><?xml version="1.0" encoding="utf-8"?>
+<file path=customXml/itemProps2.xml><?xml version="1.0" encoding="utf-8"?>
 <ds:datastoreItem xmlns:ds="http://schemas.openxmlformats.org/officeDocument/2006/customXml" ds:itemID="{7575A4A2-8818-4F4B-AD30-88D568004514}">
   <ds:schemaRefs>
     <ds:schemaRef ds:uri="http://schemas.microsoft.com/office/2006/metadata/properties"/>
@@ -52679,4 +49046,12 @@
     <ds:schemaRef ds:uri="http://purl.org/dc/dcmitype/"/>
   </ds:schemaRefs>
 </ds:datastoreItem>
+</file>
+
+<file path=customXml/itemProps3.xml><?xml version="1.0" encoding="utf-8"?>
+<ds:datastoreItem xmlns:ds="http://schemas.openxmlformats.org/officeDocument/2006/customXml" ds:itemID="{88AD9160-B56A-4FCD-857D-8AE63521E7FB}">
+  <ds:schemaRefs>
+    <ds:schemaRef ds:uri="http://schemas.microsoft.com/sharepoint/v3/contenttype/forms"/>
+  </ds:schemaRefs>
+</ds:datastoreItem>
 </file>